--- a/public/fun/pack/pptx/review/보장점검양식_33_가족점검_완행열차.pptx
+++ b/public/fun/pack/pptx/review/보장점검양식_33_가족점검_완행열차.pptx
@@ -3286,6 +3286,14 @@
 <file path=ppt/slides/slide1.xml><?xml version="1.0" encoding="utf-8"?>
 <p:sld xmlns:a="http://schemas.openxmlformats.org/drawingml/2006/main" xmlns:p="http://schemas.openxmlformats.org/presentationml/2006/main" xmlns:r="http://schemas.openxmlformats.org/officeDocument/2006/relationships">
   <p:cSld>
+    <p:bg>
+      <p:bgPr>
+        <a:solidFill>
+          <a:srgbClr val="493127"/>
+        </a:solidFill>
+        <a:effectLst/>
+      </p:bgPr>
+    </p:bg>
     <p:spTree>
       <p:nvGrpSpPr>
         <p:cNvPr id="1" name=""/>
@@ -3293,30 +3301,106 @@
         <p:nvPr/>
       </p:nvGrpSpPr>
       <p:grpSpPr/>
-      <p:pic>
-        <p:nvPicPr>
-          <p:cNvPr id="3" name="표지 그림" descr="review-33.jpg"/>
-          <p:cNvPicPr>
-            <a:picLocks noChangeAspect="1"/>
-          </p:cNvPicPr>
+      <p:sp>
+        <p:nvSpPr>
+          <p:cNvPr id="3" name="장식"/>
+          <p:cNvSpPr/>
           <p:nvPr/>
-        </p:nvPicPr>
-        <p:blipFill>
-          <a:blip r:embed="rId2"/>
-          <a:stretch>
-            <a:fillRect/>
-          </a:stretch>
-        </p:blipFill>
-        <p:spPr>
-          <a:xfrm>
-            <a:off x="0" y="0"/>
-            <a:ext cx="12191695" cy="6858000"/>
+        </p:nvSpPr>
+        <p:spPr>
+          <a:xfrm>
+            <a:off x="1463003" y="960120"/>
+            <a:ext cx="3657508" cy="4526280"/>
+          </a:xfrm>
+          <a:prstGeom prst="roundRect">
+            <a:avLst>
+              <a:gd name="adj" fmla="val 4000"/>
+            </a:avLst>
+          </a:prstGeom>
+          <a:solidFill>
+            <a:srgbClr val="D89579"/>
+          </a:solidFill>
+          <a:ln>
+            <a:noFill/>
+          </a:ln>
+        </p:spPr>
+        <p:txBody>
+          <a:bodyPr rtlCol="0" anchor="ctr"/>
+          <a:lstStyle/>
+          <a:p>
+            <a:pPr algn="ctr"/>
+          </a:p>
+        </p:txBody>
+      </p:sp>
+      <p:sp>
+        <p:nvSpPr>
+          <p:cNvPr id="4" name="장식"/>
+          <p:cNvSpPr/>
+          <p:nvPr/>
+        </p:nvSpPr>
+        <p:spPr>
+          <a:xfrm>
+            <a:off x="975335" y="1234439"/>
+            <a:ext cx="3657508" cy="4526280"/>
+          </a:xfrm>
+          <a:prstGeom prst="roundRect">
+            <a:avLst>
+              <a:gd name="adj" fmla="val 4000"/>
+            </a:avLst>
+          </a:prstGeom>
+          <a:noFill/>
+          <a:ln w="9525">
+            <a:solidFill>
+              <a:srgbClr val="FFFFFF"/>
+            </a:solidFill>
+          </a:ln>
+        </p:spPr>
+        <p:txBody>
+          <a:bodyPr rtlCol="0" anchor="ctr"/>
+          <a:lstStyle/>
+          <a:p>
+            <a:pPr algn="ctr"/>
+          </a:p>
+        </p:txBody>
+      </p:sp>
+      <p:sp>
+        <p:nvSpPr>
+          <p:cNvPr id="5" name="라벨"/>
+          <p:cNvSpPr txBox="1"/>
+          <p:nvPr/>
+        </p:nvSpPr>
+        <p:spPr>
+          <a:xfrm>
+            <a:off x="6827349" y="2148840"/>
+            <a:ext cx="4632844" cy="274320"/>
           </a:xfrm>
           <a:prstGeom prst="rect">
             <a:avLst/>
           </a:prstGeom>
-        </p:spPr>
-      </p:pic>
+          <a:noFill/>
+        </p:spPr>
+        <p:txBody>
+          <a:bodyPr wrap="square" lIns="54864" rIns="54864" tIns="27432" bIns="27432" anchor="t">
+            <a:noAutofit/>
+          </a:bodyPr>
+          <a:lstStyle/>
+          <a:p>
+            <a:pPr algn="l">
+              <a:lnSpc>
+                <a:spcPct val="115000"/>
+              </a:lnSpc>
+            </a:pPr>
+            <a:r>
+              <a:rPr sz="1000" b="1" i="0" spc="250">
+                <a:solidFill>
+                  <a:srgbClr val="FFFFFF"/>
+                </a:solidFill>
+              </a:rPr>
+              <a:t>INSURANCE CHECK</a:t>
+            </a:r>
+          </a:p>
+        </p:txBody>
+      </p:sp>
       <p:sp>
         <p:nvSpPr>
           <p:cNvPr id="2" name="Title 1"/>
@@ -3329,8 +3413,8 @@
         </p:nvSpPr>
         <p:spPr>
           <a:xfrm>
-            <a:off x="853418" y="2057400"/>
-            <a:ext cx="6095847" cy="1554480"/>
+            <a:off x="6827349" y="2606040"/>
+            <a:ext cx="4632844" cy="1188720"/>
           </a:xfrm>
         </p:spPr>
         <p:txBody>
@@ -3347,7 +3431,7 @@
             <a:r>
               <a:rPr sz="3600" b="1" i="0">
                 <a:solidFill>
-                  <a:srgbClr val="422D24"/>
+                  <a:srgbClr val="FFFFFF"/>
                 </a:solidFill>
               </a:rPr>
               <a:t>우리 보험 점검 시간</a:t>
@@ -3357,14 +3441,14 @@
       </p:sp>
       <p:sp>
         <p:nvSpPr>
-          <p:cNvPr id="4" name="한 줄 문구"/>
+          <p:cNvPr id="6" name="한 줄 문구"/>
           <p:cNvSpPr txBox="1"/>
           <p:nvPr/>
         </p:nvSpPr>
         <p:spPr>
           <a:xfrm>
-            <a:off x="853418" y="3749039"/>
-            <a:ext cx="6095847" cy="822960"/>
+            <a:off x="6827349" y="3886200"/>
+            <a:ext cx="4632844" cy="822960"/>
           </a:xfrm>
           <a:prstGeom prst="rect">
             <a:avLst/>
@@ -3383,9 +3467,9 @@
               </a:lnSpc>
             </a:pPr>
             <a:r>
-              <a:rPr sz="1700" b="0" i="1">
+              <a:rPr sz="1700" b="0" i="0">
                 <a:solidFill>
-                  <a:srgbClr val="422D24"/>
+                  <a:srgbClr val="FFFFFF"/>
                 </a:solidFill>
               </a:rPr>
               <a:t>가족 건강 이야기를 하면서 점검합니다</a:t>
@@ -3395,14 +3479,14 @@
       </p:sp>
       <p:sp>
         <p:nvSpPr>
-          <p:cNvPr id="5" name="안내 문구"/>
+          <p:cNvPr id="7" name="안내 문구"/>
           <p:cNvSpPr txBox="1"/>
           <p:nvPr/>
         </p:nvSpPr>
         <p:spPr>
           <a:xfrm>
-            <a:off x="853418" y="4617720"/>
-            <a:ext cx="6095847" cy="914400"/>
+            <a:off x="6827349" y="4754880"/>
+            <a:ext cx="4632844" cy="914400"/>
           </a:xfrm>
           <a:prstGeom prst="rect">
             <a:avLst/>
@@ -3423,10 +3507,10 @@
             <a:r>
               <a:rPr sz="1400" b="0" i="0">
                 <a:solidFill>
-                  <a:srgbClr val="666666"/>
+                  <a:srgbClr val="FFFFFF"/>
                 </a:solidFill>
               </a:rPr>
-              <a:t>가족 점검 · 2027. 00. 00</a:t>
+              <a:t>가족 점검 · 날짜 입력</a:t>
             </a:r>
           </a:p>
           <a:p>
@@ -3438,7 +3522,7 @@
             <a:r>
               <a:rPr sz="1400" b="0" i="0">
                 <a:solidFill>
-                  <a:srgbClr val="666666"/>
+                  <a:srgbClr val="FFFFFF"/>
                 </a:solidFill>
               </a:rPr>
               <a:t>가입 내용을 정리하고 함께 확인하는 양식</a:t>
@@ -3460,7 +3544,7 @@
     <p:bg>
       <p:bgPr>
         <a:solidFill>
-          <a:srgbClr val="FFFFFF"/>
+          <a:srgbClr val="F6DFD5"/>
         </a:solidFill>
         <a:effectLst/>
       </p:bgPr>
@@ -3480,14 +3564,14 @@
         </p:nvSpPr>
         <p:spPr>
           <a:xfrm>
-            <a:off x="9905695" y="-1463040"/>
-            <a:ext cx="3840480" cy="3840480"/>
+            <a:off x="10180015" y="-1645920"/>
+            <a:ext cx="3474720" cy="3474720"/>
           </a:xfrm>
           <a:prstGeom prst="ellipse">
             <a:avLst/>
           </a:prstGeom>
           <a:solidFill>
-            <a:srgbClr val="EBDCD6"/>
+            <a:srgbClr val="EBC0AD"/>
           </a:solidFill>
           <a:ln>
             <a:noFill/>
@@ -3503,20 +3587,58 @@
       </p:sp>
       <p:sp>
         <p:nvSpPr>
-          <p:cNvPr id="4" name="장식"/>
+          <p:cNvPr id="4" name="상단 라벨"/>
+          <p:cNvSpPr txBox="1"/>
+          <p:nvPr/>
+        </p:nvSpPr>
+        <p:spPr>
+          <a:xfrm>
+            <a:off x="640080" y="274320"/>
+            <a:ext cx="5486400" cy="274320"/>
+          </a:xfrm>
+          <a:prstGeom prst="rect">
+            <a:avLst/>
+          </a:prstGeom>
+          <a:noFill/>
+        </p:spPr>
+        <p:txBody>
+          <a:bodyPr wrap="square" lIns="54864" rIns="54864" tIns="27432" bIns="27432" anchor="ctr">
+            <a:noAutofit/>
+          </a:bodyPr>
+          <a:lstStyle/>
+          <a:p>
+            <a:pPr algn="l">
+              <a:lnSpc>
+                <a:spcPct val="115000"/>
+              </a:lnSpc>
+            </a:pPr>
+            <a:r>
+              <a:rPr sz="900" b="1" i="0" spc="250">
+                <a:solidFill>
+                  <a:srgbClr val="26231F"/>
+                </a:solidFill>
+              </a:rPr>
+              <a:t>INSURANCE CHECK</a:t>
+            </a:r>
+          </a:p>
+        </p:txBody>
+      </p:sp>
+      <p:sp>
+        <p:nvSpPr>
+          <p:cNvPr id="5" name="포인트"/>
           <p:cNvSpPr/>
           <p:nvPr/>
         </p:nvSpPr>
         <p:spPr>
           <a:xfrm>
-            <a:off x="11094415" y="274320"/>
-            <a:ext cx="411480" cy="411480"/>
-          </a:xfrm>
-          <a:prstGeom prst="ellipse">
+            <a:off x="11048695" y="502919"/>
+            <a:ext cx="274320" cy="274320"/>
+          </a:xfrm>
+          <a:prstGeom prst="round2SameRect">
             <a:avLst/>
           </a:prstGeom>
           <a:solidFill>
-            <a:srgbClr val="855A47"/>
+            <a:srgbClr val="FFFFFF"/>
           </a:solidFill>
           <a:ln>
             <a:noFill/>
@@ -3542,8 +3664,8 @@
         </p:nvSpPr>
         <p:spPr>
           <a:xfrm>
-            <a:off x="640080" y="457200"/>
-            <a:ext cx="9722815" cy="868680"/>
+            <a:off x="640080" y="658368"/>
+            <a:ext cx="9082735" cy="868680"/>
           </a:xfrm>
         </p:spPr>
         <p:txBody>
@@ -3560,7 +3682,7 @@
             <a:r>
               <a:rPr sz="3000" b="1" i="0">
                 <a:solidFill>
-                  <a:srgbClr val="422D24"/>
+                  <a:srgbClr val="26231F"/>
                 </a:solidFill>
               </a:rPr>
               <a:t>점검 대상 현황</a:t>
@@ -3570,14 +3692,14 @@
       </p:sp>
       <p:graphicFrame>
         <p:nvGraphicFramePr>
-          <p:cNvPr id="5" name="표"/>
+          <p:cNvPr id="6" name="표"/>
           <p:cNvGraphicFramePr>
             <a:graphicFrameLocks noGrp="1"/>
           </p:cNvGraphicFramePr>
           <p:nvPr/>
         </p:nvGraphicFramePr>
         <p:xfrm>
-          <a:off x="640080" y="1600200"/>
+          <a:off x="640080" y="1783080"/>
           <a:ext cx="10911532" cy="3657600"/>
         </p:xfrm>
         <a:graphic>
@@ -3602,7 +3724,7 @@
                       <a:r>
                         <a:rPr sz="1600" b="1">
                           <a:solidFill>
-                            <a:srgbClr val="FFFFFF"/>
+                            <a:srgbClr val="26231F"/>
                           </a:solidFill>
                         </a:rPr>
                         <a:t>구분</a:t>
@@ -3612,30 +3734,30 @@
                   <a:tcPr anchor="ctr" marL="73152" marR="73152">
                     <a:lnL w="9525" cap="flat" cmpd="sng" algn="ctr">
                       <a:solidFill>
-                        <a:srgbClr val="855A47"/>
+                        <a:srgbClr val="D89579"/>
                       </a:solidFill>
                       <a:prstDash val="solid"/>
                     </a:lnL>
                     <a:lnR w="9525" cap="flat" cmpd="sng" algn="ctr">
                       <a:solidFill>
-                        <a:srgbClr val="855A47"/>
+                        <a:srgbClr val="D89579"/>
                       </a:solidFill>
                       <a:prstDash val="solid"/>
                     </a:lnR>
                     <a:lnT w="9525" cap="flat" cmpd="sng" algn="ctr">
                       <a:solidFill>
-                        <a:srgbClr val="855A47"/>
+                        <a:srgbClr val="D89579"/>
                       </a:solidFill>
                       <a:prstDash val="solid"/>
                     </a:lnT>
                     <a:lnB w="9525" cap="flat" cmpd="sng" algn="ctr">
                       <a:solidFill>
-                        <a:srgbClr val="855A47"/>
+                        <a:srgbClr val="D89579"/>
                       </a:solidFill>
                       <a:prstDash val="solid"/>
                     </a:lnB>
                     <a:solidFill>
-                      <a:srgbClr val="855A47"/>
+                      <a:srgbClr val="D89579"/>
                     </a:solidFill>
                   </a:tcPr>
                 </a:tc>
@@ -3648,7 +3770,7 @@
                       <a:r>
                         <a:rPr sz="1600" b="1">
                           <a:solidFill>
-                            <a:srgbClr val="FFFFFF"/>
+                            <a:srgbClr val="26231F"/>
                           </a:solidFill>
                         </a:rPr>
                         <a:t>아빠</a:t>
@@ -3658,30 +3780,30 @@
                   <a:tcPr anchor="ctr" marL="73152" marR="73152">
                     <a:lnL w="9525" cap="flat" cmpd="sng" algn="ctr">
                       <a:solidFill>
-                        <a:srgbClr val="855A47"/>
+                        <a:srgbClr val="D89579"/>
                       </a:solidFill>
                       <a:prstDash val="solid"/>
                     </a:lnL>
                     <a:lnR w="9525" cap="flat" cmpd="sng" algn="ctr">
                       <a:solidFill>
-                        <a:srgbClr val="855A47"/>
+                        <a:srgbClr val="D89579"/>
                       </a:solidFill>
                       <a:prstDash val="solid"/>
                     </a:lnR>
                     <a:lnT w="9525" cap="flat" cmpd="sng" algn="ctr">
                       <a:solidFill>
-                        <a:srgbClr val="855A47"/>
+                        <a:srgbClr val="D89579"/>
                       </a:solidFill>
                       <a:prstDash val="solid"/>
                     </a:lnT>
                     <a:lnB w="9525" cap="flat" cmpd="sng" algn="ctr">
                       <a:solidFill>
-                        <a:srgbClr val="855A47"/>
+                        <a:srgbClr val="D89579"/>
                       </a:solidFill>
                       <a:prstDash val="solid"/>
                     </a:lnB>
                     <a:solidFill>
-                      <a:srgbClr val="855A47"/>
+                      <a:srgbClr val="D89579"/>
                     </a:solidFill>
                   </a:tcPr>
                 </a:tc>
@@ -3694,7 +3816,7 @@
                       <a:r>
                         <a:rPr sz="1600" b="1">
                           <a:solidFill>
-                            <a:srgbClr val="FFFFFF"/>
+                            <a:srgbClr val="26231F"/>
                           </a:solidFill>
                         </a:rPr>
                         <a:t>엄마</a:t>
@@ -3704,30 +3826,30 @@
                   <a:tcPr anchor="ctr" marL="73152" marR="73152">
                     <a:lnL w="9525" cap="flat" cmpd="sng" algn="ctr">
                       <a:solidFill>
-                        <a:srgbClr val="855A47"/>
+                        <a:srgbClr val="D89579"/>
                       </a:solidFill>
                       <a:prstDash val="solid"/>
                     </a:lnL>
                     <a:lnR w="9525" cap="flat" cmpd="sng" algn="ctr">
                       <a:solidFill>
-                        <a:srgbClr val="855A47"/>
+                        <a:srgbClr val="D89579"/>
                       </a:solidFill>
                       <a:prstDash val="solid"/>
                     </a:lnR>
                     <a:lnT w="9525" cap="flat" cmpd="sng" algn="ctr">
                       <a:solidFill>
-                        <a:srgbClr val="855A47"/>
+                        <a:srgbClr val="D89579"/>
                       </a:solidFill>
                       <a:prstDash val="solid"/>
                     </a:lnT>
                     <a:lnB w="9525" cap="flat" cmpd="sng" algn="ctr">
                       <a:solidFill>
-                        <a:srgbClr val="855A47"/>
+                        <a:srgbClr val="D89579"/>
                       </a:solidFill>
                       <a:prstDash val="solid"/>
                     </a:lnB>
                     <a:solidFill>
-                      <a:srgbClr val="855A47"/>
+                      <a:srgbClr val="D89579"/>
                     </a:solidFill>
                   </a:tcPr>
                 </a:tc>
@@ -3740,7 +3862,7 @@
                       <a:r>
                         <a:rPr sz="1600" b="1">
                           <a:solidFill>
-                            <a:srgbClr val="FFFFFF"/>
+                            <a:srgbClr val="26231F"/>
                           </a:solidFill>
                         </a:rPr>
                         <a:t>자녀</a:t>
@@ -3750,30 +3872,30 @@
                   <a:tcPr anchor="ctr" marL="73152" marR="73152">
                     <a:lnL w="9525" cap="flat" cmpd="sng" algn="ctr">
                       <a:solidFill>
-                        <a:srgbClr val="855A47"/>
+                        <a:srgbClr val="D89579"/>
                       </a:solidFill>
                       <a:prstDash val="solid"/>
                     </a:lnL>
                     <a:lnR w="9525" cap="flat" cmpd="sng" algn="ctr">
                       <a:solidFill>
-                        <a:srgbClr val="855A47"/>
+                        <a:srgbClr val="D89579"/>
                       </a:solidFill>
                       <a:prstDash val="solid"/>
                     </a:lnR>
                     <a:lnT w="9525" cap="flat" cmpd="sng" algn="ctr">
                       <a:solidFill>
-                        <a:srgbClr val="855A47"/>
+                        <a:srgbClr val="D89579"/>
                       </a:solidFill>
                       <a:prstDash val="solid"/>
                     </a:lnT>
                     <a:lnB w="9525" cap="flat" cmpd="sng" algn="ctr">
                       <a:solidFill>
-                        <a:srgbClr val="855A47"/>
+                        <a:srgbClr val="D89579"/>
                       </a:solidFill>
                       <a:prstDash val="solid"/>
                     </a:lnB>
                     <a:solidFill>
-                      <a:srgbClr val="855A47"/>
+                      <a:srgbClr val="D89579"/>
                     </a:solidFill>
                   </a:tcPr>
                 </a:tc>
@@ -3788,7 +3910,7 @@
                       <a:r>
                         <a:rPr sz="1600" b="1">
                           <a:solidFill>
-                            <a:srgbClr val="422D24"/>
+                            <a:srgbClr val="493127"/>
                           </a:solidFill>
                         </a:rPr>
                         <a:t>이름</a:t>
@@ -3798,30 +3920,30 @@
                   <a:tcPr anchor="ctr" marL="73152" marR="73152">
                     <a:lnL w="9525" cap="flat" cmpd="sng" algn="ctr">
                       <a:solidFill>
-                        <a:srgbClr val="EBDCD6"/>
+                        <a:srgbClr val="F6DFD5"/>
                       </a:solidFill>
                       <a:prstDash val="solid"/>
                     </a:lnL>
                     <a:lnR w="9525" cap="flat" cmpd="sng" algn="ctr">
                       <a:solidFill>
-                        <a:srgbClr val="EBDCD6"/>
+                        <a:srgbClr val="F6DFD5"/>
                       </a:solidFill>
                       <a:prstDash val="solid"/>
                     </a:lnR>
                     <a:lnT w="9525" cap="flat" cmpd="sng" algn="ctr">
                       <a:solidFill>
-                        <a:srgbClr val="EBDCD6"/>
+                        <a:srgbClr val="F6DFD5"/>
                       </a:solidFill>
                       <a:prstDash val="solid"/>
                     </a:lnT>
                     <a:lnB w="9525" cap="flat" cmpd="sng" algn="ctr">
                       <a:solidFill>
-                        <a:srgbClr val="EBDCD6"/>
+                        <a:srgbClr val="F6DFD5"/>
                       </a:solidFill>
                       <a:prstDash val="solid"/>
                     </a:lnB>
                     <a:solidFill>
-                      <a:srgbClr val="EBDCD6"/>
+                      <a:srgbClr val="F6DFD5"/>
                     </a:solidFill>
                   </a:tcPr>
                 </a:tc>
@@ -3834,7 +3956,7 @@
                       <a:r>
                         <a:rPr sz="1600" b="0">
                           <a:solidFill>
-                            <a:srgbClr val="2B2B2B"/>
+                            <a:srgbClr val="26231F"/>
                           </a:solidFill>
                         </a:rPr>
                         <a:t/>
@@ -3844,25 +3966,25 @@
                   <a:tcPr anchor="ctr" marL="73152" marR="73152">
                     <a:lnL w="9525" cap="flat" cmpd="sng" algn="ctr">
                       <a:solidFill>
-                        <a:srgbClr val="EBDCD6"/>
+                        <a:srgbClr val="F6DFD5"/>
                       </a:solidFill>
                       <a:prstDash val="solid"/>
                     </a:lnL>
                     <a:lnR w="9525" cap="flat" cmpd="sng" algn="ctr">
                       <a:solidFill>
-                        <a:srgbClr val="EBDCD6"/>
+                        <a:srgbClr val="F6DFD5"/>
                       </a:solidFill>
                       <a:prstDash val="solid"/>
                     </a:lnR>
                     <a:lnT w="9525" cap="flat" cmpd="sng" algn="ctr">
                       <a:solidFill>
-                        <a:srgbClr val="EBDCD6"/>
+                        <a:srgbClr val="F6DFD5"/>
                       </a:solidFill>
                       <a:prstDash val="solid"/>
                     </a:lnT>
                     <a:lnB w="9525" cap="flat" cmpd="sng" algn="ctr">
                       <a:solidFill>
-                        <a:srgbClr val="EBDCD6"/>
+                        <a:srgbClr val="F6DFD5"/>
                       </a:solidFill>
                       <a:prstDash val="solid"/>
                     </a:lnB>
@@ -3880,7 +4002,7 @@
                       <a:r>
                         <a:rPr sz="1600" b="0">
                           <a:solidFill>
-                            <a:srgbClr val="2B2B2B"/>
+                            <a:srgbClr val="26231F"/>
                           </a:solidFill>
                         </a:rPr>
                         <a:t/>
@@ -3890,25 +4012,25 @@
                   <a:tcPr anchor="ctr" marL="73152" marR="73152">
                     <a:lnL w="9525" cap="flat" cmpd="sng" algn="ctr">
                       <a:solidFill>
-                        <a:srgbClr val="EBDCD6"/>
+                        <a:srgbClr val="F6DFD5"/>
                       </a:solidFill>
                       <a:prstDash val="solid"/>
                     </a:lnL>
                     <a:lnR w="9525" cap="flat" cmpd="sng" algn="ctr">
                       <a:solidFill>
-                        <a:srgbClr val="EBDCD6"/>
+                        <a:srgbClr val="F6DFD5"/>
                       </a:solidFill>
                       <a:prstDash val="solid"/>
                     </a:lnR>
                     <a:lnT w="9525" cap="flat" cmpd="sng" algn="ctr">
                       <a:solidFill>
-                        <a:srgbClr val="EBDCD6"/>
+                        <a:srgbClr val="F6DFD5"/>
                       </a:solidFill>
                       <a:prstDash val="solid"/>
                     </a:lnT>
                     <a:lnB w="9525" cap="flat" cmpd="sng" algn="ctr">
                       <a:solidFill>
-                        <a:srgbClr val="EBDCD6"/>
+                        <a:srgbClr val="F6DFD5"/>
                       </a:solidFill>
                       <a:prstDash val="solid"/>
                     </a:lnB>
@@ -3926,7 +4048,7 @@
                       <a:r>
                         <a:rPr sz="1600" b="0">
                           <a:solidFill>
-                            <a:srgbClr val="2B2B2B"/>
+                            <a:srgbClr val="26231F"/>
                           </a:solidFill>
                         </a:rPr>
                         <a:t/>
@@ -3936,25 +4058,25 @@
                   <a:tcPr anchor="ctr" marL="73152" marR="73152">
                     <a:lnL w="9525" cap="flat" cmpd="sng" algn="ctr">
                       <a:solidFill>
-                        <a:srgbClr val="EBDCD6"/>
+                        <a:srgbClr val="F6DFD5"/>
                       </a:solidFill>
                       <a:prstDash val="solid"/>
                     </a:lnL>
                     <a:lnR w="9525" cap="flat" cmpd="sng" algn="ctr">
                       <a:solidFill>
-                        <a:srgbClr val="EBDCD6"/>
+                        <a:srgbClr val="F6DFD5"/>
                       </a:solidFill>
                       <a:prstDash val="solid"/>
                     </a:lnR>
                     <a:lnT w="9525" cap="flat" cmpd="sng" algn="ctr">
                       <a:solidFill>
-                        <a:srgbClr val="EBDCD6"/>
+                        <a:srgbClr val="F6DFD5"/>
                       </a:solidFill>
                       <a:prstDash val="solid"/>
                     </a:lnT>
                     <a:lnB w="9525" cap="flat" cmpd="sng" algn="ctr">
                       <a:solidFill>
-                        <a:srgbClr val="EBDCD6"/>
+                        <a:srgbClr val="F6DFD5"/>
                       </a:solidFill>
                       <a:prstDash val="solid"/>
                     </a:lnB>
@@ -3974,7 +4096,7 @@
                       <a:r>
                         <a:rPr sz="1600" b="1">
                           <a:solidFill>
-                            <a:srgbClr val="422D24"/>
+                            <a:srgbClr val="493127"/>
                           </a:solidFill>
                         </a:rPr>
                         <a:t>나이</a:t>
@@ -3984,30 +4106,30 @@
                   <a:tcPr anchor="ctr" marL="73152" marR="73152">
                     <a:lnL w="9525" cap="flat" cmpd="sng" algn="ctr">
                       <a:solidFill>
-                        <a:srgbClr val="EBDCD6"/>
+                        <a:srgbClr val="F6DFD5"/>
                       </a:solidFill>
                       <a:prstDash val="solid"/>
                     </a:lnL>
                     <a:lnR w="9525" cap="flat" cmpd="sng" algn="ctr">
                       <a:solidFill>
-                        <a:srgbClr val="EBDCD6"/>
+                        <a:srgbClr val="F6DFD5"/>
                       </a:solidFill>
                       <a:prstDash val="solid"/>
                     </a:lnR>
                     <a:lnT w="9525" cap="flat" cmpd="sng" algn="ctr">
                       <a:solidFill>
-                        <a:srgbClr val="EBDCD6"/>
+                        <a:srgbClr val="F6DFD5"/>
                       </a:solidFill>
                       <a:prstDash val="solid"/>
                     </a:lnT>
                     <a:lnB w="9525" cap="flat" cmpd="sng" algn="ctr">
                       <a:solidFill>
-                        <a:srgbClr val="EBDCD6"/>
+                        <a:srgbClr val="F6DFD5"/>
                       </a:solidFill>
                       <a:prstDash val="solid"/>
                     </a:lnB>
                     <a:solidFill>
-                      <a:srgbClr val="EBDCD6"/>
+                      <a:srgbClr val="F6DFD5"/>
                     </a:solidFill>
                   </a:tcPr>
                 </a:tc>
@@ -4020,7 +4142,7 @@
                       <a:r>
                         <a:rPr sz="1600" b="0">
                           <a:solidFill>
-                            <a:srgbClr val="2B2B2B"/>
+                            <a:srgbClr val="26231F"/>
                           </a:solidFill>
                         </a:rPr>
                         <a:t/>
@@ -4030,30 +4152,30 @@
                   <a:tcPr anchor="ctr" marL="73152" marR="73152">
                     <a:lnL w="9525" cap="flat" cmpd="sng" algn="ctr">
                       <a:solidFill>
-                        <a:srgbClr val="EBDCD6"/>
+                        <a:srgbClr val="F6DFD5"/>
                       </a:solidFill>
                       <a:prstDash val="solid"/>
                     </a:lnL>
                     <a:lnR w="9525" cap="flat" cmpd="sng" algn="ctr">
                       <a:solidFill>
-                        <a:srgbClr val="EBDCD6"/>
+                        <a:srgbClr val="F6DFD5"/>
                       </a:solidFill>
                       <a:prstDash val="solid"/>
                     </a:lnR>
                     <a:lnT w="9525" cap="flat" cmpd="sng" algn="ctr">
                       <a:solidFill>
-                        <a:srgbClr val="EBDCD6"/>
+                        <a:srgbClr val="F6DFD5"/>
                       </a:solidFill>
                       <a:prstDash val="solid"/>
                     </a:lnT>
                     <a:lnB w="9525" cap="flat" cmpd="sng" algn="ctr">
                       <a:solidFill>
-                        <a:srgbClr val="EBDCD6"/>
+                        <a:srgbClr val="F6DFD5"/>
                       </a:solidFill>
                       <a:prstDash val="solid"/>
                     </a:lnB>
                     <a:solidFill>
-                      <a:srgbClr val="F8F4F2"/>
+                      <a:srgbClr val="FBF1EC"/>
                     </a:solidFill>
                   </a:tcPr>
                 </a:tc>
@@ -4066,7 +4188,7 @@
                       <a:r>
                         <a:rPr sz="1600" b="0">
                           <a:solidFill>
-                            <a:srgbClr val="2B2B2B"/>
+                            <a:srgbClr val="26231F"/>
                           </a:solidFill>
                         </a:rPr>
                         <a:t/>
@@ -4076,30 +4198,30 @@
                   <a:tcPr anchor="ctr" marL="73152" marR="73152">
                     <a:lnL w="9525" cap="flat" cmpd="sng" algn="ctr">
                       <a:solidFill>
-                        <a:srgbClr val="EBDCD6"/>
+                        <a:srgbClr val="F6DFD5"/>
                       </a:solidFill>
                       <a:prstDash val="solid"/>
                     </a:lnL>
                     <a:lnR w="9525" cap="flat" cmpd="sng" algn="ctr">
                       <a:solidFill>
-                        <a:srgbClr val="EBDCD6"/>
+                        <a:srgbClr val="F6DFD5"/>
                       </a:solidFill>
                       <a:prstDash val="solid"/>
                     </a:lnR>
                     <a:lnT w="9525" cap="flat" cmpd="sng" algn="ctr">
                       <a:solidFill>
-                        <a:srgbClr val="EBDCD6"/>
+                        <a:srgbClr val="F6DFD5"/>
                       </a:solidFill>
                       <a:prstDash val="solid"/>
                     </a:lnT>
                     <a:lnB w="9525" cap="flat" cmpd="sng" algn="ctr">
                       <a:solidFill>
-                        <a:srgbClr val="EBDCD6"/>
+                        <a:srgbClr val="F6DFD5"/>
                       </a:solidFill>
                       <a:prstDash val="solid"/>
                     </a:lnB>
                     <a:solidFill>
-                      <a:srgbClr val="F8F4F2"/>
+                      <a:srgbClr val="FBF1EC"/>
                     </a:solidFill>
                   </a:tcPr>
                 </a:tc>
@@ -4112,7 +4234,7 @@
                       <a:r>
                         <a:rPr sz="1600" b="0">
                           <a:solidFill>
-                            <a:srgbClr val="2B2B2B"/>
+                            <a:srgbClr val="26231F"/>
                           </a:solidFill>
                         </a:rPr>
                         <a:t/>
@@ -4122,30 +4244,30 @@
                   <a:tcPr anchor="ctr" marL="73152" marR="73152">
                     <a:lnL w="9525" cap="flat" cmpd="sng" algn="ctr">
                       <a:solidFill>
-                        <a:srgbClr val="EBDCD6"/>
+                        <a:srgbClr val="F6DFD5"/>
                       </a:solidFill>
                       <a:prstDash val="solid"/>
                     </a:lnL>
                     <a:lnR w="9525" cap="flat" cmpd="sng" algn="ctr">
                       <a:solidFill>
-                        <a:srgbClr val="EBDCD6"/>
+                        <a:srgbClr val="F6DFD5"/>
                       </a:solidFill>
                       <a:prstDash val="solid"/>
                     </a:lnR>
                     <a:lnT w="9525" cap="flat" cmpd="sng" algn="ctr">
                       <a:solidFill>
-                        <a:srgbClr val="EBDCD6"/>
+                        <a:srgbClr val="F6DFD5"/>
                       </a:solidFill>
                       <a:prstDash val="solid"/>
                     </a:lnT>
                     <a:lnB w="9525" cap="flat" cmpd="sng" algn="ctr">
                       <a:solidFill>
-                        <a:srgbClr val="EBDCD6"/>
+                        <a:srgbClr val="F6DFD5"/>
                       </a:solidFill>
                       <a:prstDash val="solid"/>
                     </a:lnB>
                     <a:solidFill>
-                      <a:srgbClr val="F8F4F2"/>
+                      <a:srgbClr val="FBF1EC"/>
                     </a:solidFill>
                   </a:tcPr>
                 </a:tc>
@@ -4160,7 +4282,7 @@
                       <a:r>
                         <a:rPr sz="1600" b="1">
                           <a:solidFill>
-                            <a:srgbClr val="422D24"/>
+                            <a:srgbClr val="493127"/>
                           </a:solidFill>
                         </a:rPr>
                         <a:t>직업·학교</a:t>
@@ -4170,30 +4292,30 @@
                   <a:tcPr anchor="ctr" marL="73152" marR="73152">
                     <a:lnL w="9525" cap="flat" cmpd="sng" algn="ctr">
                       <a:solidFill>
-                        <a:srgbClr val="EBDCD6"/>
+                        <a:srgbClr val="F6DFD5"/>
                       </a:solidFill>
                       <a:prstDash val="solid"/>
                     </a:lnL>
                     <a:lnR w="9525" cap="flat" cmpd="sng" algn="ctr">
                       <a:solidFill>
-                        <a:srgbClr val="EBDCD6"/>
+                        <a:srgbClr val="F6DFD5"/>
                       </a:solidFill>
                       <a:prstDash val="solid"/>
                     </a:lnR>
                     <a:lnT w="9525" cap="flat" cmpd="sng" algn="ctr">
                       <a:solidFill>
-                        <a:srgbClr val="EBDCD6"/>
+                        <a:srgbClr val="F6DFD5"/>
                       </a:solidFill>
                       <a:prstDash val="solid"/>
                     </a:lnT>
                     <a:lnB w="9525" cap="flat" cmpd="sng" algn="ctr">
                       <a:solidFill>
-                        <a:srgbClr val="EBDCD6"/>
+                        <a:srgbClr val="F6DFD5"/>
                       </a:solidFill>
                       <a:prstDash val="solid"/>
                     </a:lnB>
                     <a:solidFill>
-                      <a:srgbClr val="EBDCD6"/>
+                      <a:srgbClr val="F6DFD5"/>
                     </a:solidFill>
                   </a:tcPr>
                 </a:tc>
@@ -4206,7 +4328,7 @@
                       <a:r>
                         <a:rPr sz="1600" b="0">
                           <a:solidFill>
-                            <a:srgbClr val="2B2B2B"/>
+                            <a:srgbClr val="26231F"/>
                           </a:solidFill>
                         </a:rPr>
                         <a:t/>
@@ -4216,25 +4338,25 @@
                   <a:tcPr anchor="ctr" marL="73152" marR="73152">
                     <a:lnL w="9525" cap="flat" cmpd="sng" algn="ctr">
                       <a:solidFill>
-                        <a:srgbClr val="EBDCD6"/>
+                        <a:srgbClr val="F6DFD5"/>
                       </a:solidFill>
                       <a:prstDash val="solid"/>
                     </a:lnL>
                     <a:lnR w="9525" cap="flat" cmpd="sng" algn="ctr">
                       <a:solidFill>
-                        <a:srgbClr val="EBDCD6"/>
+                        <a:srgbClr val="F6DFD5"/>
                       </a:solidFill>
                       <a:prstDash val="solid"/>
                     </a:lnR>
                     <a:lnT w="9525" cap="flat" cmpd="sng" algn="ctr">
                       <a:solidFill>
-                        <a:srgbClr val="EBDCD6"/>
+                        <a:srgbClr val="F6DFD5"/>
                       </a:solidFill>
                       <a:prstDash val="solid"/>
                     </a:lnT>
                     <a:lnB w="9525" cap="flat" cmpd="sng" algn="ctr">
                       <a:solidFill>
-                        <a:srgbClr val="EBDCD6"/>
+                        <a:srgbClr val="F6DFD5"/>
                       </a:solidFill>
                       <a:prstDash val="solid"/>
                     </a:lnB>
@@ -4252,7 +4374,7 @@
                       <a:r>
                         <a:rPr sz="1600" b="0">
                           <a:solidFill>
-                            <a:srgbClr val="2B2B2B"/>
+                            <a:srgbClr val="26231F"/>
                           </a:solidFill>
                         </a:rPr>
                         <a:t/>
@@ -4262,25 +4384,25 @@
                   <a:tcPr anchor="ctr" marL="73152" marR="73152">
                     <a:lnL w="9525" cap="flat" cmpd="sng" algn="ctr">
                       <a:solidFill>
-                        <a:srgbClr val="EBDCD6"/>
+                        <a:srgbClr val="F6DFD5"/>
                       </a:solidFill>
                       <a:prstDash val="solid"/>
                     </a:lnL>
                     <a:lnR w="9525" cap="flat" cmpd="sng" algn="ctr">
                       <a:solidFill>
-                        <a:srgbClr val="EBDCD6"/>
+                        <a:srgbClr val="F6DFD5"/>
                       </a:solidFill>
                       <a:prstDash val="solid"/>
                     </a:lnR>
                     <a:lnT w="9525" cap="flat" cmpd="sng" algn="ctr">
                       <a:solidFill>
-                        <a:srgbClr val="EBDCD6"/>
+                        <a:srgbClr val="F6DFD5"/>
                       </a:solidFill>
                       <a:prstDash val="solid"/>
                     </a:lnT>
                     <a:lnB w="9525" cap="flat" cmpd="sng" algn="ctr">
                       <a:solidFill>
-                        <a:srgbClr val="EBDCD6"/>
+                        <a:srgbClr val="F6DFD5"/>
                       </a:solidFill>
                       <a:prstDash val="solid"/>
                     </a:lnB>
@@ -4298,7 +4420,7 @@
                       <a:r>
                         <a:rPr sz="1600" b="0">
                           <a:solidFill>
-                            <a:srgbClr val="2B2B2B"/>
+                            <a:srgbClr val="26231F"/>
                           </a:solidFill>
                         </a:rPr>
                         <a:t/>
@@ -4308,25 +4430,25 @@
                   <a:tcPr anchor="ctr" marL="73152" marR="73152">
                     <a:lnL w="9525" cap="flat" cmpd="sng" algn="ctr">
                       <a:solidFill>
-                        <a:srgbClr val="EBDCD6"/>
+                        <a:srgbClr val="F6DFD5"/>
                       </a:solidFill>
                       <a:prstDash val="solid"/>
                     </a:lnL>
                     <a:lnR w="9525" cap="flat" cmpd="sng" algn="ctr">
                       <a:solidFill>
-                        <a:srgbClr val="EBDCD6"/>
+                        <a:srgbClr val="F6DFD5"/>
                       </a:solidFill>
                       <a:prstDash val="solid"/>
                     </a:lnR>
                     <a:lnT w="9525" cap="flat" cmpd="sng" algn="ctr">
                       <a:solidFill>
-                        <a:srgbClr val="EBDCD6"/>
+                        <a:srgbClr val="F6DFD5"/>
                       </a:solidFill>
                       <a:prstDash val="solid"/>
                     </a:lnT>
                     <a:lnB w="9525" cap="flat" cmpd="sng" algn="ctr">
                       <a:solidFill>
-                        <a:srgbClr val="EBDCD6"/>
+                        <a:srgbClr val="F6DFD5"/>
                       </a:solidFill>
                       <a:prstDash val="solid"/>
                     </a:lnB>
@@ -4346,7 +4468,7 @@
                       <a:r>
                         <a:rPr sz="1600" b="1">
                           <a:solidFill>
-                            <a:srgbClr val="422D24"/>
+                            <a:srgbClr val="493127"/>
                           </a:solidFill>
                         </a:rPr>
                         <a:t>메모</a:t>
@@ -4356,30 +4478,30 @@
                   <a:tcPr anchor="ctr" marL="73152" marR="73152">
                     <a:lnL w="9525" cap="flat" cmpd="sng" algn="ctr">
                       <a:solidFill>
-                        <a:srgbClr val="EBDCD6"/>
+                        <a:srgbClr val="F6DFD5"/>
                       </a:solidFill>
                       <a:prstDash val="solid"/>
                     </a:lnL>
                     <a:lnR w="9525" cap="flat" cmpd="sng" algn="ctr">
                       <a:solidFill>
-                        <a:srgbClr val="EBDCD6"/>
+                        <a:srgbClr val="F6DFD5"/>
                       </a:solidFill>
                       <a:prstDash val="solid"/>
                     </a:lnR>
                     <a:lnT w="9525" cap="flat" cmpd="sng" algn="ctr">
                       <a:solidFill>
-                        <a:srgbClr val="EBDCD6"/>
+                        <a:srgbClr val="F6DFD5"/>
                       </a:solidFill>
                       <a:prstDash val="solid"/>
                     </a:lnT>
                     <a:lnB w="9525" cap="flat" cmpd="sng" algn="ctr">
                       <a:solidFill>
-                        <a:srgbClr val="EBDCD6"/>
+                        <a:srgbClr val="F6DFD5"/>
                       </a:solidFill>
                       <a:prstDash val="solid"/>
                     </a:lnB>
                     <a:solidFill>
-                      <a:srgbClr val="EBDCD6"/>
+                      <a:srgbClr val="F6DFD5"/>
                     </a:solidFill>
                   </a:tcPr>
                 </a:tc>
@@ -4392,7 +4514,7 @@
                       <a:r>
                         <a:rPr sz="1600" b="0">
                           <a:solidFill>
-                            <a:srgbClr val="2B2B2B"/>
+                            <a:srgbClr val="26231F"/>
                           </a:solidFill>
                         </a:rPr>
                         <a:t/>
@@ -4402,30 +4524,30 @@
                   <a:tcPr anchor="ctr" marL="73152" marR="73152">
                     <a:lnL w="9525" cap="flat" cmpd="sng" algn="ctr">
                       <a:solidFill>
-                        <a:srgbClr val="EBDCD6"/>
+                        <a:srgbClr val="F6DFD5"/>
                       </a:solidFill>
                       <a:prstDash val="solid"/>
                     </a:lnL>
                     <a:lnR w="9525" cap="flat" cmpd="sng" algn="ctr">
                       <a:solidFill>
-                        <a:srgbClr val="EBDCD6"/>
+                        <a:srgbClr val="F6DFD5"/>
                       </a:solidFill>
                       <a:prstDash val="solid"/>
                     </a:lnR>
                     <a:lnT w="9525" cap="flat" cmpd="sng" algn="ctr">
                       <a:solidFill>
-                        <a:srgbClr val="EBDCD6"/>
+                        <a:srgbClr val="F6DFD5"/>
                       </a:solidFill>
                       <a:prstDash val="solid"/>
                     </a:lnT>
                     <a:lnB w="9525" cap="flat" cmpd="sng" algn="ctr">
                       <a:solidFill>
-                        <a:srgbClr val="EBDCD6"/>
+                        <a:srgbClr val="F6DFD5"/>
                       </a:solidFill>
                       <a:prstDash val="solid"/>
                     </a:lnB>
                     <a:solidFill>
-                      <a:srgbClr val="F8F4F2"/>
+                      <a:srgbClr val="FBF1EC"/>
                     </a:solidFill>
                   </a:tcPr>
                 </a:tc>
@@ -4438,7 +4560,7 @@
                       <a:r>
                         <a:rPr sz="1600" b="0">
                           <a:solidFill>
-                            <a:srgbClr val="2B2B2B"/>
+                            <a:srgbClr val="26231F"/>
                           </a:solidFill>
                         </a:rPr>
                         <a:t/>
@@ -4448,30 +4570,30 @@
                   <a:tcPr anchor="ctr" marL="73152" marR="73152">
                     <a:lnL w="9525" cap="flat" cmpd="sng" algn="ctr">
                       <a:solidFill>
-                        <a:srgbClr val="EBDCD6"/>
+                        <a:srgbClr val="F6DFD5"/>
                       </a:solidFill>
                       <a:prstDash val="solid"/>
                     </a:lnL>
                     <a:lnR w="9525" cap="flat" cmpd="sng" algn="ctr">
                       <a:solidFill>
-                        <a:srgbClr val="EBDCD6"/>
+                        <a:srgbClr val="F6DFD5"/>
                       </a:solidFill>
                       <a:prstDash val="solid"/>
                     </a:lnR>
                     <a:lnT w="9525" cap="flat" cmpd="sng" algn="ctr">
                       <a:solidFill>
-                        <a:srgbClr val="EBDCD6"/>
+                        <a:srgbClr val="F6DFD5"/>
                       </a:solidFill>
                       <a:prstDash val="solid"/>
                     </a:lnT>
                     <a:lnB w="9525" cap="flat" cmpd="sng" algn="ctr">
                       <a:solidFill>
-                        <a:srgbClr val="EBDCD6"/>
+                        <a:srgbClr val="F6DFD5"/>
                       </a:solidFill>
                       <a:prstDash val="solid"/>
                     </a:lnB>
                     <a:solidFill>
-                      <a:srgbClr val="F8F4F2"/>
+                      <a:srgbClr val="FBF1EC"/>
                     </a:solidFill>
                   </a:tcPr>
                 </a:tc>
@@ -4484,7 +4606,7 @@
                       <a:r>
                         <a:rPr sz="1600" b="0">
                           <a:solidFill>
-                            <a:srgbClr val="2B2B2B"/>
+                            <a:srgbClr val="26231F"/>
                           </a:solidFill>
                         </a:rPr>
                         <a:t/>
@@ -4494,30 +4616,30 @@
                   <a:tcPr anchor="ctr" marL="73152" marR="73152">
                     <a:lnL w="9525" cap="flat" cmpd="sng" algn="ctr">
                       <a:solidFill>
-                        <a:srgbClr val="EBDCD6"/>
+                        <a:srgbClr val="F6DFD5"/>
                       </a:solidFill>
                       <a:prstDash val="solid"/>
                     </a:lnL>
                     <a:lnR w="9525" cap="flat" cmpd="sng" algn="ctr">
                       <a:solidFill>
-                        <a:srgbClr val="EBDCD6"/>
+                        <a:srgbClr val="F6DFD5"/>
                       </a:solidFill>
                       <a:prstDash val="solid"/>
                     </a:lnR>
                     <a:lnT w="9525" cap="flat" cmpd="sng" algn="ctr">
                       <a:solidFill>
-                        <a:srgbClr val="EBDCD6"/>
+                        <a:srgbClr val="F6DFD5"/>
                       </a:solidFill>
                       <a:prstDash val="solid"/>
                     </a:lnT>
                     <a:lnB w="9525" cap="flat" cmpd="sng" algn="ctr">
                       <a:solidFill>
-                        <a:srgbClr val="EBDCD6"/>
+                        <a:srgbClr val="F6DFD5"/>
                       </a:solidFill>
                       <a:prstDash val="solid"/>
                     </a:lnB>
                     <a:solidFill>
-                      <a:srgbClr val="F8F4F2"/>
+                      <a:srgbClr val="FBF1EC"/>
                     </a:solidFill>
                   </a:tcPr>
                 </a:tc>
@@ -4540,7 +4662,7 @@
     <p:bg>
       <p:bgPr>
         <a:solidFill>
-          <a:srgbClr val="FFFFFF"/>
+          <a:srgbClr val="F6DFD5"/>
         </a:solidFill>
         <a:effectLst/>
       </p:bgPr>
@@ -4560,14 +4682,14 @@
         </p:nvSpPr>
         <p:spPr>
           <a:xfrm>
-            <a:off x="9905695" y="-1463040"/>
-            <a:ext cx="3840480" cy="3840480"/>
+            <a:off x="10180015" y="-1645920"/>
+            <a:ext cx="3474720" cy="3474720"/>
           </a:xfrm>
           <a:prstGeom prst="ellipse">
             <a:avLst/>
           </a:prstGeom>
           <a:solidFill>
-            <a:srgbClr val="EBDCD6"/>
+            <a:srgbClr val="EBC0AD"/>
           </a:solidFill>
           <a:ln>
             <a:noFill/>
@@ -4583,20 +4705,58 @@
       </p:sp>
       <p:sp>
         <p:nvSpPr>
-          <p:cNvPr id="4" name="장식"/>
+          <p:cNvPr id="4" name="상단 라벨"/>
+          <p:cNvSpPr txBox="1"/>
+          <p:nvPr/>
+        </p:nvSpPr>
+        <p:spPr>
+          <a:xfrm>
+            <a:off x="640080" y="274320"/>
+            <a:ext cx="5486400" cy="274320"/>
+          </a:xfrm>
+          <a:prstGeom prst="rect">
+            <a:avLst/>
+          </a:prstGeom>
+          <a:noFill/>
+        </p:spPr>
+        <p:txBody>
+          <a:bodyPr wrap="square" lIns="54864" rIns="54864" tIns="27432" bIns="27432" anchor="ctr">
+            <a:noAutofit/>
+          </a:bodyPr>
+          <a:lstStyle/>
+          <a:p>
+            <a:pPr algn="l">
+              <a:lnSpc>
+                <a:spcPct val="115000"/>
+              </a:lnSpc>
+            </a:pPr>
+            <a:r>
+              <a:rPr sz="900" b="1" i="0" spc="250">
+                <a:solidFill>
+                  <a:srgbClr val="26231F"/>
+                </a:solidFill>
+              </a:rPr>
+              <a:t>INSURANCE CHECK</a:t>
+            </a:r>
+          </a:p>
+        </p:txBody>
+      </p:sp>
+      <p:sp>
+        <p:nvSpPr>
+          <p:cNvPr id="5" name="포인트"/>
           <p:cNvSpPr/>
           <p:nvPr/>
         </p:nvSpPr>
         <p:spPr>
           <a:xfrm>
-            <a:off x="11094415" y="274320"/>
-            <a:ext cx="411480" cy="411480"/>
-          </a:xfrm>
-          <a:prstGeom prst="ellipse">
+            <a:off x="11048695" y="502919"/>
+            <a:ext cx="274320" cy="274320"/>
+          </a:xfrm>
+          <a:prstGeom prst="round2SameRect">
             <a:avLst/>
           </a:prstGeom>
           <a:solidFill>
-            <a:srgbClr val="855A47"/>
+            <a:srgbClr val="FFFFFF"/>
           </a:solidFill>
           <a:ln>
             <a:noFill/>
@@ -4622,8 +4782,8 @@
         </p:nvSpPr>
         <p:spPr>
           <a:xfrm>
-            <a:off x="640080" y="457200"/>
-            <a:ext cx="9722815" cy="868680"/>
+            <a:off x="640080" y="658368"/>
+            <a:ext cx="9082735" cy="868680"/>
           </a:xfrm>
         </p:spPr>
         <p:txBody>
@@ -4640,7 +4800,7 @@
             <a:r>
               <a:rPr sz="3000" b="1" i="0">
                 <a:solidFill>
-                  <a:srgbClr val="422D24"/>
+                  <a:srgbClr val="26231F"/>
                 </a:solidFill>
               </a:rPr>
               <a:t>가입한 보험 목록</a:t>
@@ -4650,14 +4810,14 @@
       </p:sp>
       <p:graphicFrame>
         <p:nvGraphicFramePr>
-          <p:cNvPr id="5" name="표"/>
+          <p:cNvPr id="6" name="표"/>
           <p:cNvGraphicFramePr>
             <a:graphicFrameLocks noGrp="1"/>
           </p:cNvGraphicFramePr>
           <p:nvPr/>
         </p:nvGraphicFramePr>
         <p:xfrm>
-          <a:off x="640080" y="1600200"/>
+          <a:off x="640080" y="1783080"/>
           <a:ext cx="10911535" cy="4224528"/>
         </p:xfrm>
         <a:graphic>
@@ -4683,7 +4843,7 @@
                       <a:r>
                         <a:rPr sz="1400" b="1">
                           <a:solidFill>
-                            <a:srgbClr val="FFFFFF"/>
+                            <a:srgbClr val="26231F"/>
                           </a:solidFill>
                         </a:rPr>
                         <a:t>보험회사</a:t>
@@ -4693,30 +4853,30 @@
                   <a:tcPr anchor="ctr" marL="73152" marR="73152">
                     <a:lnL w="9525" cap="flat" cmpd="sng" algn="ctr">
                       <a:solidFill>
-                        <a:srgbClr val="855A47"/>
+                        <a:srgbClr val="D89579"/>
                       </a:solidFill>
                       <a:prstDash val="solid"/>
                     </a:lnL>
                     <a:lnR w="9525" cap="flat" cmpd="sng" algn="ctr">
                       <a:solidFill>
-                        <a:srgbClr val="855A47"/>
+                        <a:srgbClr val="D89579"/>
                       </a:solidFill>
                       <a:prstDash val="solid"/>
                     </a:lnR>
                     <a:lnT w="9525" cap="flat" cmpd="sng" algn="ctr">
                       <a:solidFill>
-                        <a:srgbClr val="855A47"/>
+                        <a:srgbClr val="D89579"/>
                       </a:solidFill>
                       <a:prstDash val="solid"/>
                     </a:lnT>
                     <a:lnB w="9525" cap="flat" cmpd="sng" algn="ctr">
                       <a:solidFill>
-                        <a:srgbClr val="855A47"/>
+                        <a:srgbClr val="D89579"/>
                       </a:solidFill>
                       <a:prstDash val="solid"/>
                     </a:lnB>
                     <a:solidFill>
-                      <a:srgbClr val="855A47"/>
+                      <a:srgbClr val="D89579"/>
                     </a:solidFill>
                   </a:tcPr>
                 </a:tc>
@@ -4729,7 +4889,7 @@
                       <a:r>
                         <a:rPr sz="1400" b="1">
                           <a:solidFill>
-                            <a:srgbClr val="FFFFFF"/>
+                            <a:srgbClr val="26231F"/>
                           </a:solidFill>
                         </a:rPr>
                         <a:t>상품명</a:t>
@@ -4739,30 +4899,30 @@
                   <a:tcPr anchor="ctr" marL="73152" marR="73152">
                     <a:lnL w="9525" cap="flat" cmpd="sng" algn="ctr">
                       <a:solidFill>
-                        <a:srgbClr val="855A47"/>
+                        <a:srgbClr val="D89579"/>
                       </a:solidFill>
                       <a:prstDash val="solid"/>
                     </a:lnL>
                     <a:lnR w="9525" cap="flat" cmpd="sng" algn="ctr">
                       <a:solidFill>
-                        <a:srgbClr val="855A47"/>
+                        <a:srgbClr val="D89579"/>
                       </a:solidFill>
                       <a:prstDash val="solid"/>
                     </a:lnR>
                     <a:lnT w="9525" cap="flat" cmpd="sng" algn="ctr">
                       <a:solidFill>
-                        <a:srgbClr val="855A47"/>
+                        <a:srgbClr val="D89579"/>
                       </a:solidFill>
                       <a:prstDash val="solid"/>
                     </a:lnT>
                     <a:lnB w="9525" cap="flat" cmpd="sng" algn="ctr">
                       <a:solidFill>
-                        <a:srgbClr val="855A47"/>
+                        <a:srgbClr val="D89579"/>
                       </a:solidFill>
                       <a:prstDash val="solid"/>
                     </a:lnB>
                     <a:solidFill>
-                      <a:srgbClr val="855A47"/>
+                      <a:srgbClr val="D89579"/>
                     </a:solidFill>
                   </a:tcPr>
                 </a:tc>
@@ -4775,7 +4935,7 @@
                       <a:r>
                         <a:rPr sz="1400" b="1">
                           <a:solidFill>
-                            <a:srgbClr val="FFFFFF"/>
+                            <a:srgbClr val="26231F"/>
                           </a:solidFill>
                         </a:rPr>
                         <a:t>종류</a:t>
@@ -4785,30 +4945,30 @@
                   <a:tcPr anchor="ctr" marL="73152" marR="73152">
                     <a:lnL w="9525" cap="flat" cmpd="sng" algn="ctr">
                       <a:solidFill>
-                        <a:srgbClr val="855A47"/>
+                        <a:srgbClr val="D89579"/>
                       </a:solidFill>
                       <a:prstDash val="solid"/>
                     </a:lnL>
                     <a:lnR w="9525" cap="flat" cmpd="sng" algn="ctr">
                       <a:solidFill>
-                        <a:srgbClr val="855A47"/>
+                        <a:srgbClr val="D89579"/>
                       </a:solidFill>
                       <a:prstDash val="solid"/>
                     </a:lnR>
                     <a:lnT w="9525" cap="flat" cmpd="sng" algn="ctr">
                       <a:solidFill>
-                        <a:srgbClr val="855A47"/>
+                        <a:srgbClr val="D89579"/>
                       </a:solidFill>
                       <a:prstDash val="solid"/>
                     </a:lnT>
                     <a:lnB w="9525" cap="flat" cmpd="sng" algn="ctr">
                       <a:solidFill>
-                        <a:srgbClr val="855A47"/>
+                        <a:srgbClr val="D89579"/>
                       </a:solidFill>
                       <a:prstDash val="solid"/>
                     </a:lnB>
                     <a:solidFill>
-                      <a:srgbClr val="855A47"/>
+                      <a:srgbClr val="D89579"/>
                     </a:solidFill>
                   </a:tcPr>
                 </a:tc>
@@ -4821,7 +4981,7 @@
                       <a:r>
                         <a:rPr sz="1400" b="1">
                           <a:solidFill>
-                            <a:srgbClr val="FFFFFF"/>
+                            <a:srgbClr val="26231F"/>
                           </a:solidFill>
                         </a:rPr>
                         <a:t>만기일</a:t>
@@ -4831,30 +4991,30 @@
                   <a:tcPr anchor="ctr" marL="73152" marR="73152">
                     <a:lnL w="9525" cap="flat" cmpd="sng" algn="ctr">
                       <a:solidFill>
-                        <a:srgbClr val="855A47"/>
+                        <a:srgbClr val="D89579"/>
                       </a:solidFill>
                       <a:prstDash val="solid"/>
                     </a:lnL>
                     <a:lnR w="9525" cap="flat" cmpd="sng" algn="ctr">
                       <a:solidFill>
-                        <a:srgbClr val="855A47"/>
+                        <a:srgbClr val="D89579"/>
                       </a:solidFill>
                       <a:prstDash val="solid"/>
                     </a:lnR>
                     <a:lnT w="9525" cap="flat" cmpd="sng" algn="ctr">
                       <a:solidFill>
-                        <a:srgbClr val="855A47"/>
+                        <a:srgbClr val="D89579"/>
                       </a:solidFill>
                       <a:prstDash val="solid"/>
                     </a:lnT>
                     <a:lnB w="9525" cap="flat" cmpd="sng" algn="ctr">
                       <a:solidFill>
-                        <a:srgbClr val="855A47"/>
+                        <a:srgbClr val="D89579"/>
                       </a:solidFill>
                       <a:prstDash val="solid"/>
                     </a:lnB>
                     <a:solidFill>
-                      <a:srgbClr val="855A47"/>
+                      <a:srgbClr val="D89579"/>
                     </a:solidFill>
                   </a:tcPr>
                 </a:tc>
@@ -4867,7 +5027,7 @@
                       <a:r>
                         <a:rPr sz="1400" b="1">
                           <a:solidFill>
-                            <a:srgbClr val="FFFFFF"/>
+                            <a:srgbClr val="26231F"/>
                           </a:solidFill>
                         </a:rPr>
                         <a:t>월 보험료</a:t>
@@ -4877,30 +5037,30 @@
                   <a:tcPr anchor="ctr" marL="73152" marR="73152">
                     <a:lnL w="9525" cap="flat" cmpd="sng" algn="ctr">
                       <a:solidFill>
-                        <a:srgbClr val="855A47"/>
+                        <a:srgbClr val="D89579"/>
                       </a:solidFill>
                       <a:prstDash val="solid"/>
                     </a:lnL>
                     <a:lnR w="9525" cap="flat" cmpd="sng" algn="ctr">
                       <a:solidFill>
-                        <a:srgbClr val="855A47"/>
+                        <a:srgbClr val="D89579"/>
                       </a:solidFill>
                       <a:prstDash val="solid"/>
                     </a:lnR>
                     <a:lnT w="9525" cap="flat" cmpd="sng" algn="ctr">
                       <a:solidFill>
-                        <a:srgbClr val="855A47"/>
+                        <a:srgbClr val="D89579"/>
                       </a:solidFill>
                       <a:prstDash val="solid"/>
                     </a:lnT>
                     <a:lnB w="9525" cap="flat" cmpd="sng" algn="ctr">
                       <a:solidFill>
-                        <a:srgbClr val="855A47"/>
+                        <a:srgbClr val="D89579"/>
                       </a:solidFill>
                       <a:prstDash val="solid"/>
                     </a:lnB>
                     <a:solidFill>
-                      <a:srgbClr val="855A47"/>
+                      <a:srgbClr val="D89579"/>
                     </a:solidFill>
                   </a:tcPr>
                 </a:tc>
@@ -4915,7 +5075,7 @@
                       <a:r>
                         <a:rPr sz="1400" b="0">
                           <a:solidFill>
-                            <a:srgbClr val="2B2B2B"/>
+                            <a:srgbClr val="26231F"/>
                           </a:solidFill>
                         </a:rPr>
                         <a:t/>
@@ -4925,25 +5085,25 @@
                   <a:tcPr anchor="ctr" marL="73152" marR="73152">
                     <a:lnL w="9525" cap="flat" cmpd="sng" algn="ctr">
                       <a:solidFill>
-                        <a:srgbClr val="EBDCD6"/>
+                        <a:srgbClr val="F6DFD5"/>
                       </a:solidFill>
                       <a:prstDash val="solid"/>
                     </a:lnL>
                     <a:lnR w="9525" cap="flat" cmpd="sng" algn="ctr">
                       <a:solidFill>
-                        <a:srgbClr val="EBDCD6"/>
+                        <a:srgbClr val="F6DFD5"/>
                       </a:solidFill>
                       <a:prstDash val="solid"/>
                     </a:lnR>
                     <a:lnT w="9525" cap="flat" cmpd="sng" algn="ctr">
                       <a:solidFill>
-                        <a:srgbClr val="EBDCD6"/>
+                        <a:srgbClr val="F6DFD5"/>
                       </a:solidFill>
                       <a:prstDash val="solid"/>
                     </a:lnT>
                     <a:lnB w="9525" cap="flat" cmpd="sng" algn="ctr">
                       <a:solidFill>
-                        <a:srgbClr val="EBDCD6"/>
+                        <a:srgbClr val="F6DFD5"/>
                       </a:solidFill>
                       <a:prstDash val="solid"/>
                     </a:lnB>
@@ -4961,7 +5121,7 @@
                       <a:r>
                         <a:rPr sz="1400" b="0">
                           <a:solidFill>
-                            <a:srgbClr val="2B2B2B"/>
+                            <a:srgbClr val="26231F"/>
                           </a:solidFill>
                         </a:rPr>
                         <a:t/>
@@ -4971,25 +5131,25 @@
                   <a:tcPr anchor="ctr" marL="73152" marR="73152">
                     <a:lnL w="9525" cap="flat" cmpd="sng" algn="ctr">
                       <a:solidFill>
-                        <a:srgbClr val="EBDCD6"/>
+                        <a:srgbClr val="F6DFD5"/>
                       </a:solidFill>
                       <a:prstDash val="solid"/>
                     </a:lnL>
                     <a:lnR w="9525" cap="flat" cmpd="sng" algn="ctr">
                       <a:solidFill>
-                        <a:srgbClr val="EBDCD6"/>
+                        <a:srgbClr val="F6DFD5"/>
                       </a:solidFill>
                       <a:prstDash val="solid"/>
                     </a:lnR>
                     <a:lnT w="9525" cap="flat" cmpd="sng" algn="ctr">
                       <a:solidFill>
-                        <a:srgbClr val="EBDCD6"/>
+                        <a:srgbClr val="F6DFD5"/>
                       </a:solidFill>
                       <a:prstDash val="solid"/>
                     </a:lnT>
                     <a:lnB w="9525" cap="flat" cmpd="sng" algn="ctr">
                       <a:solidFill>
-                        <a:srgbClr val="EBDCD6"/>
+                        <a:srgbClr val="F6DFD5"/>
                       </a:solidFill>
                       <a:prstDash val="solid"/>
                     </a:lnB>
@@ -5007,7 +5167,7 @@
                       <a:r>
                         <a:rPr sz="1400" b="0">
                           <a:solidFill>
-                            <a:srgbClr val="2B2B2B"/>
+                            <a:srgbClr val="26231F"/>
                           </a:solidFill>
                         </a:rPr>
                         <a:t/>
@@ -5017,25 +5177,25 @@
                   <a:tcPr anchor="ctr" marL="73152" marR="73152">
                     <a:lnL w="9525" cap="flat" cmpd="sng" algn="ctr">
                       <a:solidFill>
-                        <a:srgbClr val="EBDCD6"/>
+                        <a:srgbClr val="F6DFD5"/>
                       </a:solidFill>
                       <a:prstDash val="solid"/>
                     </a:lnL>
                     <a:lnR w="9525" cap="flat" cmpd="sng" algn="ctr">
                       <a:solidFill>
-                        <a:srgbClr val="EBDCD6"/>
+                        <a:srgbClr val="F6DFD5"/>
                       </a:solidFill>
                       <a:prstDash val="solid"/>
                     </a:lnR>
                     <a:lnT w="9525" cap="flat" cmpd="sng" algn="ctr">
                       <a:solidFill>
-                        <a:srgbClr val="EBDCD6"/>
+                        <a:srgbClr val="F6DFD5"/>
                       </a:solidFill>
                       <a:prstDash val="solid"/>
                     </a:lnT>
                     <a:lnB w="9525" cap="flat" cmpd="sng" algn="ctr">
                       <a:solidFill>
-                        <a:srgbClr val="EBDCD6"/>
+                        <a:srgbClr val="F6DFD5"/>
                       </a:solidFill>
                       <a:prstDash val="solid"/>
                     </a:lnB>
@@ -5053,7 +5213,7 @@
                       <a:r>
                         <a:rPr sz="1400" b="0">
                           <a:solidFill>
-                            <a:srgbClr val="2B2B2B"/>
+                            <a:srgbClr val="26231F"/>
                           </a:solidFill>
                         </a:rPr>
                         <a:t/>
@@ -5063,25 +5223,25 @@
                   <a:tcPr anchor="ctr" marL="73152" marR="73152">
                     <a:lnL w="9525" cap="flat" cmpd="sng" algn="ctr">
                       <a:solidFill>
-                        <a:srgbClr val="EBDCD6"/>
+                        <a:srgbClr val="F6DFD5"/>
                       </a:solidFill>
                       <a:prstDash val="solid"/>
                     </a:lnL>
                     <a:lnR w="9525" cap="flat" cmpd="sng" algn="ctr">
                       <a:solidFill>
-                        <a:srgbClr val="EBDCD6"/>
+                        <a:srgbClr val="F6DFD5"/>
                       </a:solidFill>
                       <a:prstDash val="solid"/>
                     </a:lnR>
                     <a:lnT w="9525" cap="flat" cmpd="sng" algn="ctr">
                       <a:solidFill>
-                        <a:srgbClr val="EBDCD6"/>
+                        <a:srgbClr val="F6DFD5"/>
                       </a:solidFill>
                       <a:prstDash val="solid"/>
                     </a:lnT>
                     <a:lnB w="9525" cap="flat" cmpd="sng" algn="ctr">
                       <a:solidFill>
-                        <a:srgbClr val="EBDCD6"/>
+                        <a:srgbClr val="F6DFD5"/>
                       </a:solidFill>
                       <a:prstDash val="solid"/>
                     </a:lnB>
@@ -5099,7 +5259,7 @@
                       <a:r>
                         <a:rPr sz="1400" b="0">
                           <a:solidFill>
-                            <a:srgbClr val="2B2B2B"/>
+                            <a:srgbClr val="26231F"/>
                           </a:solidFill>
                         </a:rPr>
                         <a:t/>
@@ -5109,25 +5269,25 @@
                   <a:tcPr anchor="ctr" marL="73152" marR="73152">
                     <a:lnL w="9525" cap="flat" cmpd="sng" algn="ctr">
                       <a:solidFill>
-                        <a:srgbClr val="EBDCD6"/>
+                        <a:srgbClr val="F6DFD5"/>
                       </a:solidFill>
                       <a:prstDash val="solid"/>
                     </a:lnL>
                     <a:lnR w="9525" cap="flat" cmpd="sng" algn="ctr">
                       <a:solidFill>
-                        <a:srgbClr val="EBDCD6"/>
+                        <a:srgbClr val="F6DFD5"/>
                       </a:solidFill>
                       <a:prstDash val="solid"/>
                     </a:lnR>
                     <a:lnT w="9525" cap="flat" cmpd="sng" algn="ctr">
                       <a:solidFill>
-                        <a:srgbClr val="EBDCD6"/>
+                        <a:srgbClr val="F6DFD5"/>
                       </a:solidFill>
                       <a:prstDash val="solid"/>
                     </a:lnT>
                     <a:lnB w="9525" cap="flat" cmpd="sng" algn="ctr">
                       <a:solidFill>
-                        <a:srgbClr val="EBDCD6"/>
+                        <a:srgbClr val="F6DFD5"/>
                       </a:solidFill>
                       <a:prstDash val="solid"/>
                     </a:lnB>
@@ -5147,7 +5307,7 @@
                       <a:r>
                         <a:rPr sz="1400" b="0">
                           <a:solidFill>
-                            <a:srgbClr val="2B2B2B"/>
+                            <a:srgbClr val="26231F"/>
                           </a:solidFill>
                         </a:rPr>
                         <a:t/>
@@ -5157,30 +5317,30 @@
                   <a:tcPr anchor="ctr" marL="73152" marR="73152">
                     <a:lnL w="9525" cap="flat" cmpd="sng" algn="ctr">
                       <a:solidFill>
-                        <a:srgbClr val="EBDCD6"/>
+                        <a:srgbClr val="F6DFD5"/>
                       </a:solidFill>
                       <a:prstDash val="solid"/>
                     </a:lnL>
                     <a:lnR w="9525" cap="flat" cmpd="sng" algn="ctr">
                       <a:solidFill>
-                        <a:srgbClr val="EBDCD6"/>
+                        <a:srgbClr val="F6DFD5"/>
                       </a:solidFill>
                       <a:prstDash val="solid"/>
                     </a:lnR>
                     <a:lnT w="9525" cap="flat" cmpd="sng" algn="ctr">
                       <a:solidFill>
-                        <a:srgbClr val="EBDCD6"/>
+                        <a:srgbClr val="F6DFD5"/>
                       </a:solidFill>
                       <a:prstDash val="solid"/>
                     </a:lnT>
                     <a:lnB w="9525" cap="flat" cmpd="sng" algn="ctr">
                       <a:solidFill>
-                        <a:srgbClr val="EBDCD6"/>
+                        <a:srgbClr val="F6DFD5"/>
                       </a:solidFill>
                       <a:prstDash val="solid"/>
                     </a:lnB>
                     <a:solidFill>
-                      <a:srgbClr val="F8F4F2"/>
+                      <a:srgbClr val="FBF1EC"/>
                     </a:solidFill>
                   </a:tcPr>
                 </a:tc>
@@ -5193,7 +5353,7 @@
                       <a:r>
                         <a:rPr sz="1400" b="0">
                           <a:solidFill>
-                            <a:srgbClr val="2B2B2B"/>
+                            <a:srgbClr val="26231F"/>
                           </a:solidFill>
                         </a:rPr>
                         <a:t/>
@@ -5203,30 +5363,30 @@
                   <a:tcPr anchor="ctr" marL="73152" marR="73152">
                     <a:lnL w="9525" cap="flat" cmpd="sng" algn="ctr">
                       <a:solidFill>
-                        <a:srgbClr val="EBDCD6"/>
+                        <a:srgbClr val="F6DFD5"/>
                       </a:solidFill>
                       <a:prstDash val="solid"/>
                     </a:lnL>
                     <a:lnR w="9525" cap="flat" cmpd="sng" algn="ctr">
                       <a:solidFill>
-                        <a:srgbClr val="EBDCD6"/>
+                        <a:srgbClr val="F6DFD5"/>
                       </a:solidFill>
                       <a:prstDash val="solid"/>
                     </a:lnR>
                     <a:lnT w="9525" cap="flat" cmpd="sng" algn="ctr">
                       <a:solidFill>
-                        <a:srgbClr val="EBDCD6"/>
+                        <a:srgbClr val="F6DFD5"/>
                       </a:solidFill>
                       <a:prstDash val="solid"/>
                     </a:lnT>
                     <a:lnB w="9525" cap="flat" cmpd="sng" algn="ctr">
                       <a:solidFill>
-                        <a:srgbClr val="EBDCD6"/>
+                        <a:srgbClr val="F6DFD5"/>
                       </a:solidFill>
                       <a:prstDash val="solid"/>
                     </a:lnB>
                     <a:solidFill>
-                      <a:srgbClr val="F8F4F2"/>
+                      <a:srgbClr val="FBF1EC"/>
                     </a:solidFill>
                   </a:tcPr>
                 </a:tc>
@@ -5239,7 +5399,7 @@
                       <a:r>
                         <a:rPr sz="1400" b="0">
                           <a:solidFill>
-                            <a:srgbClr val="2B2B2B"/>
+                            <a:srgbClr val="26231F"/>
                           </a:solidFill>
                         </a:rPr>
                         <a:t/>
@@ -5249,30 +5409,30 @@
                   <a:tcPr anchor="ctr" marL="73152" marR="73152">
                     <a:lnL w="9525" cap="flat" cmpd="sng" algn="ctr">
                       <a:solidFill>
-                        <a:srgbClr val="EBDCD6"/>
+                        <a:srgbClr val="F6DFD5"/>
                       </a:solidFill>
                       <a:prstDash val="solid"/>
                     </a:lnL>
                     <a:lnR w="9525" cap="flat" cmpd="sng" algn="ctr">
                       <a:solidFill>
-                        <a:srgbClr val="EBDCD6"/>
+                        <a:srgbClr val="F6DFD5"/>
                       </a:solidFill>
                       <a:prstDash val="solid"/>
                     </a:lnR>
                     <a:lnT w="9525" cap="flat" cmpd="sng" algn="ctr">
                       <a:solidFill>
-                        <a:srgbClr val="EBDCD6"/>
+                        <a:srgbClr val="F6DFD5"/>
                       </a:solidFill>
                       <a:prstDash val="solid"/>
                     </a:lnT>
                     <a:lnB w="9525" cap="flat" cmpd="sng" algn="ctr">
                       <a:solidFill>
-                        <a:srgbClr val="EBDCD6"/>
+                        <a:srgbClr val="F6DFD5"/>
                       </a:solidFill>
                       <a:prstDash val="solid"/>
                     </a:lnB>
                     <a:solidFill>
-                      <a:srgbClr val="F8F4F2"/>
+                      <a:srgbClr val="FBF1EC"/>
                     </a:solidFill>
                   </a:tcPr>
                 </a:tc>
@@ -5285,7 +5445,7 @@
                       <a:r>
                         <a:rPr sz="1400" b="0">
                           <a:solidFill>
-                            <a:srgbClr val="2B2B2B"/>
+                            <a:srgbClr val="26231F"/>
                           </a:solidFill>
                         </a:rPr>
                         <a:t/>
@@ -5295,30 +5455,30 @@
                   <a:tcPr anchor="ctr" marL="73152" marR="73152">
                     <a:lnL w="9525" cap="flat" cmpd="sng" algn="ctr">
                       <a:solidFill>
-                        <a:srgbClr val="EBDCD6"/>
+                        <a:srgbClr val="F6DFD5"/>
                       </a:solidFill>
                       <a:prstDash val="solid"/>
                     </a:lnL>
                     <a:lnR w="9525" cap="flat" cmpd="sng" algn="ctr">
                       <a:solidFill>
-                        <a:srgbClr val="EBDCD6"/>
+                        <a:srgbClr val="F6DFD5"/>
                       </a:solidFill>
                       <a:prstDash val="solid"/>
                     </a:lnR>
                     <a:lnT w="9525" cap="flat" cmpd="sng" algn="ctr">
                       <a:solidFill>
-                        <a:srgbClr val="EBDCD6"/>
+                        <a:srgbClr val="F6DFD5"/>
                       </a:solidFill>
                       <a:prstDash val="solid"/>
                     </a:lnT>
                     <a:lnB w="9525" cap="flat" cmpd="sng" algn="ctr">
                       <a:solidFill>
-                        <a:srgbClr val="EBDCD6"/>
+                        <a:srgbClr val="F6DFD5"/>
                       </a:solidFill>
                       <a:prstDash val="solid"/>
                     </a:lnB>
                     <a:solidFill>
-                      <a:srgbClr val="F8F4F2"/>
+                      <a:srgbClr val="FBF1EC"/>
                     </a:solidFill>
                   </a:tcPr>
                 </a:tc>
@@ -5331,7 +5491,7 @@
                       <a:r>
                         <a:rPr sz="1400" b="0">
                           <a:solidFill>
-                            <a:srgbClr val="2B2B2B"/>
+                            <a:srgbClr val="26231F"/>
                           </a:solidFill>
                         </a:rPr>
                         <a:t/>
@@ -5341,30 +5501,30 @@
                   <a:tcPr anchor="ctr" marL="73152" marR="73152">
                     <a:lnL w="9525" cap="flat" cmpd="sng" algn="ctr">
                       <a:solidFill>
-                        <a:srgbClr val="EBDCD6"/>
+                        <a:srgbClr val="F6DFD5"/>
                       </a:solidFill>
                       <a:prstDash val="solid"/>
                     </a:lnL>
                     <a:lnR w="9525" cap="flat" cmpd="sng" algn="ctr">
                       <a:solidFill>
-                        <a:srgbClr val="EBDCD6"/>
+                        <a:srgbClr val="F6DFD5"/>
                       </a:solidFill>
                       <a:prstDash val="solid"/>
                     </a:lnR>
                     <a:lnT w="9525" cap="flat" cmpd="sng" algn="ctr">
                       <a:solidFill>
-                        <a:srgbClr val="EBDCD6"/>
+                        <a:srgbClr val="F6DFD5"/>
                       </a:solidFill>
                       <a:prstDash val="solid"/>
                     </a:lnT>
                     <a:lnB w="9525" cap="flat" cmpd="sng" algn="ctr">
                       <a:solidFill>
-                        <a:srgbClr val="EBDCD6"/>
+                        <a:srgbClr val="F6DFD5"/>
                       </a:solidFill>
                       <a:prstDash val="solid"/>
                     </a:lnB>
                     <a:solidFill>
-                      <a:srgbClr val="F8F4F2"/>
+                      <a:srgbClr val="FBF1EC"/>
                     </a:solidFill>
                   </a:tcPr>
                 </a:tc>
@@ -5379,7 +5539,7 @@
                       <a:r>
                         <a:rPr sz="1400" b="0">
                           <a:solidFill>
-                            <a:srgbClr val="2B2B2B"/>
+                            <a:srgbClr val="26231F"/>
                           </a:solidFill>
                         </a:rPr>
                         <a:t/>
@@ -5389,25 +5549,25 @@
                   <a:tcPr anchor="ctr" marL="73152" marR="73152">
                     <a:lnL w="9525" cap="flat" cmpd="sng" algn="ctr">
                       <a:solidFill>
-                        <a:srgbClr val="EBDCD6"/>
+                        <a:srgbClr val="F6DFD5"/>
                       </a:solidFill>
                       <a:prstDash val="solid"/>
                     </a:lnL>
                     <a:lnR w="9525" cap="flat" cmpd="sng" algn="ctr">
                       <a:solidFill>
-                        <a:srgbClr val="EBDCD6"/>
+                        <a:srgbClr val="F6DFD5"/>
                       </a:solidFill>
                       <a:prstDash val="solid"/>
                     </a:lnR>
                     <a:lnT w="9525" cap="flat" cmpd="sng" algn="ctr">
                       <a:solidFill>
-                        <a:srgbClr val="EBDCD6"/>
+                        <a:srgbClr val="F6DFD5"/>
                       </a:solidFill>
                       <a:prstDash val="solid"/>
                     </a:lnT>
                     <a:lnB w="9525" cap="flat" cmpd="sng" algn="ctr">
                       <a:solidFill>
-                        <a:srgbClr val="EBDCD6"/>
+                        <a:srgbClr val="F6DFD5"/>
                       </a:solidFill>
                       <a:prstDash val="solid"/>
                     </a:lnB>
@@ -5425,7 +5585,7 @@
                       <a:r>
                         <a:rPr sz="1400" b="0">
                           <a:solidFill>
-                            <a:srgbClr val="2B2B2B"/>
+                            <a:srgbClr val="26231F"/>
                           </a:solidFill>
                         </a:rPr>
                         <a:t/>
@@ -5435,25 +5595,25 @@
                   <a:tcPr anchor="ctr" marL="73152" marR="73152">
                     <a:lnL w="9525" cap="flat" cmpd="sng" algn="ctr">
                       <a:solidFill>
-                        <a:srgbClr val="EBDCD6"/>
+                        <a:srgbClr val="F6DFD5"/>
                       </a:solidFill>
                       <a:prstDash val="solid"/>
                     </a:lnL>
                     <a:lnR w="9525" cap="flat" cmpd="sng" algn="ctr">
                       <a:solidFill>
-                        <a:srgbClr val="EBDCD6"/>
+                        <a:srgbClr val="F6DFD5"/>
                       </a:solidFill>
                       <a:prstDash val="solid"/>
                     </a:lnR>
                     <a:lnT w="9525" cap="flat" cmpd="sng" algn="ctr">
                       <a:solidFill>
-                        <a:srgbClr val="EBDCD6"/>
+                        <a:srgbClr val="F6DFD5"/>
                       </a:solidFill>
                       <a:prstDash val="solid"/>
                     </a:lnT>
                     <a:lnB w="9525" cap="flat" cmpd="sng" algn="ctr">
                       <a:solidFill>
-                        <a:srgbClr val="EBDCD6"/>
+                        <a:srgbClr val="F6DFD5"/>
                       </a:solidFill>
                       <a:prstDash val="solid"/>
                     </a:lnB>
@@ -5471,7 +5631,7 @@
                       <a:r>
                         <a:rPr sz="1400" b="0">
                           <a:solidFill>
-                            <a:srgbClr val="2B2B2B"/>
+                            <a:srgbClr val="26231F"/>
                           </a:solidFill>
                         </a:rPr>
                         <a:t/>
@@ -5481,25 +5641,25 @@
                   <a:tcPr anchor="ctr" marL="73152" marR="73152">
                     <a:lnL w="9525" cap="flat" cmpd="sng" algn="ctr">
                       <a:solidFill>
-                        <a:srgbClr val="EBDCD6"/>
+                        <a:srgbClr val="F6DFD5"/>
                       </a:solidFill>
                       <a:prstDash val="solid"/>
                     </a:lnL>
                     <a:lnR w="9525" cap="flat" cmpd="sng" algn="ctr">
                       <a:solidFill>
-                        <a:srgbClr val="EBDCD6"/>
+                        <a:srgbClr val="F6DFD5"/>
                       </a:solidFill>
                       <a:prstDash val="solid"/>
                     </a:lnR>
                     <a:lnT w="9525" cap="flat" cmpd="sng" algn="ctr">
                       <a:solidFill>
-                        <a:srgbClr val="EBDCD6"/>
+                        <a:srgbClr val="F6DFD5"/>
                       </a:solidFill>
                       <a:prstDash val="solid"/>
                     </a:lnT>
                     <a:lnB w="9525" cap="flat" cmpd="sng" algn="ctr">
                       <a:solidFill>
-                        <a:srgbClr val="EBDCD6"/>
+                        <a:srgbClr val="F6DFD5"/>
                       </a:solidFill>
                       <a:prstDash val="solid"/>
                     </a:lnB>
@@ -5517,7 +5677,7 @@
                       <a:r>
                         <a:rPr sz="1400" b="0">
                           <a:solidFill>
-                            <a:srgbClr val="2B2B2B"/>
+                            <a:srgbClr val="26231F"/>
                           </a:solidFill>
                         </a:rPr>
                         <a:t/>
@@ -5527,25 +5687,25 @@
                   <a:tcPr anchor="ctr" marL="73152" marR="73152">
                     <a:lnL w="9525" cap="flat" cmpd="sng" algn="ctr">
                       <a:solidFill>
-                        <a:srgbClr val="EBDCD6"/>
+                        <a:srgbClr val="F6DFD5"/>
                       </a:solidFill>
                       <a:prstDash val="solid"/>
                     </a:lnL>
                     <a:lnR w="9525" cap="flat" cmpd="sng" algn="ctr">
                       <a:solidFill>
-                        <a:srgbClr val="EBDCD6"/>
+                        <a:srgbClr val="F6DFD5"/>
                       </a:solidFill>
                       <a:prstDash val="solid"/>
                     </a:lnR>
                     <a:lnT w="9525" cap="flat" cmpd="sng" algn="ctr">
                       <a:solidFill>
-                        <a:srgbClr val="EBDCD6"/>
+                        <a:srgbClr val="F6DFD5"/>
                       </a:solidFill>
                       <a:prstDash val="solid"/>
                     </a:lnT>
                     <a:lnB w="9525" cap="flat" cmpd="sng" algn="ctr">
                       <a:solidFill>
-                        <a:srgbClr val="EBDCD6"/>
+                        <a:srgbClr val="F6DFD5"/>
                       </a:solidFill>
                       <a:prstDash val="solid"/>
                     </a:lnB>
@@ -5563,7 +5723,7 @@
                       <a:r>
                         <a:rPr sz="1400" b="0">
                           <a:solidFill>
-                            <a:srgbClr val="2B2B2B"/>
+                            <a:srgbClr val="26231F"/>
                           </a:solidFill>
                         </a:rPr>
                         <a:t/>
@@ -5573,25 +5733,25 @@
                   <a:tcPr anchor="ctr" marL="73152" marR="73152">
                     <a:lnL w="9525" cap="flat" cmpd="sng" algn="ctr">
                       <a:solidFill>
-                        <a:srgbClr val="EBDCD6"/>
+                        <a:srgbClr val="F6DFD5"/>
                       </a:solidFill>
                       <a:prstDash val="solid"/>
                     </a:lnL>
                     <a:lnR w="9525" cap="flat" cmpd="sng" algn="ctr">
                       <a:solidFill>
-                        <a:srgbClr val="EBDCD6"/>
+                        <a:srgbClr val="F6DFD5"/>
                       </a:solidFill>
                       <a:prstDash val="solid"/>
                     </a:lnR>
                     <a:lnT w="9525" cap="flat" cmpd="sng" algn="ctr">
                       <a:solidFill>
-                        <a:srgbClr val="EBDCD6"/>
+                        <a:srgbClr val="F6DFD5"/>
                       </a:solidFill>
                       <a:prstDash val="solid"/>
                     </a:lnT>
                     <a:lnB w="9525" cap="flat" cmpd="sng" algn="ctr">
                       <a:solidFill>
-                        <a:srgbClr val="EBDCD6"/>
+                        <a:srgbClr val="F6DFD5"/>
                       </a:solidFill>
                       <a:prstDash val="solid"/>
                     </a:lnB>
@@ -5611,7 +5771,7 @@
                       <a:r>
                         <a:rPr sz="1400" b="0">
                           <a:solidFill>
-                            <a:srgbClr val="2B2B2B"/>
+                            <a:srgbClr val="26231F"/>
                           </a:solidFill>
                         </a:rPr>
                         <a:t/>
@@ -5621,30 +5781,30 @@
                   <a:tcPr anchor="ctr" marL="73152" marR="73152">
                     <a:lnL w="9525" cap="flat" cmpd="sng" algn="ctr">
                       <a:solidFill>
-                        <a:srgbClr val="EBDCD6"/>
+                        <a:srgbClr val="F6DFD5"/>
                       </a:solidFill>
                       <a:prstDash val="solid"/>
                     </a:lnL>
                     <a:lnR w="9525" cap="flat" cmpd="sng" algn="ctr">
                       <a:solidFill>
-                        <a:srgbClr val="EBDCD6"/>
+                        <a:srgbClr val="F6DFD5"/>
                       </a:solidFill>
                       <a:prstDash val="solid"/>
                     </a:lnR>
                     <a:lnT w="9525" cap="flat" cmpd="sng" algn="ctr">
                       <a:solidFill>
-                        <a:srgbClr val="EBDCD6"/>
+                        <a:srgbClr val="F6DFD5"/>
                       </a:solidFill>
                       <a:prstDash val="solid"/>
                     </a:lnT>
                     <a:lnB w="9525" cap="flat" cmpd="sng" algn="ctr">
                       <a:solidFill>
-                        <a:srgbClr val="EBDCD6"/>
+                        <a:srgbClr val="F6DFD5"/>
                       </a:solidFill>
                       <a:prstDash val="solid"/>
                     </a:lnB>
                     <a:solidFill>
-                      <a:srgbClr val="F8F4F2"/>
+                      <a:srgbClr val="FBF1EC"/>
                     </a:solidFill>
                   </a:tcPr>
                 </a:tc>
@@ -5657,7 +5817,7 @@
                       <a:r>
                         <a:rPr sz="1400" b="0">
                           <a:solidFill>
-                            <a:srgbClr val="2B2B2B"/>
+                            <a:srgbClr val="26231F"/>
                           </a:solidFill>
                         </a:rPr>
                         <a:t/>
@@ -5667,30 +5827,30 @@
                   <a:tcPr anchor="ctr" marL="73152" marR="73152">
                     <a:lnL w="9525" cap="flat" cmpd="sng" algn="ctr">
                       <a:solidFill>
-                        <a:srgbClr val="EBDCD6"/>
+                        <a:srgbClr val="F6DFD5"/>
                       </a:solidFill>
                       <a:prstDash val="solid"/>
                     </a:lnL>
                     <a:lnR w="9525" cap="flat" cmpd="sng" algn="ctr">
                       <a:solidFill>
-                        <a:srgbClr val="EBDCD6"/>
+                        <a:srgbClr val="F6DFD5"/>
                       </a:solidFill>
                       <a:prstDash val="solid"/>
                     </a:lnR>
                     <a:lnT w="9525" cap="flat" cmpd="sng" algn="ctr">
                       <a:solidFill>
-                        <a:srgbClr val="EBDCD6"/>
+                        <a:srgbClr val="F6DFD5"/>
                       </a:solidFill>
                       <a:prstDash val="solid"/>
                     </a:lnT>
                     <a:lnB w="9525" cap="flat" cmpd="sng" algn="ctr">
                       <a:solidFill>
-                        <a:srgbClr val="EBDCD6"/>
+                        <a:srgbClr val="F6DFD5"/>
                       </a:solidFill>
                       <a:prstDash val="solid"/>
                     </a:lnB>
                     <a:solidFill>
-                      <a:srgbClr val="F8F4F2"/>
+                      <a:srgbClr val="FBF1EC"/>
                     </a:solidFill>
                   </a:tcPr>
                 </a:tc>
@@ -5703,7 +5863,7 @@
                       <a:r>
                         <a:rPr sz="1400" b="0">
                           <a:solidFill>
-                            <a:srgbClr val="2B2B2B"/>
+                            <a:srgbClr val="26231F"/>
                           </a:solidFill>
                         </a:rPr>
                         <a:t/>
@@ -5713,30 +5873,30 @@
                   <a:tcPr anchor="ctr" marL="73152" marR="73152">
                     <a:lnL w="9525" cap="flat" cmpd="sng" algn="ctr">
                       <a:solidFill>
-                        <a:srgbClr val="EBDCD6"/>
+                        <a:srgbClr val="F6DFD5"/>
                       </a:solidFill>
                       <a:prstDash val="solid"/>
                     </a:lnL>
                     <a:lnR w="9525" cap="flat" cmpd="sng" algn="ctr">
                       <a:solidFill>
-                        <a:srgbClr val="EBDCD6"/>
+                        <a:srgbClr val="F6DFD5"/>
                       </a:solidFill>
                       <a:prstDash val="solid"/>
                     </a:lnR>
                     <a:lnT w="9525" cap="flat" cmpd="sng" algn="ctr">
                       <a:solidFill>
-                        <a:srgbClr val="EBDCD6"/>
+                        <a:srgbClr val="F6DFD5"/>
                       </a:solidFill>
                       <a:prstDash val="solid"/>
                     </a:lnT>
                     <a:lnB w="9525" cap="flat" cmpd="sng" algn="ctr">
                       <a:solidFill>
-                        <a:srgbClr val="EBDCD6"/>
+                        <a:srgbClr val="F6DFD5"/>
                       </a:solidFill>
                       <a:prstDash val="solid"/>
                     </a:lnB>
                     <a:solidFill>
-                      <a:srgbClr val="F8F4F2"/>
+                      <a:srgbClr val="FBF1EC"/>
                     </a:solidFill>
                   </a:tcPr>
                 </a:tc>
@@ -5749,7 +5909,7 @@
                       <a:r>
                         <a:rPr sz="1400" b="0">
                           <a:solidFill>
-                            <a:srgbClr val="2B2B2B"/>
+                            <a:srgbClr val="26231F"/>
                           </a:solidFill>
                         </a:rPr>
                         <a:t/>
@@ -5759,30 +5919,30 @@
                   <a:tcPr anchor="ctr" marL="73152" marR="73152">
                     <a:lnL w="9525" cap="flat" cmpd="sng" algn="ctr">
                       <a:solidFill>
-                        <a:srgbClr val="EBDCD6"/>
+                        <a:srgbClr val="F6DFD5"/>
                       </a:solidFill>
                       <a:prstDash val="solid"/>
                     </a:lnL>
                     <a:lnR w="9525" cap="flat" cmpd="sng" algn="ctr">
                       <a:solidFill>
-                        <a:srgbClr val="EBDCD6"/>
+                        <a:srgbClr val="F6DFD5"/>
                       </a:solidFill>
                       <a:prstDash val="solid"/>
                     </a:lnR>
                     <a:lnT w="9525" cap="flat" cmpd="sng" algn="ctr">
                       <a:solidFill>
-                        <a:srgbClr val="EBDCD6"/>
+                        <a:srgbClr val="F6DFD5"/>
                       </a:solidFill>
                       <a:prstDash val="solid"/>
                     </a:lnT>
                     <a:lnB w="9525" cap="flat" cmpd="sng" algn="ctr">
                       <a:solidFill>
-                        <a:srgbClr val="EBDCD6"/>
+                        <a:srgbClr val="F6DFD5"/>
                       </a:solidFill>
                       <a:prstDash val="solid"/>
                     </a:lnB>
                     <a:solidFill>
-                      <a:srgbClr val="F8F4F2"/>
+                      <a:srgbClr val="FBF1EC"/>
                     </a:solidFill>
                   </a:tcPr>
                 </a:tc>
@@ -5795,7 +5955,7 @@
                       <a:r>
                         <a:rPr sz="1400" b="0">
                           <a:solidFill>
-                            <a:srgbClr val="2B2B2B"/>
+                            <a:srgbClr val="26231F"/>
                           </a:solidFill>
                         </a:rPr>
                         <a:t/>
@@ -5805,30 +5965,30 @@
                   <a:tcPr anchor="ctr" marL="73152" marR="73152">
                     <a:lnL w="9525" cap="flat" cmpd="sng" algn="ctr">
                       <a:solidFill>
-                        <a:srgbClr val="EBDCD6"/>
+                        <a:srgbClr val="F6DFD5"/>
                       </a:solidFill>
                       <a:prstDash val="solid"/>
                     </a:lnL>
                     <a:lnR w="9525" cap="flat" cmpd="sng" algn="ctr">
                       <a:solidFill>
-                        <a:srgbClr val="EBDCD6"/>
+                        <a:srgbClr val="F6DFD5"/>
                       </a:solidFill>
                       <a:prstDash val="solid"/>
                     </a:lnR>
                     <a:lnT w="9525" cap="flat" cmpd="sng" algn="ctr">
                       <a:solidFill>
-                        <a:srgbClr val="EBDCD6"/>
+                        <a:srgbClr val="F6DFD5"/>
                       </a:solidFill>
                       <a:prstDash val="solid"/>
                     </a:lnT>
                     <a:lnB w="9525" cap="flat" cmpd="sng" algn="ctr">
                       <a:solidFill>
-                        <a:srgbClr val="EBDCD6"/>
+                        <a:srgbClr val="F6DFD5"/>
                       </a:solidFill>
                       <a:prstDash val="solid"/>
                     </a:lnB>
                     <a:solidFill>
-                      <a:srgbClr val="F8F4F2"/>
+                      <a:srgbClr val="FBF1EC"/>
                     </a:solidFill>
                   </a:tcPr>
                 </a:tc>
@@ -5843,7 +6003,7 @@
                       <a:r>
                         <a:rPr sz="1400" b="0">
                           <a:solidFill>
-                            <a:srgbClr val="2B2B2B"/>
+                            <a:srgbClr val="26231F"/>
                           </a:solidFill>
                         </a:rPr>
                         <a:t/>
@@ -5853,25 +6013,25 @@
                   <a:tcPr anchor="ctr" marL="73152" marR="73152">
                     <a:lnL w="9525" cap="flat" cmpd="sng" algn="ctr">
                       <a:solidFill>
-                        <a:srgbClr val="EBDCD6"/>
+                        <a:srgbClr val="F6DFD5"/>
                       </a:solidFill>
                       <a:prstDash val="solid"/>
                     </a:lnL>
                     <a:lnR w="9525" cap="flat" cmpd="sng" algn="ctr">
                       <a:solidFill>
-                        <a:srgbClr val="EBDCD6"/>
+                        <a:srgbClr val="F6DFD5"/>
                       </a:solidFill>
                       <a:prstDash val="solid"/>
                     </a:lnR>
                     <a:lnT w="9525" cap="flat" cmpd="sng" algn="ctr">
                       <a:solidFill>
-                        <a:srgbClr val="EBDCD6"/>
+                        <a:srgbClr val="F6DFD5"/>
                       </a:solidFill>
                       <a:prstDash val="solid"/>
                     </a:lnT>
                     <a:lnB w="9525" cap="flat" cmpd="sng" algn="ctr">
                       <a:solidFill>
-                        <a:srgbClr val="EBDCD6"/>
+                        <a:srgbClr val="F6DFD5"/>
                       </a:solidFill>
                       <a:prstDash val="solid"/>
                     </a:lnB>
@@ -5889,7 +6049,7 @@
                       <a:r>
                         <a:rPr sz="1400" b="0">
                           <a:solidFill>
-                            <a:srgbClr val="2B2B2B"/>
+                            <a:srgbClr val="26231F"/>
                           </a:solidFill>
                         </a:rPr>
                         <a:t/>
@@ -5899,25 +6059,25 @@
                   <a:tcPr anchor="ctr" marL="73152" marR="73152">
                     <a:lnL w="9525" cap="flat" cmpd="sng" algn="ctr">
                       <a:solidFill>
-                        <a:srgbClr val="EBDCD6"/>
+                        <a:srgbClr val="F6DFD5"/>
                       </a:solidFill>
                       <a:prstDash val="solid"/>
                     </a:lnL>
                     <a:lnR w="9525" cap="flat" cmpd="sng" algn="ctr">
                       <a:solidFill>
-                        <a:srgbClr val="EBDCD6"/>
+                        <a:srgbClr val="F6DFD5"/>
                       </a:solidFill>
                       <a:prstDash val="solid"/>
                     </a:lnR>
                     <a:lnT w="9525" cap="flat" cmpd="sng" algn="ctr">
                       <a:solidFill>
-                        <a:srgbClr val="EBDCD6"/>
+                        <a:srgbClr val="F6DFD5"/>
                       </a:solidFill>
                       <a:prstDash val="solid"/>
                     </a:lnT>
                     <a:lnB w="9525" cap="flat" cmpd="sng" algn="ctr">
                       <a:solidFill>
-                        <a:srgbClr val="EBDCD6"/>
+                        <a:srgbClr val="F6DFD5"/>
                       </a:solidFill>
                       <a:prstDash val="solid"/>
                     </a:lnB>
@@ -5935,7 +6095,7 @@
                       <a:r>
                         <a:rPr sz="1400" b="0">
                           <a:solidFill>
-                            <a:srgbClr val="2B2B2B"/>
+                            <a:srgbClr val="26231F"/>
                           </a:solidFill>
                         </a:rPr>
                         <a:t/>
@@ -5945,25 +6105,25 @@
                   <a:tcPr anchor="ctr" marL="73152" marR="73152">
                     <a:lnL w="9525" cap="flat" cmpd="sng" algn="ctr">
                       <a:solidFill>
-                        <a:srgbClr val="EBDCD6"/>
+                        <a:srgbClr val="F6DFD5"/>
                       </a:solidFill>
                       <a:prstDash val="solid"/>
                     </a:lnL>
                     <a:lnR w="9525" cap="flat" cmpd="sng" algn="ctr">
                       <a:solidFill>
-                        <a:srgbClr val="EBDCD6"/>
+                        <a:srgbClr val="F6DFD5"/>
                       </a:solidFill>
                       <a:prstDash val="solid"/>
                     </a:lnR>
                     <a:lnT w="9525" cap="flat" cmpd="sng" algn="ctr">
                       <a:solidFill>
-                        <a:srgbClr val="EBDCD6"/>
+                        <a:srgbClr val="F6DFD5"/>
                       </a:solidFill>
                       <a:prstDash val="solid"/>
                     </a:lnT>
                     <a:lnB w="9525" cap="flat" cmpd="sng" algn="ctr">
                       <a:solidFill>
-                        <a:srgbClr val="EBDCD6"/>
+                        <a:srgbClr val="F6DFD5"/>
                       </a:solidFill>
                       <a:prstDash val="solid"/>
                     </a:lnB>
@@ -5981,7 +6141,7 @@
                       <a:r>
                         <a:rPr sz="1400" b="0">
                           <a:solidFill>
-                            <a:srgbClr val="2B2B2B"/>
+                            <a:srgbClr val="26231F"/>
                           </a:solidFill>
                         </a:rPr>
                         <a:t/>
@@ -5991,25 +6151,25 @@
                   <a:tcPr anchor="ctr" marL="73152" marR="73152">
                     <a:lnL w="9525" cap="flat" cmpd="sng" algn="ctr">
                       <a:solidFill>
-                        <a:srgbClr val="EBDCD6"/>
+                        <a:srgbClr val="F6DFD5"/>
                       </a:solidFill>
                       <a:prstDash val="solid"/>
                     </a:lnL>
                     <a:lnR w="9525" cap="flat" cmpd="sng" algn="ctr">
                       <a:solidFill>
-                        <a:srgbClr val="EBDCD6"/>
+                        <a:srgbClr val="F6DFD5"/>
                       </a:solidFill>
                       <a:prstDash val="solid"/>
                     </a:lnR>
                     <a:lnT w="9525" cap="flat" cmpd="sng" algn="ctr">
                       <a:solidFill>
-                        <a:srgbClr val="EBDCD6"/>
+                        <a:srgbClr val="F6DFD5"/>
                       </a:solidFill>
                       <a:prstDash val="solid"/>
                     </a:lnT>
                     <a:lnB w="9525" cap="flat" cmpd="sng" algn="ctr">
                       <a:solidFill>
-                        <a:srgbClr val="EBDCD6"/>
+                        <a:srgbClr val="F6DFD5"/>
                       </a:solidFill>
                       <a:prstDash val="solid"/>
                     </a:lnB>
@@ -6027,7 +6187,7 @@
                       <a:r>
                         <a:rPr sz="1400" b="0">
                           <a:solidFill>
-                            <a:srgbClr val="2B2B2B"/>
+                            <a:srgbClr val="26231F"/>
                           </a:solidFill>
                         </a:rPr>
                         <a:t/>
@@ -6037,25 +6197,25 @@
                   <a:tcPr anchor="ctr" marL="73152" marR="73152">
                     <a:lnL w="9525" cap="flat" cmpd="sng" algn="ctr">
                       <a:solidFill>
-                        <a:srgbClr val="EBDCD6"/>
+                        <a:srgbClr val="F6DFD5"/>
                       </a:solidFill>
                       <a:prstDash val="solid"/>
                     </a:lnL>
                     <a:lnR w="9525" cap="flat" cmpd="sng" algn="ctr">
                       <a:solidFill>
-                        <a:srgbClr val="EBDCD6"/>
+                        <a:srgbClr val="F6DFD5"/>
                       </a:solidFill>
                       <a:prstDash val="solid"/>
                     </a:lnR>
                     <a:lnT w="9525" cap="flat" cmpd="sng" algn="ctr">
                       <a:solidFill>
-                        <a:srgbClr val="EBDCD6"/>
+                        <a:srgbClr val="F6DFD5"/>
                       </a:solidFill>
                       <a:prstDash val="solid"/>
                     </a:lnT>
                     <a:lnB w="9525" cap="flat" cmpd="sng" algn="ctr">
                       <a:solidFill>
-                        <a:srgbClr val="EBDCD6"/>
+                        <a:srgbClr val="F6DFD5"/>
                       </a:solidFill>
                       <a:prstDash val="solid"/>
                     </a:lnB>
@@ -6075,7 +6235,7 @@
                       <a:r>
                         <a:rPr sz="1400" b="0">
                           <a:solidFill>
-                            <a:srgbClr val="2B2B2B"/>
+                            <a:srgbClr val="26231F"/>
                           </a:solidFill>
                         </a:rPr>
                         <a:t/>
@@ -6085,30 +6245,30 @@
                   <a:tcPr anchor="ctr" marL="73152" marR="73152">
                     <a:lnL w="9525" cap="flat" cmpd="sng" algn="ctr">
                       <a:solidFill>
-                        <a:srgbClr val="EBDCD6"/>
+                        <a:srgbClr val="F6DFD5"/>
                       </a:solidFill>
                       <a:prstDash val="solid"/>
                     </a:lnL>
                     <a:lnR w="9525" cap="flat" cmpd="sng" algn="ctr">
                       <a:solidFill>
-                        <a:srgbClr val="EBDCD6"/>
+                        <a:srgbClr val="F6DFD5"/>
                       </a:solidFill>
                       <a:prstDash val="solid"/>
                     </a:lnR>
                     <a:lnT w="9525" cap="flat" cmpd="sng" algn="ctr">
                       <a:solidFill>
-                        <a:srgbClr val="EBDCD6"/>
+                        <a:srgbClr val="F6DFD5"/>
                       </a:solidFill>
                       <a:prstDash val="solid"/>
                     </a:lnT>
                     <a:lnB w="9525" cap="flat" cmpd="sng" algn="ctr">
                       <a:solidFill>
-                        <a:srgbClr val="EBDCD6"/>
+                        <a:srgbClr val="F6DFD5"/>
                       </a:solidFill>
                       <a:prstDash val="solid"/>
                     </a:lnB>
                     <a:solidFill>
-                      <a:srgbClr val="F8F4F2"/>
+                      <a:srgbClr val="FBF1EC"/>
                     </a:solidFill>
                   </a:tcPr>
                 </a:tc>
@@ -6121,7 +6281,7 @@
                       <a:r>
                         <a:rPr sz="1400" b="0">
                           <a:solidFill>
-                            <a:srgbClr val="2B2B2B"/>
+                            <a:srgbClr val="26231F"/>
                           </a:solidFill>
                         </a:rPr>
                         <a:t/>
@@ -6131,30 +6291,30 @@
                   <a:tcPr anchor="ctr" marL="73152" marR="73152">
                     <a:lnL w="9525" cap="flat" cmpd="sng" algn="ctr">
                       <a:solidFill>
-                        <a:srgbClr val="EBDCD6"/>
+                        <a:srgbClr val="F6DFD5"/>
                       </a:solidFill>
                       <a:prstDash val="solid"/>
                     </a:lnL>
                     <a:lnR w="9525" cap="flat" cmpd="sng" algn="ctr">
                       <a:solidFill>
-                        <a:srgbClr val="EBDCD6"/>
+                        <a:srgbClr val="F6DFD5"/>
                       </a:solidFill>
                       <a:prstDash val="solid"/>
                     </a:lnR>
                     <a:lnT w="9525" cap="flat" cmpd="sng" algn="ctr">
                       <a:solidFill>
-                        <a:srgbClr val="EBDCD6"/>
+                        <a:srgbClr val="F6DFD5"/>
                       </a:solidFill>
                       <a:prstDash val="solid"/>
                     </a:lnT>
                     <a:lnB w="9525" cap="flat" cmpd="sng" algn="ctr">
                       <a:solidFill>
-                        <a:srgbClr val="EBDCD6"/>
+                        <a:srgbClr val="F6DFD5"/>
                       </a:solidFill>
                       <a:prstDash val="solid"/>
                     </a:lnB>
                     <a:solidFill>
-                      <a:srgbClr val="F8F4F2"/>
+                      <a:srgbClr val="FBF1EC"/>
                     </a:solidFill>
                   </a:tcPr>
                 </a:tc>
@@ -6167,7 +6327,7 @@
                       <a:r>
                         <a:rPr sz="1400" b="0">
                           <a:solidFill>
-                            <a:srgbClr val="2B2B2B"/>
+                            <a:srgbClr val="26231F"/>
                           </a:solidFill>
                         </a:rPr>
                         <a:t/>
@@ -6177,30 +6337,30 @@
                   <a:tcPr anchor="ctr" marL="73152" marR="73152">
                     <a:lnL w="9525" cap="flat" cmpd="sng" algn="ctr">
                       <a:solidFill>
-                        <a:srgbClr val="EBDCD6"/>
+                        <a:srgbClr val="F6DFD5"/>
                       </a:solidFill>
                       <a:prstDash val="solid"/>
                     </a:lnL>
                     <a:lnR w="9525" cap="flat" cmpd="sng" algn="ctr">
                       <a:solidFill>
-                        <a:srgbClr val="EBDCD6"/>
+                        <a:srgbClr val="F6DFD5"/>
                       </a:solidFill>
                       <a:prstDash val="solid"/>
                     </a:lnR>
                     <a:lnT w="9525" cap="flat" cmpd="sng" algn="ctr">
                       <a:solidFill>
-                        <a:srgbClr val="EBDCD6"/>
+                        <a:srgbClr val="F6DFD5"/>
                       </a:solidFill>
                       <a:prstDash val="solid"/>
                     </a:lnT>
                     <a:lnB w="9525" cap="flat" cmpd="sng" algn="ctr">
                       <a:solidFill>
-                        <a:srgbClr val="EBDCD6"/>
+                        <a:srgbClr val="F6DFD5"/>
                       </a:solidFill>
                       <a:prstDash val="solid"/>
                     </a:lnB>
                     <a:solidFill>
-                      <a:srgbClr val="F8F4F2"/>
+                      <a:srgbClr val="FBF1EC"/>
                     </a:solidFill>
                   </a:tcPr>
                 </a:tc>
@@ -6213,7 +6373,7 @@
                       <a:r>
                         <a:rPr sz="1400" b="0">
                           <a:solidFill>
-                            <a:srgbClr val="2B2B2B"/>
+                            <a:srgbClr val="26231F"/>
                           </a:solidFill>
                         </a:rPr>
                         <a:t/>
@@ -6223,30 +6383,30 @@
                   <a:tcPr anchor="ctr" marL="73152" marR="73152">
                     <a:lnL w="9525" cap="flat" cmpd="sng" algn="ctr">
                       <a:solidFill>
-                        <a:srgbClr val="EBDCD6"/>
+                        <a:srgbClr val="F6DFD5"/>
                       </a:solidFill>
                       <a:prstDash val="solid"/>
                     </a:lnL>
                     <a:lnR w="9525" cap="flat" cmpd="sng" algn="ctr">
                       <a:solidFill>
-                        <a:srgbClr val="EBDCD6"/>
+                        <a:srgbClr val="F6DFD5"/>
                       </a:solidFill>
                       <a:prstDash val="solid"/>
                     </a:lnR>
                     <a:lnT w="9525" cap="flat" cmpd="sng" algn="ctr">
                       <a:solidFill>
-                        <a:srgbClr val="EBDCD6"/>
+                        <a:srgbClr val="F6DFD5"/>
                       </a:solidFill>
                       <a:prstDash val="solid"/>
                     </a:lnT>
                     <a:lnB w="9525" cap="flat" cmpd="sng" algn="ctr">
                       <a:solidFill>
-                        <a:srgbClr val="EBDCD6"/>
+                        <a:srgbClr val="F6DFD5"/>
                       </a:solidFill>
                       <a:prstDash val="solid"/>
                     </a:lnB>
                     <a:solidFill>
-                      <a:srgbClr val="F8F4F2"/>
+                      <a:srgbClr val="FBF1EC"/>
                     </a:solidFill>
                   </a:tcPr>
                 </a:tc>
@@ -6259,7 +6419,7 @@
                       <a:r>
                         <a:rPr sz="1400" b="0">
                           <a:solidFill>
-                            <a:srgbClr val="2B2B2B"/>
+                            <a:srgbClr val="26231F"/>
                           </a:solidFill>
                         </a:rPr>
                         <a:t/>
@@ -6269,30 +6429,30 @@
                   <a:tcPr anchor="ctr" marL="73152" marR="73152">
                     <a:lnL w="9525" cap="flat" cmpd="sng" algn="ctr">
                       <a:solidFill>
-                        <a:srgbClr val="EBDCD6"/>
+                        <a:srgbClr val="F6DFD5"/>
                       </a:solidFill>
                       <a:prstDash val="solid"/>
                     </a:lnL>
                     <a:lnR w="9525" cap="flat" cmpd="sng" algn="ctr">
                       <a:solidFill>
-                        <a:srgbClr val="EBDCD6"/>
+                        <a:srgbClr val="F6DFD5"/>
                       </a:solidFill>
                       <a:prstDash val="solid"/>
                     </a:lnR>
                     <a:lnT w="9525" cap="flat" cmpd="sng" algn="ctr">
                       <a:solidFill>
-                        <a:srgbClr val="EBDCD6"/>
+                        <a:srgbClr val="F6DFD5"/>
                       </a:solidFill>
                       <a:prstDash val="solid"/>
                     </a:lnT>
                     <a:lnB w="9525" cap="flat" cmpd="sng" algn="ctr">
                       <a:solidFill>
-                        <a:srgbClr val="EBDCD6"/>
+                        <a:srgbClr val="F6DFD5"/>
                       </a:solidFill>
                       <a:prstDash val="solid"/>
                     </a:lnB>
                     <a:solidFill>
-                      <a:srgbClr val="F8F4F2"/>
+                      <a:srgbClr val="FBF1EC"/>
                     </a:solidFill>
                   </a:tcPr>
                 </a:tc>
@@ -6315,7 +6475,7 @@
     <p:bg>
       <p:bgPr>
         <a:solidFill>
-          <a:srgbClr val="FFFFFF"/>
+          <a:srgbClr val="F6DFD5"/>
         </a:solidFill>
         <a:effectLst/>
       </p:bgPr>
@@ -6335,14 +6495,14 @@
         </p:nvSpPr>
         <p:spPr>
           <a:xfrm>
-            <a:off x="9905695" y="-1463040"/>
-            <a:ext cx="3840480" cy="3840480"/>
+            <a:off x="10180015" y="-1645920"/>
+            <a:ext cx="3474720" cy="3474720"/>
           </a:xfrm>
           <a:prstGeom prst="ellipse">
             <a:avLst/>
           </a:prstGeom>
           <a:solidFill>
-            <a:srgbClr val="EBDCD6"/>
+            <a:srgbClr val="EBC0AD"/>
           </a:solidFill>
           <a:ln>
             <a:noFill/>
@@ -6358,20 +6518,58 @@
       </p:sp>
       <p:sp>
         <p:nvSpPr>
-          <p:cNvPr id="4" name="장식"/>
+          <p:cNvPr id="4" name="상단 라벨"/>
+          <p:cNvSpPr txBox="1"/>
+          <p:nvPr/>
+        </p:nvSpPr>
+        <p:spPr>
+          <a:xfrm>
+            <a:off x="640080" y="274320"/>
+            <a:ext cx="5486400" cy="274320"/>
+          </a:xfrm>
+          <a:prstGeom prst="rect">
+            <a:avLst/>
+          </a:prstGeom>
+          <a:noFill/>
+        </p:spPr>
+        <p:txBody>
+          <a:bodyPr wrap="square" lIns="54864" rIns="54864" tIns="27432" bIns="27432" anchor="ctr">
+            <a:noAutofit/>
+          </a:bodyPr>
+          <a:lstStyle/>
+          <a:p>
+            <a:pPr algn="l">
+              <a:lnSpc>
+                <a:spcPct val="115000"/>
+              </a:lnSpc>
+            </a:pPr>
+            <a:r>
+              <a:rPr sz="900" b="1" i="0" spc="250">
+                <a:solidFill>
+                  <a:srgbClr val="26231F"/>
+                </a:solidFill>
+              </a:rPr>
+              <a:t>INSURANCE CHECK</a:t>
+            </a:r>
+          </a:p>
+        </p:txBody>
+      </p:sp>
+      <p:sp>
+        <p:nvSpPr>
+          <p:cNvPr id="5" name="포인트"/>
           <p:cNvSpPr/>
           <p:nvPr/>
         </p:nvSpPr>
         <p:spPr>
           <a:xfrm>
-            <a:off x="11094415" y="274320"/>
-            <a:ext cx="411480" cy="411480"/>
-          </a:xfrm>
-          <a:prstGeom prst="ellipse">
+            <a:off x="11048695" y="502919"/>
+            <a:ext cx="274320" cy="274320"/>
+          </a:xfrm>
+          <a:prstGeom prst="round2SameRect">
             <a:avLst/>
           </a:prstGeom>
           <a:solidFill>
-            <a:srgbClr val="855A47"/>
+            <a:srgbClr val="FFFFFF"/>
           </a:solidFill>
           <a:ln>
             <a:noFill/>
@@ -6397,8 +6595,8 @@
         </p:nvSpPr>
         <p:spPr>
           <a:xfrm>
-            <a:off x="640080" y="457200"/>
-            <a:ext cx="9722815" cy="868680"/>
+            <a:off x="640080" y="658368"/>
+            <a:ext cx="9082735" cy="868680"/>
           </a:xfrm>
         </p:spPr>
         <p:txBody>
@@ -6415,7 +6613,7 @@
             <a:r>
               <a:rPr sz="3000" b="1" i="0">
                 <a:solidFill>
-                  <a:srgbClr val="422D24"/>
+                  <a:srgbClr val="26231F"/>
                 </a:solidFill>
               </a:rPr>
               <a:t>보장 항목 체크</a:t>
@@ -6425,14 +6623,14 @@
       </p:sp>
       <p:graphicFrame>
         <p:nvGraphicFramePr>
-          <p:cNvPr id="5" name="표"/>
+          <p:cNvPr id="6" name="표"/>
           <p:cNvGraphicFramePr>
             <a:graphicFrameLocks noGrp="1"/>
           </p:cNvGraphicFramePr>
           <p:nvPr/>
         </p:nvGraphicFramePr>
         <p:xfrm>
-          <a:off x="640080" y="1600200"/>
+          <a:off x="640080" y="1783080"/>
           <a:ext cx="10911534" cy="4773168"/>
         </p:xfrm>
         <a:graphic>
@@ -6457,7 +6655,7 @@
                       <a:r>
                         <a:rPr sz="1400" b="1">
                           <a:solidFill>
-                            <a:srgbClr val="FFFFFF"/>
+                            <a:srgbClr val="26231F"/>
                           </a:solidFill>
                         </a:rPr>
                         <a:t>보장 항목</a:t>
@@ -6467,30 +6665,30 @@
                   <a:tcPr anchor="ctr" marL="73152" marR="73152">
                     <a:lnL w="9525" cap="flat" cmpd="sng" algn="ctr">
                       <a:solidFill>
-                        <a:srgbClr val="855A47"/>
+                        <a:srgbClr val="D89579"/>
                       </a:solidFill>
                       <a:prstDash val="solid"/>
                     </a:lnL>
                     <a:lnR w="9525" cap="flat" cmpd="sng" algn="ctr">
                       <a:solidFill>
-                        <a:srgbClr val="855A47"/>
+                        <a:srgbClr val="D89579"/>
                       </a:solidFill>
                       <a:prstDash val="solid"/>
                     </a:lnR>
                     <a:lnT w="9525" cap="flat" cmpd="sng" algn="ctr">
                       <a:solidFill>
-                        <a:srgbClr val="855A47"/>
+                        <a:srgbClr val="D89579"/>
                       </a:solidFill>
                       <a:prstDash val="solid"/>
                     </a:lnT>
                     <a:lnB w="9525" cap="flat" cmpd="sng" algn="ctr">
                       <a:solidFill>
-                        <a:srgbClr val="855A47"/>
+                        <a:srgbClr val="D89579"/>
                       </a:solidFill>
                       <a:prstDash val="solid"/>
                     </a:lnB>
                     <a:solidFill>
-                      <a:srgbClr val="855A47"/>
+                      <a:srgbClr val="D89579"/>
                     </a:solidFill>
                   </a:tcPr>
                 </a:tc>
@@ -6503,7 +6701,7 @@
                       <a:r>
                         <a:rPr sz="1400" b="1">
                           <a:solidFill>
-                            <a:srgbClr val="FFFFFF"/>
+                            <a:srgbClr val="26231F"/>
                           </a:solidFill>
                         </a:rPr>
                         <a:t>가입 확인</a:t>
@@ -6513,30 +6711,30 @@
                   <a:tcPr anchor="ctr" marL="73152" marR="73152">
                     <a:lnL w="9525" cap="flat" cmpd="sng" algn="ctr">
                       <a:solidFill>
-                        <a:srgbClr val="855A47"/>
+                        <a:srgbClr val="D89579"/>
                       </a:solidFill>
                       <a:prstDash val="solid"/>
                     </a:lnL>
                     <a:lnR w="9525" cap="flat" cmpd="sng" algn="ctr">
                       <a:solidFill>
-                        <a:srgbClr val="855A47"/>
+                        <a:srgbClr val="D89579"/>
                       </a:solidFill>
                       <a:prstDash val="solid"/>
                     </a:lnR>
                     <a:lnT w="9525" cap="flat" cmpd="sng" algn="ctr">
                       <a:solidFill>
-                        <a:srgbClr val="855A47"/>
+                        <a:srgbClr val="D89579"/>
                       </a:solidFill>
                       <a:prstDash val="solid"/>
                     </a:lnT>
                     <a:lnB w="9525" cap="flat" cmpd="sng" algn="ctr">
                       <a:solidFill>
-                        <a:srgbClr val="855A47"/>
+                        <a:srgbClr val="D89579"/>
                       </a:solidFill>
                       <a:prstDash val="solid"/>
                     </a:lnB>
                     <a:solidFill>
-                      <a:srgbClr val="855A47"/>
+                      <a:srgbClr val="D89579"/>
                     </a:solidFill>
                   </a:tcPr>
                 </a:tc>
@@ -6549,7 +6747,7 @@
                       <a:r>
                         <a:rPr sz="1400" b="1">
                           <a:solidFill>
-                            <a:srgbClr val="FFFFFF"/>
+                            <a:srgbClr val="26231F"/>
                           </a:solidFill>
                         </a:rPr>
                         <a:t>확인 필요</a:t>
@@ -6559,30 +6757,30 @@
                   <a:tcPr anchor="ctr" marL="73152" marR="73152">
                     <a:lnL w="9525" cap="flat" cmpd="sng" algn="ctr">
                       <a:solidFill>
-                        <a:srgbClr val="855A47"/>
+                        <a:srgbClr val="D89579"/>
                       </a:solidFill>
                       <a:prstDash val="solid"/>
                     </a:lnL>
                     <a:lnR w="9525" cap="flat" cmpd="sng" algn="ctr">
                       <a:solidFill>
-                        <a:srgbClr val="855A47"/>
+                        <a:srgbClr val="D89579"/>
                       </a:solidFill>
                       <a:prstDash val="solid"/>
                     </a:lnR>
                     <a:lnT w="9525" cap="flat" cmpd="sng" algn="ctr">
                       <a:solidFill>
-                        <a:srgbClr val="855A47"/>
+                        <a:srgbClr val="D89579"/>
                       </a:solidFill>
                       <a:prstDash val="solid"/>
                     </a:lnT>
                     <a:lnB w="9525" cap="flat" cmpd="sng" algn="ctr">
                       <a:solidFill>
-                        <a:srgbClr val="855A47"/>
+                        <a:srgbClr val="D89579"/>
                       </a:solidFill>
                       <a:prstDash val="solid"/>
                     </a:lnB>
                     <a:solidFill>
-                      <a:srgbClr val="855A47"/>
+                      <a:srgbClr val="D89579"/>
                     </a:solidFill>
                   </a:tcPr>
                 </a:tc>
@@ -6595,7 +6793,7 @@
                       <a:r>
                         <a:rPr sz="1400" b="1">
                           <a:solidFill>
-                            <a:srgbClr val="FFFFFF"/>
+                            <a:srgbClr val="26231F"/>
                           </a:solidFill>
                         </a:rPr>
                         <a:t>해당 없음</a:t>
@@ -6605,30 +6803,30 @@
                   <a:tcPr anchor="ctr" marL="73152" marR="73152">
                     <a:lnL w="9525" cap="flat" cmpd="sng" algn="ctr">
                       <a:solidFill>
-                        <a:srgbClr val="855A47"/>
+                        <a:srgbClr val="D89579"/>
                       </a:solidFill>
                       <a:prstDash val="solid"/>
                     </a:lnL>
                     <a:lnR w="9525" cap="flat" cmpd="sng" algn="ctr">
                       <a:solidFill>
-                        <a:srgbClr val="855A47"/>
+                        <a:srgbClr val="D89579"/>
                       </a:solidFill>
                       <a:prstDash val="solid"/>
                     </a:lnR>
                     <a:lnT w="9525" cap="flat" cmpd="sng" algn="ctr">
                       <a:solidFill>
-                        <a:srgbClr val="855A47"/>
+                        <a:srgbClr val="D89579"/>
                       </a:solidFill>
                       <a:prstDash val="solid"/>
                     </a:lnT>
                     <a:lnB w="9525" cap="flat" cmpd="sng" algn="ctr">
                       <a:solidFill>
-                        <a:srgbClr val="855A47"/>
+                        <a:srgbClr val="D89579"/>
                       </a:solidFill>
                       <a:prstDash val="solid"/>
                     </a:lnB>
                     <a:solidFill>
-                      <a:srgbClr val="855A47"/>
+                      <a:srgbClr val="D89579"/>
                     </a:solidFill>
                   </a:tcPr>
                 </a:tc>
@@ -6643,7 +6841,7 @@
                       <a:r>
                         <a:rPr sz="1400" b="1">
                           <a:solidFill>
-                            <a:srgbClr val="422D24"/>
+                            <a:srgbClr val="493127"/>
                           </a:solidFill>
                         </a:rPr>
                         <a:t>사망·재해</a:t>
@@ -6653,30 +6851,30 @@
                   <a:tcPr anchor="ctr" marL="73152" marR="73152">
                     <a:lnL w="9525" cap="flat" cmpd="sng" algn="ctr">
                       <a:solidFill>
-                        <a:srgbClr val="EBDCD6"/>
+                        <a:srgbClr val="F6DFD5"/>
                       </a:solidFill>
                       <a:prstDash val="solid"/>
                     </a:lnL>
                     <a:lnR w="9525" cap="flat" cmpd="sng" algn="ctr">
                       <a:solidFill>
-                        <a:srgbClr val="EBDCD6"/>
+                        <a:srgbClr val="F6DFD5"/>
                       </a:solidFill>
                       <a:prstDash val="solid"/>
                     </a:lnR>
                     <a:lnT w="9525" cap="flat" cmpd="sng" algn="ctr">
                       <a:solidFill>
-                        <a:srgbClr val="EBDCD6"/>
+                        <a:srgbClr val="F6DFD5"/>
                       </a:solidFill>
                       <a:prstDash val="solid"/>
                     </a:lnT>
                     <a:lnB w="9525" cap="flat" cmpd="sng" algn="ctr">
                       <a:solidFill>
-                        <a:srgbClr val="EBDCD6"/>
+                        <a:srgbClr val="F6DFD5"/>
                       </a:solidFill>
                       <a:prstDash val="solid"/>
                     </a:lnB>
                     <a:solidFill>
-                      <a:srgbClr val="EBDCD6"/>
+                      <a:srgbClr val="F6DFD5"/>
                     </a:solidFill>
                   </a:tcPr>
                 </a:tc>
@@ -6689,7 +6887,7 @@
                       <a:r>
                         <a:rPr sz="1400" b="0">
                           <a:solidFill>
-                            <a:srgbClr val="2B2B2B"/>
+                            <a:srgbClr val="26231F"/>
                           </a:solidFill>
                         </a:rPr>
                         <a:t>□</a:t>
@@ -6699,25 +6897,25 @@
                   <a:tcPr anchor="ctr" marL="73152" marR="73152">
                     <a:lnL w="9525" cap="flat" cmpd="sng" algn="ctr">
                       <a:solidFill>
-                        <a:srgbClr val="EBDCD6"/>
+                        <a:srgbClr val="F6DFD5"/>
                       </a:solidFill>
                       <a:prstDash val="solid"/>
                     </a:lnL>
                     <a:lnR w="9525" cap="flat" cmpd="sng" algn="ctr">
                       <a:solidFill>
-                        <a:srgbClr val="EBDCD6"/>
+                        <a:srgbClr val="F6DFD5"/>
                       </a:solidFill>
                       <a:prstDash val="solid"/>
                     </a:lnR>
                     <a:lnT w="9525" cap="flat" cmpd="sng" algn="ctr">
                       <a:solidFill>
-                        <a:srgbClr val="EBDCD6"/>
+                        <a:srgbClr val="F6DFD5"/>
                       </a:solidFill>
                       <a:prstDash val="solid"/>
                     </a:lnT>
                     <a:lnB w="9525" cap="flat" cmpd="sng" algn="ctr">
                       <a:solidFill>
-                        <a:srgbClr val="EBDCD6"/>
+                        <a:srgbClr val="F6DFD5"/>
                       </a:solidFill>
                       <a:prstDash val="solid"/>
                     </a:lnB>
@@ -6735,7 +6933,7 @@
                       <a:r>
                         <a:rPr sz="1400" b="0">
                           <a:solidFill>
-                            <a:srgbClr val="2B2B2B"/>
+                            <a:srgbClr val="26231F"/>
                           </a:solidFill>
                         </a:rPr>
                         <a:t>□</a:t>
@@ -6745,25 +6943,25 @@
                   <a:tcPr anchor="ctr" marL="73152" marR="73152">
                     <a:lnL w="9525" cap="flat" cmpd="sng" algn="ctr">
                       <a:solidFill>
-                        <a:srgbClr val="EBDCD6"/>
+                        <a:srgbClr val="F6DFD5"/>
                       </a:solidFill>
                       <a:prstDash val="solid"/>
                     </a:lnL>
                     <a:lnR w="9525" cap="flat" cmpd="sng" algn="ctr">
                       <a:solidFill>
-                        <a:srgbClr val="EBDCD6"/>
+                        <a:srgbClr val="F6DFD5"/>
                       </a:solidFill>
                       <a:prstDash val="solid"/>
                     </a:lnR>
                     <a:lnT w="9525" cap="flat" cmpd="sng" algn="ctr">
                       <a:solidFill>
-                        <a:srgbClr val="EBDCD6"/>
+                        <a:srgbClr val="F6DFD5"/>
                       </a:solidFill>
                       <a:prstDash val="solid"/>
                     </a:lnT>
                     <a:lnB w="9525" cap="flat" cmpd="sng" algn="ctr">
                       <a:solidFill>
-                        <a:srgbClr val="EBDCD6"/>
+                        <a:srgbClr val="F6DFD5"/>
                       </a:solidFill>
                       <a:prstDash val="solid"/>
                     </a:lnB>
@@ -6781,7 +6979,7 @@
                       <a:r>
                         <a:rPr sz="1400" b="0">
                           <a:solidFill>
-                            <a:srgbClr val="2B2B2B"/>
+                            <a:srgbClr val="26231F"/>
                           </a:solidFill>
                         </a:rPr>
                         <a:t>□</a:t>
@@ -6791,25 +6989,25 @@
                   <a:tcPr anchor="ctr" marL="73152" marR="73152">
                     <a:lnL w="9525" cap="flat" cmpd="sng" algn="ctr">
                       <a:solidFill>
-                        <a:srgbClr val="EBDCD6"/>
+                        <a:srgbClr val="F6DFD5"/>
                       </a:solidFill>
                       <a:prstDash val="solid"/>
                     </a:lnL>
                     <a:lnR w="9525" cap="flat" cmpd="sng" algn="ctr">
                       <a:solidFill>
-                        <a:srgbClr val="EBDCD6"/>
+                        <a:srgbClr val="F6DFD5"/>
                       </a:solidFill>
                       <a:prstDash val="solid"/>
                     </a:lnR>
                     <a:lnT w="9525" cap="flat" cmpd="sng" algn="ctr">
                       <a:solidFill>
-                        <a:srgbClr val="EBDCD6"/>
+                        <a:srgbClr val="F6DFD5"/>
                       </a:solidFill>
                       <a:prstDash val="solid"/>
                     </a:lnT>
                     <a:lnB w="9525" cap="flat" cmpd="sng" algn="ctr">
                       <a:solidFill>
-                        <a:srgbClr val="EBDCD6"/>
+                        <a:srgbClr val="F6DFD5"/>
                       </a:solidFill>
                       <a:prstDash val="solid"/>
                     </a:lnB>
@@ -6829,7 +7027,7 @@
                       <a:r>
                         <a:rPr sz="1400" b="1">
                           <a:solidFill>
-                            <a:srgbClr val="422D24"/>
+                            <a:srgbClr val="493127"/>
                           </a:solidFill>
                         </a:rPr>
                         <a:t>질병 진단</a:t>
@@ -6839,30 +7037,30 @@
                   <a:tcPr anchor="ctr" marL="73152" marR="73152">
                     <a:lnL w="9525" cap="flat" cmpd="sng" algn="ctr">
                       <a:solidFill>
-                        <a:srgbClr val="EBDCD6"/>
+                        <a:srgbClr val="F6DFD5"/>
                       </a:solidFill>
                       <a:prstDash val="solid"/>
                     </a:lnL>
                     <a:lnR w="9525" cap="flat" cmpd="sng" algn="ctr">
                       <a:solidFill>
-                        <a:srgbClr val="EBDCD6"/>
+                        <a:srgbClr val="F6DFD5"/>
                       </a:solidFill>
                       <a:prstDash val="solid"/>
                     </a:lnR>
                     <a:lnT w="9525" cap="flat" cmpd="sng" algn="ctr">
                       <a:solidFill>
-                        <a:srgbClr val="EBDCD6"/>
+                        <a:srgbClr val="F6DFD5"/>
                       </a:solidFill>
                       <a:prstDash val="solid"/>
                     </a:lnT>
                     <a:lnB w="9525" cap="flat" cmpd="sng" algn="ctr">
                       <a:solidFill>
-                        <a:srgbClr val="EBDCD6"/>
+                        <a:srgbClr val="F6DFD5"/>
                       </a:solidFill>
                       <a:prstDash val="solid"/>
                     </a:lnB>
                     <a:solidFill>
-                      <a:srgbClr val="EBDCD6"/>
+                      <a:srgbClr val="F6DFD5"/>
                     </a:solidFill>
                   </a:tcPr>
                 </a:tc>
@@ -6875,7 +7073,7 @@
                       <a:r>
                         <a:rPr sz="1400" b="0">
                           <a:solidFill>
-                            <a:srgbClr val="2B2B2B"/>
+                            <a:srgbClr val="26231F"/>
                           </a:solidFill>
                         </a:rPr>
                         <a:t>□</a:t>
@@ -6885,30 +7083,30 @@
                   <a:tcPr anchor="ctr" marL="73152" marR="73152">
                     <a:lnL w="9525" cap="flat" cmpd="sng" algn="ctr">
                       <a:solidFill>
-                        <a:srgbClr val="EBDCD6"/>
+                        <a:srgbClr val="F6DFD5"/>
                       </a:solidFill>
                       <a:prstDash val="solid"/>
                     </a:lnL>
                     <a:lnR w="9525" cap="flat" cmpd="sng" algn="ctr">
                       <a:solidFill>
-                        <a:srgbClr val="EBDCD6"/>
+                        <a:srgbClr val="F6DFD5"/>
                       </a:solidFill>
                       <a:prstDash val="solid"/>
                     </a:lnR>
                     <a:lnT w="9525" cap="flat" cmpd="sng" algn="ctr">
                       <a:solidFill>
-                        <a:srgbClr val="EBDCD6"/>
+                        <a:srgbClr val="F6DFD5"/>
                       </a:solidFill>
                       <a:prstDash val="solid"/>
                     </a:lnT>
                     <a:lnB w="9525" cap="flat" cmpd="sng" algn="ctr">
                       <a:solidFill>
-                        <a:srgbClr val="EBDCD6"/>
+                        <a:srgbClr val="F6DFD5"/>
                       </a:solidFill>
                       <a:prstDash val="solid"/>
                     </a:lnB>
                     <a:solidFill>
-                      <a:srgbClr val="F8F4F2"/>
+                      <a:srgbClr val="FBF1EC"/>
                     </a:solidFill>
                   </a:tcPr>
                 </a:tc>
@@ -6921,7 +7119,7 @@
                       <a:r>
                         <a:rPr sz="1400" b="0">
                           <a:solidFill>
-                            <a:srgbClr val="2B2B2B"/>
+                            <a:srgbClr val="26231F"/>
                           </a:solidFill>
                         </a:rPr>
                         <a:t>□</a:t>
@@ -6931,30 +7129,30 @@
                   <a:tcPr anchor="ctr" marL="73152" marR="73152">
                     <a:lnL w="9525" cap="flat" cmpd="sng" algn="ctr">
                       <a:solidFill>
-                        <a:srgbClr val="EBDCD6"/>
+                        <a:srgbClr val="F6DFD5"/>
                       </a:solidFill>
                       <a:prstDash val="solid"/>
                     </a:lnL>
                     <a:lnR w="9525" cap="flat" cmpd="sng" algn="ctr">
                       <a:solidFill>
-                        <a:srgbClr val="EBDCD6"/>
+                        <a:srgbClr val="F6DFD5"/>
                       </a:solidFill>
                       <a:prstDash val="solid"/>
                     </a:lnR>
                     <a:lnT w="9525" cap="flat" cmpd="sng" algn="ctr">
                       <a:solidFill>
-                        <a:srgbClr val="EBDCD6"/>
+                        <a:srgbClr val="F6DFD5"/>
                       </a:solidFill>
                       <a:prstDash val="solid"/>
                     </a:lnT>
                     <a:lnB w="9525" cap="flat" cmpd="sng" algn="ctr">
                       <a:solidFill>
-                        <a:srgbClr val="EBDCD6"/>
+                        <a:srgbClr val="F6DFD5"/>
                       </a:solidFill>
                       <a:prstDash val="solid"/>
                     </a:lnB>
                     <a:solidFill>
-                      <a:srgbClr val="F8F4F2"/>
+                      <a:srgbClr val="FBF1EC"/>
                     </a:solidFill>
                   </a:tcPr>
                 </a:tc>
@@ -6967,7 +7165,7 @@
                       <a:r>
                         <a:rPr sz="1400" b="0">
                           <a:solidFill>
-                            <a:srgbClr val="2B2B2B"/>
+                            <a:srgbClr val="26231F"/>
                           </a:solidFill>
                         </a:rPr>
                         <a:t>□</a:t>
@@ -6977,30 +7175,30 @@
                   <a:tcPr anchor="ctr" marL="73152" marR="73152">
                     <a:lnL w="9525" cap="flat" cmpd="sng" algn="ctr">
                       <a:solidFill>
-                        <a:srgbClr val="EBDCD6"/>
+                        <a:srgbClr val="F6DFD5"/>
                       </a:solidFill>
                       <a:prstDash val="solid"/>
                     </a:lnL>
                     <a:lnR w="9525" cap="flat" cmpd="sng" algn="ctr">
                       <a:solidFill>
-                        <a:srgbClr val="EBDCD6"/>
+                        <a:srgbClr val="F6DFD5"/>
                       </a:solidFill>
                       <a:prstDash val="solid"/>
                     </a:lnR>
                     <a:lnT w="9525" cap="flat" cmpd="sng" algn="ctr">
                       <a:solidFill>
-                        <a:srgbClr val="EBDCD6"/>
+                        <a:srgbClr val="F6DFD5"/>
                       </a:solidFill>
                       <a:prstDash val="solid"/>
                     </a:lnT>
                     <a:lnB w="9525" cap="flat" cmpd="sng" algn="ctr">
                       <a:solidFill>
-                        <a:srgbClr val="EBDCD6"/>
+                        <a:srgbClr val="F6DFD5"/>
                       </a:solidFill>
                       <a:prstDash val="solid"/>
                     </a:lnB>
                     <a:solidFill>
-                      <a:srgbClr val="F8F4F2"/>
+                      <a:srgbClr val="FBF1EC"/>
                     </a:solidFill>
                   </a:tcPr>
                 </a:tc>
@@ -7015,7 +7213,7 @@
                       <a:r>
                         <a:rPr sz="1400" b="1">
                           <a:solidFill>
-                            <a:srgbClr val="422D24"/>
+                            <a:srgbClr val="493127"/>
                           </a:solidFill>
                         </a:rPr>
                         <a:t>암</a:t>
@@ -7025,30 +7223,30 @@
                   <a:tcPr anchor="ctr" marL="73152" marR="73152">
                     <a:lnL w="9525" cap="flat" cmpd="sng" algn="ctr">
                       <a:solidFill>
-                        <a:srgbClr val="EBDCD6"/>
+                        <a:srgbClr val="F6DFD5"/>
                       </a:solidFill>
                       <a:prstDash val="solid"/>
                     </a:lnL>
                     <a:lnR w="9525" cap="flat" cmpd="sng" algn="ctr">
                       <a:solidFill>
-                        <a:srgbClr val="EBDCD6"/>
+                        <a:srgbClr val="F6DFD5"/>
                       </a:solidFill>
                       <a:prstDash val="solid"/>
                     </a:lnR>
                     <a:lnT w="9525" cap="flat" cmpd="sng" algn="ctr">
                       <a:solidFill>
-                        <a:srgbClr val="EBDCD6"/>
+                        <a:srgbClr val="F6DFD5"/>
                       </a:solidFill>
                       <a:prstDash val="solid"/>
                     </a:lnT>
                     <a:lnB w="9525" cap="flat" cmpd="sng" algn="ctr">
                       <a:solidFill>
-                        <a:srgbClr val="EBDCD6"/>
+                        <a:srgbClr val="F6DFD5"/>
                       </a:solidFill>
                       <a:prstDash val="solid"/>
                     </a:lnB>
                     <a:solidFill>
-                      <a:srgbClr val="EBDCD6"/>
+                      <a:srgbClr val="F6DFD5"/>
                     </a:solidFill>
                   </a:tcPr>
                 </a:tc>
@@ -7061,7 +7259,7 @@
                       <a:r>
                         <a:rPr sz="1400" b="0">
                           <a:solidFill>
-                            <a:srgbClr val="2B2B2B"/>
+                            <a:srgbClr val="26231F"/>
                           </a:solidFill>
                         </a:rPr>
                         <a:t>□</a:t>
@@ -7071,25 +7269,25 @@
                   <a:tcPr anchor="ctr" marL="73152" marR="73152">
                     <a:lnL w="9525" cap="flat" cmpd="sng" algn="ctr">
                       <a:solidFill>
-                        <a:srgbClr val="EBDCD6"/>
+                        <a:srgbClr val="F6DFD5"/>
                       </a:solidFill>
                       <a:prstDash val="solid"/>
                     </a:lnL>
                     <a:lnR w="9525" cap="flat" cmpd="sng" algn="ctr">
                       <a:solidFill>
-                        <a:srgbClr val="EBDCD6"/>
+                        <a:srgbClr val="F6DFD5"/>
                       </a:solidFill>
                       <a:prstDash val="solid"/>
                     </a:lnR>
                     <a:lnT w="9525" cap="flat" cmpd="sng" algn="ctr">
                       <a:solidFill>
-                        <a:srgbClr val="EBDCD6"/>
+                        <a:srgbClr val="F6DFD5"/>
                       </a:solidFill>
                       <a:prstDash val="solid"/>
                     </a:lnT>
                     <a:lnB w="9525" cap="flat" cmpd="sng" algn="ctr">
                       <a:solidFill>
-                        <a:srgbClr val="EBDCD6"/>
+                        <a:srgbClr val="F6DFD5"/>
                       </a:solidFill>
                       <a:prstDash val="solid"/>
                     </a:lnB>
@@ -7107,7 +7305,7 @@
                       <a:r>
                         <a:rPr sz="1400" b="0">
                           <a:solidFill>
-                            <a:srgbClr val="2B2B2B"/>
+                            <a:srgbClr val="26231F"/>
                           </a:solidFill>
                         </a:rPr>
                         <a:t>□</a:t>
@@ -7117,25 +7315,25 @@
                   <a:tcPr anchor="ctr" marL="73152" marR="73152">
                     <a:lnL w="9525" cap="flat" cmpd="sng" algn="ctr">
                       <a:solidFill>
-                        <a:srgbClr val="EBDCD6"/>
+                        <a:srgbClr val="F6DFD5"/>
                       </a:solidFill>
                       <a:prstDash val="solid"/>
                     </a:lnL>
                     <a:lnR w="9525" cap="flat" cmpd="sng" algn="ctr">
                       <a:solidFill>
-                        <a:srgbClr val="EBDCD6"/>
+                        <a:srgbClr val="F6DFD5"/>
                       </a:solidFill>
                       <a:prstDash val="solid"/>
                     </a:lnR>
                     <a:lnT w="9525" cap="flat" cmpd="sng" algn="ctr">
                       <a:solidFill>
-                        <a:srgbClr val="EBDCD6"/>
+                        <a:srgbClr val="F6DFD5"/>
                       </a:solidFill>
                       <a:prstDash val="solid"/>
                     </a:lnT>
                     <a:lnB w="9525" cap="flat" cmpd="sng" algn="ctr">
                       <a:solidFill>
-                        <a:srgbClr val="EBDCD6"/>
+                        <a:srgbClr val="F6DFD5"/>
                       </a:solidFill>
                       <a:prstDash val="solid"/>
                     </a:lnB>
@@ -7153,7 +7351,7 @@
                       <a:r>
                         <a:rPr sz="1400" b="0">
                           <a:solidFill>
-                            <a:srgbClr val="2B2B2B"/>
+                            <a:srgbClr val="26231F"/>
                           </a:solidFill>
                         </a:rPr>
                         <a:t>□</a:t>
@@ -7163,25 +7361,25 @@
                   <a:tcPr anchor="ctr" marL="73152" marR="73152">
                     <a:lnL w="9525" cap="flat" cmpd="sng" algn="ctr">
                       <a:solidFill>
-                        <a:srgbClr val="EBDCD6"/>
+                        <a:srgbClr val="F6DFD5"/>
                       </a:solidFill>
                       <a:prstDash val="solid"/>
                     </a:lnL>
                     <a:lnR w="9525" cap="flat" cmpd="sng" algn="ctr">
                       <a:solidFill>
-                        <a:srgbClr val="EBDCD6"/>
+                        <a:srgbClr val="F6DFD5"/>
                       </a:solidFill>
                       <a:prstDash val="solid"/>
                     </a:lnR>
                     <a:lnT w="9525" cap="flat" cmpd="sng" algn="ctr">
                       <a:solidFill>
-                        <a:srgbClr val="EBDCD6"/>
+                        <a:srgbClr val="F6DFD5"/>
                       </a:solidFill>
                       <a:prstDash val="solid"/>
                     </a:lnT>
                     <a:lnB w="9525" cap="flat" cmpd="sng" algn="ctr">
                       <a:solidFill>
-                        <a:srgbClr val="EBDCD6"/>
+                        <a:srgbClr val="F6DFD5"/>
                       </a:solidFill>
                       <a:prstDash val="solid"/>
                     </a:lnB>
@@ -7201,7 +7399,7 @@
                       <a:r>
                         <a:rPr sz="1400" b="1">
                           <a:solidFill>
-                            <a:srgbClr val="422D24"/>
+                            <a:srgbClr val="493127"/>
                           </a:solidFill>
                         </a:rPr>
                         <a:t>뇌·심장</a:t>
@@ -7211,30 +7409,30 @@
                   <a:tcPr anchor="ctr" marL="73152" marR="73152">
                     <a:lnL w="9525" cap="flat" cmpd="sng" algn="ctr">
                       <a:solidFill>
-                        <a:srgbClr val="EBDCD6"/>
+                        <a:srgbClr val="F6DFD5"/>
                       </a:solidFill>
                       <a:prstDash val="solid"/>
                     </a:lnL>
                     <a:lnR w="9525" cap="flat" cmpd="sng" algn="ctr">
                       <a:solidFill>
-                        <a:srgbClr val="EBDCD6"/>
+                        <a:srgbClr val="F6DFD5"/>
                       </a:solidFill>
                       <a:prstDash val="solid"/>
                     </a:lnR>
                     <a:lnT w="9525" cap="flat" cmpd="sng" algn="ctr">
                       <a:solidFill>
-                        <a:srgbClr val="EBDCD6"/>
+                        <a:srgbClr val="F6DFD5"/>
                       </a:solidFill>
                       <a:prstDash val="solid"/>
                     </a:lnT>
                     <a:lnB w="9525" cap="flat" cmpd="sng" algn="ctr">
                       <a:solidFill>
-                        <a:srgbClr val="EBDCD6"/>
+                        <a:srgbClr val="F6DFD5"/>
                       </a:solidFill>
                       <a:prstDash val="solid"/>
                     </a:lnB>
                     <a:solidFill>
-                      <a:srgbClr val="EBDCD6"/>
+                      <a:srgbClr val="F6DFD5"/>
                     </a:solidFill>
                   </a:tcPr>
                 </a:tc>
@@ -7247,7 +7445,7 @@
                       <a:r>
                         <a:rPr sz="1400" b="0">
                           <a:solidFill>
-                            <a:srgbClr val="2B2B2B"/>
+                            <a:srgbClr val="26231F"/>
                           </a:solidFill>
                         </a:rPr>
                         <a:t>□</a:t>
@@ -7257,30 +7455,30 @@
                   <a:tcPr anchor="ctr" marL="73152" marR="73152">
                     <a:lnL w="9525" cap="flat" cmpd="sng" algn="ctr">
                       <a:solidFill>
-                        <a:srgbClr val="EBDCD6"/>
+                        <a:srgbClr val="F6DFD5"/>
                       </a:solidFill>
                       <a:prstDash val="solid"/>
                     </a:lnL>
                     <a:lnR w="9525" cap="flat" cmpd="sng" algn="ctr">
                       <a:solidFill>
-                        <a:srgbClr val="EBDCD6"/>
+                        <a:srgbClr val="F6DFD5"/>
                       </a:solidFill>
                       <a:prstDash val="solid"/>
                     </a:lnR>
                     <a:lnT w="9525" cap="flat" cmpd="sng" algn="ctr">
                       <a:solidFill>
-                        <a:srgbClr val="EBDCD6"/>
+                        <a:srgbClr val="F6DFD5"/>
                       </a:solidFill>
                       <a:prstDash val="solid"/>
                     </a:lnT>
                     <a:lnB w="9525" cap="flat" cmpd="sng" algn="ctr">
                       <a:solidFill>
-                        <a:srgbClr val="EBDCD6"/>
+                        <a:srgbClr val="F6DFD5"/>
                       </a:solidFill>
                       <a:prstDash val="solid"/>
                     </a:lnB>
                     <a:solidFill>
-                      <a:srgbClr val="F8F4F2"/>
+                      <a:srgbClr val="FBF1EC"/>
                     </a:solidFill>
                   </a:tcPr>
                 </a:tc>
@@ -7293,7 +7491,7 @@
                       <a:r>
                         <a:rPr sz="1400" b="0">
                           <a:solidFill>
-                            <a:srgbClr val="2B2B2B"/>
+                            <a:srgbClr val="26231F"/>
                           </a:solidFill>
                         </a:rPr>
                         <a:t>□</a:t>
@@ -7303,30 +7501,30 @@
                   <a:tcPr anchor="ctr" marL="73152" marR="73152">
                     <a:lnL w="9525" cap="flat" cmpd="sng" algn="ctr">
                       <a:solidFill>
-                        <a:srgbClr val="EBDCD6"/>
+                        <a:srgbClr val="F6DFD5"/>
                       </a:solidFill>
                       <a:prstDash val="solid"/>
                     </a:lnL>
                     <a:lnR w="9525" cap="flat" cmpd="sng" algn="ctr">
                       <a:solidFill>
-                        <a:srgbClr val="EBDCD6"/>
+                        <a:srgbClr val="F6DFD5"/>
                       </a:solidFill>
                       <a:prstDash val="solid"/>
                     </a:lnR>
                     <a:lnT w="9525" cap="flat" cmpd="sng" algn="ctr">
                       <a:solidFill>
-                        <a:srgbClr val="EBDCD6"/>
+                        <a:srgbClr val="F6DFD5"/>
                       </a:solidFill>
                       <a:prstDash val="solid"/>
                     </a:lnT>
                     <a:lnB w="9525" cap="flat" cmpd="sng" algn="ctr">
                       <a:solidFill>
-                        <a:srgbClr val="EBDCD6"/>
+                        <a:srgbClr val="F6DFD5"/>
                       </a:solidFill>
                       <a:prstDash val="solid"/>
                     </a:lnB>
                     <a:solidFill>
-                      <a:srgbClr val="F8F4F2"/>
+                      <a:srgbClr val="FBF1EC"/>
                     </a:solidFill>
                   </a:tcPr>
                 </a:tc>
@@ -7339,7 +7537,7 @@
                       <a:r>
                         <a:rPr sz="1400" b="0">
                           <a:solidFill>
-                            <a:srgbClr val="2B2B2B"/>
+                            <a:srgbClr val="26231F"/>
                           </a:solidFill>
                         </a:rPr>
                         <a:t>□</a:t>
@@ -7349,30 +7547,30 @@
                   <a:tcPr anchor="ctr" marL="73152" marR="73152">
                     <a:lnL w="9525" cap="flat" cmpd="sng" algn="ctr">
                       <a:solidFill>
-                        <a:srgbClr val="EBDCD6"/>
+                        <a:srgbClr val="F6DFD5"/>
                       </a:solidFill>
                       <a:prstDash val="solid"/>
                     </a:lnL>
                     <a:lnR w="9525" cap="flat" cmpd="sng" algn="ctr">
                       <a:solidFill>
-                        <a:srgbClr val="EBDCD6"/>
+                        <a:srgbClr val="F6DFD5"/>
                       </a:solidFill>
                       <a:prstDash val="solid"/>
                     </a:lnR>
                     <a:lnT w="9525" cap="flat" cmpd="sng" algn="ctr">
                       <a:solidFill>
-                        <a:srgbClr val="EBDCD6"/>
+                        <a:srgbClr val="F6DFD5"/>
                       </a:solidFill>
                       <a:prstDash val="solid"/>
                     </a:lnT>
                     <a:lnB w="9525" cap="flat" cmpd="sng" algn="ctr">
                       <a:solidFill>
-                        <a:srgbClr val="EBDCD6"/>
+                        <a:srgbClr val="F6DFD5"/>
                       </a:solidFill>
                       <a:prstDash val="solid"/>
                     </a:lnB>
                     <a:solidFill>
-                      <a:srgbClr val="F8F4F2"/>
+                      <a:srgbClr val="FBF1EC"/>
                     </a:solidFill>
                   </a:tcPr>
                 </a:tc>
@@ -7387,7 +7585,7 @@
                       <a:r>
                         <a:rPr sz="1400" b="1">
                           <a:solidFill>
-                            <a:srgbClr val="422D24"/>
+                            <a:srgbClr val="493127"/>
                           </a:solidFill>
                         </a:rPr>
                         <a:t>입원·수술</a:t>
@@ -7397,30 +7595,30 @@
                   <a:tcPr anchor="ctr" marL="73152" marR="73152">
                     <a:lnL w="9525" cap="flat" cmpd="sng" algn="ctr">
                       <a:solidFill>
-                        <a:srgbClr val="EBDCD6"/>
+                        <a:srgbClr val="F6DFD5"/>
                       </a:solidFill>
                       <a:prstDash val="solid"/>
                     </a:lnL>
                     <a:lnR w="9525" cap="flat" cmpd="sng" algn="ctr">
                       <a:solidFill>
-                        <a:srgbClr val="EBDCD6"/>
+                        <a:srgbClr val="F6DFD5"/>
                       </a:solidFill>
                       <a:prstDash val="solid"/>
                     </a:lnR>
                     <a:lnT w="9525" cap="flat" cmpd="sng" algn="ctr">
                       <a:solidFill>
-                        <a:srgbClr val="EBDCD6"/>
+                        <a:srgbClr val="F6DFD5"/>
                       </a:solidFill>
                       <a:prstDash val="solid"/>
                     </a:lnT>
                     <a:lnB w="9525" cap="flat" cmpd="sng" algn="ctr">
                       <a:solidFill>
-                        <a:srgbClr val="EBDCD6"/>
+                        <a:srgbClr val="F6DFD5"/>
                       </a:solidFill>
                       <a:prstDash val="solid"/>
                     </a:lnB>
                     <a:solidFill>
-                      <a:srgbClr val="EBDCD6"/>
+                      <a:srgbClr val="F6DFD5"/>
                     </a:solidFill>
                   </a:tcPr>
                 </a:tc>
@@ -7433,7 +7631,7 @@
                       <a:r>
                         <a:rPr sz="1400" b="0">
                           <a:solidFill>
-                            <a:srgbClr val="2B2B2B"/>
+                            <a:srgbClr val="26231F"/>
                           </a:solidFill>
                         </a:rPr>
                         <a:t>□</a:t>
@@ -7443,25 +7641,25 @@
                   <a:tcPr anchor="ctr" marL="73152" marR="73152">
                     <a:lnL w="9525" cap="flat" cmpd="sng" algn="ctr">
                       <a:solidFill>
-                        <a:srgbClr val="EBDCD6"/>
+                        <a:srgbClr val="F6DFD5"/>
                       </a:solidFill>
                       <a:prstDash val="solid"/>
                     </a:lnL>
                     <a:lnR w="9525" cap="flat" cmpd="sng" algn="ctr">
                       <a:solidFill>
-                        <a:srgbClr val="EBDCD6"/>
+                        <a:srgbClr val="F6DFD5"/>
                       </a:solidFill>
                       <a:prstDash val="solid"/>
                     </a:lnR>
                     <a:lnT w="9525" cap="flat" cmpd="sng" algn="ctr">
                       <a:solidFill>
-                        <a:srgbClr val="EBDCD6"/>
+                        <a:srgbClr val="F6DFD5"/>
                       </a:solidFill>
                       <a:prstDash val="solid"/>
                     </a:lnT>
                     <a:lnB w="9525" cap="flat" cmpd="sng" algn="ctr">
                       <a:solidFill>
-                        <a:srgbClr val="EBDCD6"/>
+                        <a:srgbClr val="F6DFD5"/>
                       </a:solidFill>
                       <a:prstDash val="solid"/>
                     </a:lnB>
@@ -7479,7 +7677,7 @@
                       <a:r>
                         <a:rPr sz="1400" b="0">
                           <a:solidFill>
-                            <a:srgbClr val="2B2B2B"/>
+                            <a:srgbClr val="26231F"/>
                           </a:solidFill>
                         </a:rPr>
                         <a:t>□</a:t>
@@ -7489,25 +7687,25 @@
                   <a:tcPr anchor="ctr" marL="73152" marR="73152">
                     <a:lnL w="9525" cap="flat" cmpd="sng" algn="ctr">
                       <a:solidFill>
-                        <a:srgbClr val="EBDCD6"/>
+                        <a:srgbClr val="F6DFD5"/>
                       </a:solidFill>
                       <a:prstDash val="solid"/>
                     </a:lnL>
                     <a:lnR w="9525" cap="flat" cmpd="sng" algn="ctr">
                       <a:solidFill>
-                        <a:srgbClr val="EBDCD6"/>
+                        <a:srgbClr val="F6DFD5"/>
                       </a:solidFill>
                       <a:prstDash val="solid"/>
                     </a:lnR>
                     <a:lnT w="9525" cap="flat" cmpd="sng" algn="ctr">
                       <a:solidFill>
-                        <a:srgbClr val="EBDCD6"/>
+                        <a:srgbClr val="F6DFD5"/>
                       </a:solidFill>
                       <a:prstDash val="solid"/>
                     </a:lnT>
                     <a:lnB w="9525" cap="flat" cmpd="sng" algn="ctr">
                       <a:solidFill>
-                        <a:srgbClr val="EBDCD6"/>
+                        <a:srgbClr val="F6DFD5"/>
                       </a:solidFill>
                       <a:prstDash val="solid"/>
                     </a:lnB>
@@ -7525,7 +7723,7 @@
                       <a:r>
                         <a:rPr sz="1400" b="0">
                           <a:solidFill>
-                            <a:srgbClr val="2B2B2B"/>
+                            <a:srgbClr val="26231F"/>
                           </a:solidFill>
                         </a:rPr>
                         <a:t>□</a:t>
@@ -7535,25 +7733,25 @@
                   <a:tcPr anchor="ctr" marL="73152" marR="73152">
                     <a:lnL w="9525" cap="flat" cmpd="sng" algn="ctr">
                       <a:solidFill>
-                        <a:srgbClr val="EBDCD6"/>
+                        <a:srgbClr val="F6DFD5"/>
                       </a:solidFill>
                       <a:prstDash val="solid"/>
                     </a:lnL>
                     <a:lnR w="9525" cap="flat" cmpd="sng" algn="ctr">
                       <a:solidFill>
-                        <a:srgbClr val="EBDCD6"/>
+                        <a:srgbClr val="F6DFD5"/>
                       </a:solidFill>
                       <a:prstDash val="solid"/>
                     </a:lnR>
                     <a:lnT w="9525" cap="flat" cmpd="sng" algn="ctr">
                       <a:solidFill>
-                        <a:srgbClr val="EBDCD6"/>
+                        <a:srgbClr val="F6DFD5"/>
                       </a:solidFill>
                       <a:prstDash val="solid"/>
                     </a:lnT>
                     <a:lnB w="9525" cap="flat" cmpd="sng" algn="ctr">
                       <a:solidFill>
-                        <a:srgbClr val="EBDCD6"/>
+                        <a:srgbClr val="F6DFD5"/>
                       </a:solidFill>
                       <a:prstDash val="solid"/>
                     </a:lnB>
@@ -7573,7 +7771,7 @@
                       <a:r>
                         <a:rPr sz="1400" b="1">
                           <a:solidFill>
-                            <a:srgbClr val="422D24"/>
+                            <a:srgbClr val="493127"/>
                           </a:solidFill>
                         </a:rPr>
                         <a:t>상해</a:t>
@@ -7583,30 +7781,30 @@
                   <a:tcPr anchor="ctr" marL="73152" marR="73152">
                     <a:lnL w="9525" cap="flat" cmpd="sng" algn="ctr">
                       <a:solidFill>
-                        <a:srgbClr val="EBDCD6"/>
+                        <a:srgbClr val="F6DFD5"/>
                       </a:solidFill>
                       <a:prstDash val="solid"/>
                     </a:lnL>
                     <a:lnR w="9525" cap="flat" cmpd="sng" algn="ctr">
                       <a:solidFill>
-                        <a:srgbClr val="EBDCD6"/>
+                        <a:srgbClr val="F6DFD5"/>
                       </a:solidFill>
                       <a:prstDash val="solid"/>
                     </a:lnR>
                     <a:lnT w="9525" cap="flat" cmpd="sng" algn="ctr">
                       <a:solidFill>
-                        <a:srgbClr val="EBDCD6"/>
+                        <a:srgbClr val="F6DFD5"/>
                       </a:solidFill>
                       <a:prstDash val="solid"/>
                     </a:lnT>
                     <a:lnB w="9525" cap="flat" cmpd="sng" algn="ctr">
                       <a:solidFill>
-                        <a:srgbClr val="EBDCD6"/>
+                        <a:srgbClr val="F6DFD5"/>
                       </a:solidFill>
                       <a:prstDash val="solid"/>
                     </a:lnB>
                     <a:solidFill>
-                      <a:srgbClr val="EBDCD6"/>
+                      <a:srgbClr val="F6DFD5"/>
                     </a:solidFill>
                   </a:tcPr>
                 </a:tc>
@@ -7619,7 +7817,7 @@
                       <a:r>
                         <a:rPr sz="1400" b="0">
                           <a:solidFill>
-                            <a:srgbClr val="2B2B2B"/>
+                            <a:srgbClr val="26231F"/>
                           </a:solidFill>
                         </a:rPr>
                         <a:t>□</a:t>
@@ -7629,30 +7827,30 @@
                   <a:tcPr anchor="ctr" marL="73152" marR="73152">
                     <a:lnL w="9525" cap="flat" cmpd="sng" algn="ctr">
                       <a:solidFill>
-                        <a:srgbClr val="EBDCD6"/>
+                        <a:srgbClr val="F6DFD5"/>
                       </a:solidFill>
                       <a:prstDash val="solid"/>
                     </a:lnL>
                     <a:lnR w="9525" cap="flat" cmpd="sng" algn="ctr">
                       <a:solidFill>
-                        <a:srgbClr val="EBDCD6"/>
+                        <a:srgbClr val="F6DFD5"/>
                       </a:solidFill>
                       <a:prstDash val="solid"/>
                     </a:lnR>
                     <a:lnT w="9525" cap="flat" cmpd="sng" algn="ctr">
                       <a:solidFill>
-                        <a:srgbClr val="EBDCD6"/>
+                        <a:srgbClr val="F6DFD5"/>
                       </a:solidFill>
                       <a:prstDash val="solid"/>
                     </a:lnT>
                     <a:lnB w="9525" cap="flat" cmpd="sng" algn="ctr">
                       <a:solidFill>
-                        <a:srgbClr val="EBDCD6"/>
+                        <a:srgbClr val="F6DFD5"/>
                       </a:solidFill>
                       <a:prstDash val="solid"/>
                     </a:lnB>
                     <a:solidFill>
-                      <a:srgbClr val="F8F4F2"/>
+                      <a:srgbClr val="FBF1EC"/>
                     </a:solidFill>
                   </a:tcPr>
                 </a:tc>
@@ -7665,7 +7863,7 @@
                       <a:r>
                         <a:rPr sz="1400" b="0">
                           <a:solidFill>
-                            <a:srgbClr val="2B2B2B"/>
+                            <a:srgbClr val="26231F"/>
                           </a:solidFill>
                         </a:rPr>
                         <a:t>□</a:t>
@@ -7675,30 +7873,30 @@
                   <a:tcPr anchor="ctr" marL="73152" marR="73152">
                     <a:lnL w="9525" cap="flat" cmpd="sng" algn="ctr">
                       <a:solidFill>
-                        <a:srgbClr val="EBDCD6"/>
+                        <a:srgbClr val="F6DFD5"/>
                       </a:solidFill>
                       <a:prstDash val="solid"/>
                     </a:lnL>
                     <a:lnR w="9525" cap="flat" cmpd="sng" algn="ctr">
                       <a:solidFill>
-                        <a:srgbClr val="EBDCD6"/>
+                        <a:srgbClr val="F6DFD5"/>
                       </a:solidFill>
                       <a:prstDash val="solid"/>
                     </a:lnR>
                     <a:lnT w="9525" cap="flat" cmpd="sng" algn="ctr">
                       <a:solidFill>
-                        <a:srgbClr val="EBDCD6"/>
+                        <a:srgbClr val="F6DFD5"/>
                       </a:solidFill>
                       <a:prstDash val="solid"/>
                     </a:lnT>
                     <a:lnB w="9525" cap="flat" cmpd="sng" algn="ctr">
                       <a:solidFill>
-                        <a:srgbClr val="EBDCD6"/>
+                        <a:srgbClr val="F6DFD5"/>
                       </a:solidFill>
                       <a:prstDash val="solid"/>
                     </a:lnB>
                     <a:solidFill>
-                      <a:srgbClr val="F8F4F2"/>
+                      <a:srgbClr val="FBF1EC"/>
                     </a:solidFill>
                   </a:tcPr>
                 </a:tc>
@@ -7711,7 +7909,7 @@
                       <a:r>
                         <a:rPr sz="1400" b="0">
                           <a:solidFill>
-                            <a:srgbClr val="2B2B2B"/>
+                            <a:srgbClr val="26231F"/>
                           </a:solidFill>
                         </a:rPr>
                         <a:t>□</a:t>
@@ -7721,30 +7919,30 @@
                   <a:tcPr anchor="ctr" marL="73152" marR="73152">
                     <a:lnL w="9525" cap="flat" cmpd="sng" algn="ctr">
                       <a:solidFill>
-                        <a:srgbClr val="EBDCD6"/>
+                        <a:srgbClr val="F6DFD5"/>
                       </a:solidFill>
                       <a:prstDash val="solid"/>
                     </a:lnL>
                     <a:lnR w="9525" cap="flat" cmpd="sng" algn="ctr">
                       <a:solidFill>
-                        <a:srgbClr val="EBDCD6"/>
+                        <a:srgbClr val="F6DFD5"/>
                       </a:solidFill>
                       <a:prstDash val="solid"/>
                     </a:lnR>
                     <a:lnT w="9525" cap="flat" cmpd="sng" algn="ctr">
                       <a:solidFill>
-                        <a:srgbClr val="EBDCD6"/>
+                        <a:srgbClr val="F6DFD5"/>
                       </a:solidFill>
                       <a:prstDash val="solid"/>
                     </a:lnT>
                     <a:lnB w="9525" cap="flat" cmpd="sng" algn="ctr">
                       <a:solidFill>
-                        <a:srgbClr val="EBDCD6"/>
+                        <a:srgbClr val="F6DFD5"/>
                       </a:solidFill>
                       <a:prstDash val="solid"/>
                     </a:lnB>
                     <a:solidFill>
-                      <a:srgbClr val="F8F4F2"/>
+                      <a:srgbClr val="FBF1EC"/>
                     </a:solidFill>
                   </a:tcPr>
                 </a:tc>
@@ -7759,7 +7957,7 @@
                       <a:r>
                         <a:rPr sz="1400" b="1">
                           <a:solidFill>
-                            <a:srgbClr val="422D24"/>
+                            <a:srgbClr val="493127"/>
                           </a:solidFill>
                         </a:rPr>
                         <a:t>실손의료</a:t>
@@ -7769,30 +7967,30 @@
                   <a:tcPr anchor="ctr" marL="73152" marR="73152">
                     <a:lnL w="9525" cap="flat" cmpd="sng" algn="ctr">
                       <a:solidFill>
-                        <a:srgbClr val="EBDCD6"/>
+                        <a:srgbClr val="F6DFD5"/>
                       </a:solidFill>
                       <a:prstDash val="solid"/>
                     </a:lnL>
                     <a:lnR w="9525" cap="flat" cmpd="sng" algn="ctr">
                       <a:solidFill>
-                        <a:srgbClr val="EBDCD6"/>
+                        <a:srgbClr val="F6DFD5"/>
                       </a:solidFill>
                       <a:prstDash val="solid"/>
                     </a:lnR>
                     <a:lnT w="9525" cap="flat" cmpd="sng" algn="ctr">
                       <a:solidFill>
-                        <a:srgbClr val="EBDCD6"/>
+                        <a:srgbClr val="F6DFD5"/>
                       </a:solidFill>
                       <a:prstDash val="solid"/>
                     </a:lnT>
                     <a:lnB w="9525" cap="flat" cmpd="sng" algn="ctr">
                       <a:solidFill>
-                        <a:srgbClr val="EBDCD6"/>
+                        <a:srgbClr val="F6DFD5"/>
                       </a:solidFill>
                       <a:prstDash val="solid"/>
                     </a:lnB>
                     <a:solidFill>
-                      <a:srgbClr val="EBDCD6"/>
+                      <a:srgbClr val="F6DFD5"/>
                     </a:solidFill>
                   </a:tcPr>
                 </a:tc>
@@ -7805,7 +8003,7 @@
                       <a:r>
                         <a:rPr sz="1400" b="0">
                           <a:solidFill>
-                            <a:srgbClr val="2B2B2B"/>
+                            <a:srgbClr val="26231F"/>
                           </a:solidFill>
                         </a:rPr>
                         <a:t>□</a:t>
@@ -7815,25 +8013,25 @@
                   <a:tcPr anchor="ctr" marL="73152" marR="73152">
                     <a:lnL w="9525" cap="flat" cmpd="sng" algn="ctr">
                       <a:solidFill>
-                        <a:srgbClr val="EBDCD6"/>
+                        <a:srgbClr val="F6DFD5"/>
                       </a:solidFill>
                       <a:prstDash val="solid"/>
                     </a:lnL>
                     <a:lnR w="9525" cap="flat" cmpd="sng" algn="ctr">
                       <a:solidFill>
-                        <a:srgbClr val="EBDCD6"/>
+                        <a:srgbClr val="F6DFD5"/>
                       </a:solidFill>
                       <a:prstDash val="solid"/>
                     </a:lnR>
                     <a:lnT w="9525" cap="flat" cmpd="sng" algn="ctr">
                       <a:solidFill>
-                        <a:srgbClr val="EBDCD6"/>
+                        <a:srgbClr val="F6DFD5"/>
                       </a:solidFill>
                       <a:prstDash val="solid"/>
                     </a:lnT>
                     <a:lnB w="9525" cap="flat" cmpd="sng" algn="ctr">
                       <a:solidFill>
-                        <a:srgbClr val="EBDCD6"/>
+                        <a:srgbClr val="F6DFD5"/>
                       </a:solidFill>
                       <a:prstDash val="solid"/>
                     </a:lnB>
@@ -7851,7 +8049,7 @@
                       <a:r>
                         <a:rPr sz="1400" b="0">
                           <a:solidFill>
-                            <a:srgbClr val="2B2B2B"/>
+                            <a:srgbClr val="26231F"/>
                           </a:solidFill>
                         </a:rPr>
                         <a:t>□</a:t>
@@ -7861,25 +8059,25 @@
                   <a:tcPr anchor="ctr" marL="73152" marR="73152">
                     <a:lnL w="9525" cap="flat" cmpd="sng" algn="ctr">
                       <a:solidFill>
-                        <a:srgbClr val="EBDCD6"/>
+                        <a:srgbClr val="F6DFD5"/>
                       </a:solidFill>
                       <a:prstDash val="solid"/>
                     </a:lnL>
                     <a:lnR w="9525" cap="flat" cmpd="sng" algn="ctr">
                       <a:solidFill>
-                        <a:srgbClr val="EBDCD6"/>
+                        <a:srgbClr val="F6DFD5"/>
                       </a:solidFill>
                       <a:prstDash val="solid"/>
                     </a:lnR>
                     <a:lnT w="9525" cap="flat" cmpd="sng" algn="ctr">
                       <a:solidFill>
-                        <a:srgbClr val="EBDCD6"/>
+                        <a:srgbClr val="F6DFD5"/>
                       </a:solidFill>
                       <a:prstDash val="solid"/>
                     </a:lnT>
                     <a:lnB w="9525" cap="flat" cmpd="sng" algn="ctr">
                       <a:solidFill>
-                        <a:srgbClr val="EBDCD6"/>
+                        <a:srgbClr val="F6DFD5"/>
                       </a:solidFill>
                       <a:prstDash val="solid"/>
                     </a:lnB>
@@ -7897,7 +8095,7 @@
                       <a:r>
                         <a:rPr sz="1400" b="0">
                           <a:solidFill>
-                            <a:srgbClr val="2B2B2B"/>
+                            <a:srgbClr val="26231F"/>
                           </a:solidFill>
                         </a:rPr>
                         <a:t>□</a:t>
@@ -7907,25 +8105,25 @@
                   <a:tcPr anchor="ctr" marL="73152" marR="73152">
                     <a:lnL w="9525" cap="flat" cmpd="sng" algn="ctr">
                       <a:solidFill>
-                        <a:srgbClr val="EBDCD6"/>
+                        <a:srgbClr val="F6DFD5"/>
                       </a:solidFill>
                       <a:prstDash val="solid"/>
                     </a:lnL>
                     <a:lnR w="9525" cap="flat" cmpd="sng" algn="ctr">
                       <a:solidFill>
-                        <a:srgbClr val="EBDCD6"/>
+                        <a:srgbClr val="F6DFD5"/>
                       </a:solidFill>
                       <a:prstDash val="solid"/>
                     </a:lnR>
                     <a:lnT w="9525" cap="flat" cmpd="sng" algn="ctr">
                       <a:solidFill>
-                        <a:srgbClr val="EBDCD6"/>
+                        <a:srgbClr val="F6DFD5"/>
                       </a:solidFill>
                       <a:prstDash val="solid"/>
                     </a:lnT>
                     <a:lnB w="9525" cap="flat" cmpd="sng" algn="ctr">
                       <a:solidFill>
-                        <a:srgbClr val="EBDCD6"/>
+                        <a:srgbClr val="F6DFD5"/>
                       </a:solidFill>
                       <a:prstDash val="solid"/>
                     </a:lnB>
@@ -7945,7 +8143,7 @@
                       <a:r>
                         <a:rPr sz="1400" b="1">
                           <a:solidFill>
-                            <a:srgbClr val="422D24"/>
+                            <a:srgbClr val="493127"/>
                           </a:solidFill>
                         </a:rPr>
                         <a:t>연금·노후자금</a:t>
@@ -7955,30 +8153,30 @@
                   <a:tcPr anchor="ctr" marL="73152" marR="73152">
                     <a:lnL w="9525" cap="flat" cmpd="sng" algn="ctr">
                       <a:solidFill>
-                        <a:srgbClr val="EBDCD6"/>
+                        <a:srgbClr val="F6DFD5"/>
                       </a:solidFill>
                       <a:prstDash val="solid"/>
                     </a:lnL>
                     <a:lnR w="9525" cap="flat" cmpd="sng" algn="ctr">
                       <a:solidFill>
-                        <a:srgbClr val="EBDCD6"/>
+                        <a:srgbClr val="F6DFD5"/>
                       </a:solidFill>
                       <a:prstDash val="solid"/>
                     </a:lnR>
                     <a:lnT w="9525" cap="flat" cmpd="sng" algn="ctr">
                       <a:solidFill>
-                        <a:srgbClr val="EBDCD6"/>
+                        <a:srgbClr val="F6DFD5"/>
                       </a:solidFill>
                       <a:prstDash val="solid"/>
                     </a:lnT>
                     <a:lnB w="9525" cap="flat" cmpd="sng" algn="ctr">
                       <a:solidFill>
-                        <a:srgbClr val="EBDCD6"/>
+                        <a:srgbClr val="F6DFD5"/>
                       </a:solidFill>
                       <a:prstDash val="solid"/>
                     </a:lnB>
                     <a:solidFill>
-                      <a:srgbClr val="EBDCD6"/>
+                      <a:srgbClr val="F6DFD5"/>
                     </a:solidFill>
                   </a:tcPr>
                 </a:tc>
@@ -7991,7 +8189,7 @@
                       <a:r>
                         <a:rPr sz="1400" b="0">
                           <a:solidFill>
-                            <a:srgbClr val="2B2B2B"/>
+                            <a:srgbClr val="26231F"/>
                           </a:solidFill>
                         </a:rPr>
                         <a:t>□</a:t>
@@ -8001,30 +8199,30 @@
                   <a:tcPr anchor="ctr" marL="73152" marR="73152">
                     <a:lnL w="9525" cap="flat" cmpd="sng" algn="ctr">
                       <a:solidFill>
-                        <a:srgbClr val="EBDCD6"/>
+                        <a:srgbClr val="F6DFD5"/>
                       </a:solidFill>
                       <a:prstDash val="solid"/>
                     </a:lnL>
                     <a:lnR w="9525" cap="flat" cmpd="sng" algn="ctr">
                       <a:solidFill>
-                        <a:srgbClr val="EBDCD6"/>
+                        <a:srgbClr val="F6DFD5"/>
                       </a:solidFill>
                       <a:prstDash val="solid"/>
                     </a:lnR>
                     <a:lnT w="9525" cap="flat" cmpd="sng" algn="ctr">
                       <a:solidFill>
-                        <a:srgbClr val="EBDCD6"/>
+                        <a:srgbClr val="F6DFD5"/>
                       </a:solidFill>
                       <a:prstDash val="solid"/>
                     </a:lnT>
                     <a:lnB w="9525" cap="flat" cmpd="sng" algn="ctr">
                       <a:solidFill>
-                        <a:srgbClr val="EBDCD6"/>
+                        <a:srgbClr val="F6DFD5"/>
                       </a:solidFill>
                       <a:prstDash val="solid"/>
                     </a:lnB>
                     <a:solidFill>
-                      <a:srgbClr val="F8F4F2"/>
+                      <a:srgbClr val="FBF1EC"/>
                     </a:solidFill>
                   </a:tcPr>
                 </a:tc>
@@ -8037,7 +8235,7 @@
                       <a:r>
                         <a:rPr sz="1400" b="0">
                           <a:solidFill>
-                            <a:srgbClr val="2B2B2B"/>
+                            <a:srgbClr val="26231F"/>
                           </a:solidFill>
                         </a:rPr>
                         <a:t>□</a:t>
@@ -8047,30 +8245,30 @@
                   <a:tcPr anchor="ctr" marL="73152" marR="73152">
                     <a:lnL w="9525" cap="flat" cmpd="sng" algn="ctr">
                       <a:solidFill>
-                        <a:srgbClr val="EBDCD6"/>
+                        <a:srgbClr val="F6DFD5"/>
                       </a:solidFill>
                       <a:prstDash val="solid"/>
                     </a:lnL>
                     <a:lnR w="9525" cap="flat" cmpd="sng" algn="ctr">
                       <a:solidFill>
-                        <a:srgbClr val="EBDCD6"/>
+                        <a:srgbClr val="F6DFD5"/>
                       </a:solidFill>
                       <a:prstDash val="solid"/>
                     </a:lnR>
                     <a:lnT w="9525" cap="flat" cmpd="sng" algn="ctr">
                       <a:solidFill>
-                        <a:srgbClr val="EBDCD6"/>
+                        <a:srgbClr val="F6DFD5"/>
                       </a:solidFill>
                       <a:prstDash val="solid"/>
                     </a:lnT>
                     <a:lnB w="9525" cap="flat" cmpd="sng" algn="ctr">
                       <a:solidFill>
-                        <a:srgbClr val="EBDCD6"/>
+                        <a:srgbClr val="F6DFD5"/>
                       </a:solidFill>
                       <a:prstDash val="solid"/>
                     </a:lnB>
                     <a:solidFill>
-                      <a:srgbClr val="F8F4F2"/>
+                      <a:srgbClr val="FBF1EC"/>
                     </a:solidFill>
                   </a:tcPr>
                 </a:tc>
@@ -8083,7 +8281,7 @@
                       <a:r>
                         <a:rPr sz="1400" b="0">
                           <a:solidFill>
-                            <a:srgbClr val="2B2B2B"/>
+                            <a:srgbClr val="26231F"/>
                           </a:solidFill>
                         </a:rPr>
                         <a:t>□</a:t>
@@ -8093,30 +8291,30 @@
                   <a:tcPr anchor="ctr" marL="73152" marR="73152">
                     <a:lnL w="9525" cap="flat" cmpd="sng" algn="ctr">
                       <a:solidFill>
-                        <a:srgbClr val="EBDCD6"/>
+                        <a:srgbClr val="F6DFD5"/>
                       </a:solidFill>
                       <a:prstDash val="solid"/>
                     </a:lnL>
                     <a:lnR w="9525" cap="flat" cmpd="sng" algn="ctr">
                       <a:solidFill>
-                        <a:srgbClr val="EBDCD6"/>
+                        <a:srgbClr val="F6DFD5"/>
                       </a:solidFill>
                       <a:prstDash val="solid"/>
                     </a:lnR>
                     <a:lnT w="9525" cap="flat" cmpd="sng" algn="ctr">
                       <a:solidFill>
-                        <a:srgbClr val="EBDCD6"/>
+                        <a:srgbClr val="F6DFD5"/>
                       </a:solidFill>
                       <a:prstDash val="solid"/>
                     </a:lnT>
                     <a:lnB w="9525" cap="flat" cmpd="sng" algn="ctr">
                       <a:solidFill>
-                        <a:srgbClr val="EBDCD6"/>
+                        <a:srgbClr val="F6DFD5"/>
                       </a:solidFill>
                       <a:prstDash val="solid"/>
                     </a:lnB>
                     <a:solidFill>
-                      <a:srgbClr val="F8F4F2"/>
+                      <a:srgbClr val="FBF1EC"/>
                     </a:solidFill>
                   </a:tcPr>
                 </a:tc>
@@ -8139,7 +8337,7 @@
     <p:bg>
       <p:bgPr>
         <a:solidFill>
-          <a:srgbClr val="FFFFFF"/>
+          <a:srgbClr val="F6DFD5"/>
         </a:solidFill>
         <a:effectLst/>
       </p:bgPr>
@@ -8159,14 +8357,14 @@
         </p:nvSpPr>
         <p:spPr>
           <a:xfrm>
-            <a:off x="9905695" y="-1463040"/>
-            <a:ext cx="3840480" cy="3840480"/>
+            <a:off x="10180015" y="-1645920"/>
+            <a:ext cx="3474720" cy="3474720"/>
           </a:xfrm>
           <a:prstGeom prst="ellipse">
             <a:avLst/>
           </a:prstGeom>
           <a:solidFill>
-            <a:srgbClr val="EBDCD6"/>
+            <a:srgbClr val="EBC0AD"/>
           </a:solidFill>
           <a:ln>
             <a:noFill/>
@@ -8182,20 +8380,58 @@
       </p:sp>
       <p:sp>
         <p:nvSpPr>
-          <p:cNvPr id="4" name="장식"/>
+          <p:cNvPr id="4" name="상단 라벨"/>
+          <p:cNvSpPr txBox="1"/>
+          <p:nvPr/>
+        </p:nvSpPr>
+        <p:spPr>
+          <a:xfrm>
+            <a:off x="640080" y="274320"/>
+            <a:ext cx="5486400" cy="274320"/>
+          </a:xfrm>
+          <a:prstGeom prst="rect">
+            <a:avLst/>
+          </a:prstGeom>
+          <a:noFill/>
+        </p:spPr>
+        <p:txBody>
+          <a:bodyPr wrap="square" lIns="54864" rIns="54864" tIns="27432" bIns="27432" anchor="ctr">
+            <a:noAutofit/>
+          </a:bodyPr>
+          <a:lstStyle/>
+          <a:p>
+            <a:pPr algn="l">
+              <a:lnSpc>
+                <a:spcPct val="115000"/>
+              </a:lnSpc>
+            </a:pPr>
+            <a:r>
+              <a:rPr sz="900" b="1" i="0" spc="250">
+                <a:solidFill>
+                  <a:srgbClr val="26231F"/>
+                </a:solidFill>
+              </a:rPr>
+              <a:t>INSURANCE CHECK</a:t>
+            </a:r>
+          </a:p>
+        </p:txBody>
+      </p:sp>
+      <p:sp>
+        <p:nvSpPr>
+          <p:cNvPr id="5" name="포인트"/>
           <p:cNvSpPr/>
           <p:nvPr/>
         </p:nvSpPr>
         <p:spPr>
           <a:xfrm>
-            <a:off x="11094415" y="274320"/>
-            <a:ext cx="411480" cy="411480"/>
-          </a:xfrm>
-          <a:prstGeom prst="ellipse">
+            <a:off x="11048695" y="502919"/>
+            <a:ext cx="274320" cy="274320"/>
+          </a:xfrm>
+          <a:prstGeom prst="round2SameRect">
             <a:avLst/>
           </a:prstGeom>
           <a:solidFill>
-            <a:srgbClr val="855A47"/>
+            <a:srgbClr val="FFFFFF"/>
           </a:solidFill>
           <a:ln>
             <a:noFill/>
@@ -8221,8 +8457,8 @@
         </p:nvSpPr>
         <p:spPr>
           <a:xfrm>
-            <a:off x="640080" y="457200"/>
-            <a:ext cx="9722815" cy="868680"/>
+            <a:off x="640080" y="658368"/>
+            <a:ext cx="9082735" cy="868680"/>
           </a:xfrm>
         </p:spPr>
         <p:txBody>
@@ -8239,7 +8475,7 @@
             <a:r>
               <a:rPr sz="3000" b="1" i="0">
                 <a:solidFill>
-                  <a:srgbClr val="422D24"/>
+                  <a:srgbClr val="26231F"/>
                 </a:solidFill>
               </a:rPr>
               <a:t>월 보험료 한눈에</a:t>
@@ -8249,27 +8485,25 @@
       </p:sp>
       <p:sp>
         <p:nvSpPr>
-          <p:cNvPr id="5" name="카드 1"/>
+          <p:cNvPr id="6" name="카드 1"/>
           <p:cNvSpPr/>
           <p:nvPr/>
         </p:nvSpPr>
         <p:spPr>
           <a:xfrm>
-            <a:off x="640080" y="1600200"/>
+            <a:off x="640080" y="1783080"/>
             <a:ext cx="3484778" cy="2926080"/>
           </a:xfrm>
           <a:prstGeom prst="roundRect">
             <a:avLst>
-              <a:gd name="adj" fmla="val 8000"/>
+              <a:gd name="adj" fmla="val 4000"/>
             </a:avLst>
           </a:prstGeom>
           <a:solidFill>
-            <a:srgbClr val="F8F4F2"/>
+            <a:srgbClr val="FBF1EC"/>
           </a:solidFill>
-          <a:ln w="15875">
-            <a:solidFill>
-              <a:srgbClr val="EBDCD6"/>
-            </a:solidFill>
+          <a:ln>
+            <a:noFill/>
           </a:ln>
         </p:spPr>
         <p:txBody>
@@ -8282,20 +8516,49 @@
       </p:sp>
       <p:sp>
         <p:nvSpPr>
-          <p:cNvPr id="6" name="번호 1"/>
+          <p:cNvPr id="7" name="포인트 막대"/>
           <p:cNvSpPr/>
           <p:nvPr/>
         </p:nvSpPr>
         <p:spPr>
           <a:xfrm>
-            <a:off x="822959" y="1783080"/>
+            <a:off x="640080" y="1892807"/>
+            <a:ext cx="54864" cy="2706624"/>
+          </a:xfrm>
+          <a:prstGeom prst="rect">
+            <a:avLst/>
+          </a:prstGeom>
+          <a:solidFill>
+            <a:srgbClr val="D89579"/>
+          </a:solidFill>
+          <a:ln>
+            <a:noFill/>
+          </a:ln>
+        </p:spPr>
+        <p:txBody>
+          <a:bodyPr rtlCol="0" anchor="ctr"/>
+          <a:lstStyle/>
+          <a:p>
+            <a:pPr algn="ctr"/>
+          </a:p>
+        </p:txBody>
+      </p:sp>
+      <p:sp>
+        <p:nvSpPr>
+          <p:cNvPr id="8" name="번호 1"/>
+          <p:cNvSpPr/>
+          <p:nvPr/>
+        </p:nvSpPr>
+        <p:spPr>
+          <a:xfrm>
+            <a:off x="822959" y="1965960"/>
             <a:ext cx="457200" cy="457200"/>
           </a:xfrm>
           <a:prstGeom prst="ellipse">
             <a:avLst/>
           </a:prstGeom>
           <a:solidFill>
-            <a:srgbClr val="855A47"/>
+            <a:srgbClr val="E1D098"/>
           </a:solidFill>
           <a:ln>
             <a:noFill/>
@@ -8315,7 +8578,7 @@
             <a:r>
               <a:rPr sz="1600" b="1" i="0">
                 <a:solidFill>
-                  <a:srgbClr val="FFFFFF"/>
+                  <a:srgbClr val="26231F"/>
                 </a:solidFill>
               </a:rPr>
               <a:t>1</a:t>
@@ -8325,13 +8588,13 @@
       </p:sp>
       <p:sp>
         <p:nvSpPr>
-          <p:cNvPr id="7" name="TextBox 6"/>
+          <p:cNvPr id="9" name="TextBox 8"/>
           <p:cNvSpPr txBox="1"/>
           <p:nvPr/>
         </p:nvSpPr>
         <p:spPr>
           <a:xfrm>
-            <a:off x="777240" y="2377440"/>
+            <a:off x="777240" y="2560320"/>
             <a:ext cx="3210458" cy="640080"/>
           </a:xfrm>
           <a:prstGeom prst="rect">
@@ -8353,7 +8616,7 @@
             <a:r>
               <a:rPr sz="1700" b="1" i="0">
                 <a:solidFill>
-                  <a:srgbClr val="422D24"/>
+                  <a:srgbClr val="493127"/>
                 </a:solidFill>
               </a:rPr>
               <a:t>월 보험료 합계</a:t>
@@ -8363,13 +8626,13 @@
       </p:sp>
       <p:sp>
         <p:nvSpPr>
-          <p:cNvPr id="8" name="TextBox 7"/>
+          <p:cNvPr id="10" name="TextBox 9"/>
           <p:cNvSpPr txBox="1"/>
           <p:nvPr/>
         </p:nvSpPr>
         <p:spPr>
           <a:xfrm>
-            <a:off x="777240" y="3063240"/>
+            <a:off x="777240" y="3246120"/>
             <a:ext cx="3210458" cy="1325880"/>
           </a:xfrm>
           <a:prstGeom prst="rect">
@@ -8391,7 +8654,7 @@
             <a:r>
               <a:rPr sz="3000" b="0" i="0">
                 <a:solidFill>
-                  <a:srgbClr val="2B2B2B"/>
+                  <a:srgbClr val="26231F"/>
                 </a:solidFill>
               </a:rPr>
               <a:t>0원</a:t>
@@ -8401,27 +8664,25 @@
       </p:sp>
       <p:sp>
         <p:nvSpPr>
-          <p:cNvPr id="9" name="카드 2"/>
+          <p:cNvPr id="11" name="카드 2"/>
           <p:cNvSpPr/>
           <p:nvPr/>
         </p:nvSpPr>
         <p:spPr>
           <a:xfrm>
-            <a:off x="4353458" y="1600200"/>
+            <a:off x="4353458" y="1783080"/>
             <a:ext cx="3484778" cy="2926080"/>
           </a:xfrm>
           <a:prstGeom prst="roundRect">
             <a:avLst>
-              <a:gd name="adj" fmla="val 8000"/>
+              <a:gd name="adj" fmla="val 4000"/>
             </a:avLst>
           </a:prstGeom>
           <a:solidFill>
-            <a:srgbClr val="F8F4F2"/>
+            <a:srgbClr val="FBF1EC"/>
           </a:solidFill>
-          <a:ln w="15875">
-            <a:solidFill>
-              <a:srgbClr val="EBDCD6"/>
-            </a:solidFill>
+          <a:ln>
+            <a:noFill/>
           </a:ln>
         </p:spPr>
         <p:txBody>
@@ -8434,20 +8695,49 @@
       </p:sp>
       <p:sp>
         <p:nvSpPr>
-          <p:cNvPr id="10" name="번호 2"/>
+          <p:cNvPr id="12" name="포인트 막대"/>
           <p:cNvSpPr/>
           <p:nvPr/>
         </p:nvSpPr>
         <p:spPr>
           <a:xfrm>
-            <a:off x="4536338" y="1783080"/>
+            <a:off x="4353458" y="1892807"/>
+            <a:ext cx="54864" cy="2706624"/>
+          </a:xfrm>
+          <a:prstGeom prst="rect">
+            <a:avLst/>
+          </a:prstGeom>
+          <a:solidFill>
+            <a:srgbClr val="D89579"/>
+          </a:solidFill>
+          <a:ln>
+            <a:noFill/>
+          </a:ln>
+        </p:spPr>
+        <p:txBody>
+          <a:bodyPr rtlCol="0" anchor="ctr"/>
+          <a:lstStyle/>
+          <a:p>
+            <a:pPr algn="ctr"/>
+          </a:p>
+        </p:txBody>
+      </p:sp>
+      <p:sp>
+        <p:nvSpPr>
+          <p:cNvPr id="13" name="번호 2"/>
+          <p:cNvSpPr/>
+          <p:nvPr/>
+        </p:nvSpPr>
+        <p:spPr>
+          <a:xfrm>
+            <a:off x="4536338" y="1965960"/>
             <a:ext cx="457200" cy="457200"/>
           </a:xfrm>
           <a:prstGeom prst="ellipse">
             <a:avLst/>
           </a:prstGeom>
           <a:solidFill>
-            <a:srgbClr val="855A47"/>
+            <a:srgbClr val="E1D098"/>
           </a:solidFill>
           <a:ln>
             <a:noFill/>
@@ -8467,7 +8757,7 @@
             <a:r>
               <a:rPr sz="1600" b="1" i="0">
                 <a:solidFill>
-                  <a:srgbClr val="FFFFFF"/>
+                  <a:srgbClr val="26231F"/>
                 </a:solidFill>
               </a:rPr>
               <a:t>2</a:t>
@@ -8477,13 +8767,13 @@
       </p:sp>
       <p:sp>
         <p:nvSpPr>
-          <p:cNvPr id="11" name="TextBox 10"/>
+          <p:cNvPr id="14" name="TextBox 13"/>
           <p:cNvSpPr txBox="1"/>
           <p:nvPr/>
         </p:nvSpPr>
         <p:spPr>
           <a:xfrm>
-            <a:off x="4490618" y="2377440"/>
+            <a:off x="4490618" y="2560320"/>
             <a:ext cx="3210458" cy="640080"/>
           </a:xfrm>
           <a:prstGeom prst="rect">
@@ -8505,7 +8795,7 @@
             <a:r>
               <a:rPr sz="1700" b="1" i="0">
                 <a:solidFill>
-                  <a:srgbClr val="422D24"/>
+                  <a:srgbClr val="493127"/>
                 </a:solidFill>
               </a:rPr>
               <a:t>연 보험료 합계</a:t>
@@ -8515,13 +8805,13 @@
       </p:sp>
       <p:sp>
         <p:nvSpPr>
-          <p:cNvPr id="12" name="TextBox 11"/>
+          <p:cNvPr id="15" name="TextBox 14"/>
           <p:cNvSpPr txBox="1"/>
           <p:nvPr/>
         </p:nvSpPr>
         <p:spPr>
           <a:xfrm>
-            <a:off x="4490618" y="3063240"/>
+            <a:off x="4490618" y="3246120"/>
             <a:ext cx="3210458" cy="1325880"/>
           </a:xfrm>
           <a:prstGeom prst="rect">
@@ -8543,7 +8833,7 @@
             <a:r>
               <a:rPr sz="3000" b="0" i="0">
                 <a:solidFill>
-                  <a:srgbClr val="2B2B2B"/>
+                  <a:srgbClr val="26231F"/>
                 </a:solidFill>
               </a:rPr>
               <a:t>0원</a:t>
@@ -8553,27 +8843,25 @@
       </p:sp>
       <p:sp>
         <p:nvSpPr>
-          <p:cNvPr id="13" name="카드 3"/>
+          <p:cNvPr id="16" name="카드 3"/>
           <p:cNvSpPr/>
           <p:nvPr/>
         </p:nvSpPr>
         <p:spPr>
           <a:xfrm>
-            <a:off x="8066836" y="1600200"/>
+            <a:off x="8066836" y="1783080"/>
             <a:ext cx="3484778" cy="2926080"/>
           </a:xfrm>
           <a:prstGeom prst="roundRect">
             <a:avLst>
-              <a:gd name="adj" fmla="val 8000"/>
+              <a:gd name="adj" fmla="val 4000"/>
             </a:avLst>
           </a:prstGeom>
           <a:solidFill>
-            <a:srgbClr val="F8F4F2"/>
+            <a:srgbClr val="FBF1EC"/>
           </a:solidFill>
-          <a:ln w="15875">
-            <a:solidFill>
-              <a:srgbClr val="EBDCD6"/>
-            </a:solidFill>
+          <a:ln>
+            <a:noFill/>
           </a:ln>
         </p:spPr>
         <p:txBody>
@@ -8586,20 +8874,49 @@
       </p:sp>
       <p:sp>
         <p:nvSpPr>
-          <p:cNvPr id="14" name="번호 3"/>
+          <p:cNvPr id="17" name="포인트 막대"/>
           <p:cNvSpPr/>
           <p:nvPr/>
         </p:nvSpPr>
         <p:spPr>
           <a:xfrm>
-            <a:off x="8249716" y="1783080"/>
+            <a:off x="8066836" y="1892807"/>
+            <a:ext cx="54864" cy="2706624"/>
+          </a:xfrm>
+          <a:prstGeom prst="rect">
+            <a:avLst/>
+          </a:prstGeom>
+          <a:solidFill>
+            <a:srgbClr val="D89579"/>
+          </a:solidFill>
+          <a:ln>
+            <a:noFill/>
+          </a:ln>
+        </p:spPr>
+        <p:txBody>
+          <a:bodyPr rtlCol="0" anchor="ctr"/>
+          <a:lstStyle/>
+          <a:p>
+            <a:pPr algn="ctr"/>
+          </a:p>
+        </p:txBody>
+      </p:sp>
+      <p:sp>
+        <p:nvSpPr>
+          <p:cNvPr id="18" name="번호 3"/>
+          <p:cNvSpPr/>
+          <p:nvPr/>
+        </p:nvSpPr>
+        <p:spPr>
+          <a:xfrm>
+            <a:off x="8249716" y="1965960"/>
             <a:ext cx="457200" cy="457200"/>
           </a:xfrm>
           <a:prstGeom prst="ellipse">
             <a:avLst/>
           </a:prstGeom>
           <a:solidFill>
-            <a:srgbClr val="855A47"/>
+            <a:srgbClr val="E1D098"/>
           </a:solidFill>
           <a:ln>
             <a:noFill/>
@@ -8619,7 +8936,7 @@
             <a:r>
               <a:rPr sz="1600" b="1" i="0">
                 <a:solidFill>
-                  <a:srgbClr val="FFFFFF"/>
+                  <a:srgbClr val="26231F"/>
                 </a:solidFill>
               </a:rPr>
               <a:t>3</a:t>
@@ -8629,13 +8946,13 @@
       </p:sp>
       <p:sp>
         <p:nvSpPr>
-          <p:cNvPr id="15" name="TextBox 14"/>
+          <p:cNvPr id="19" name="TextBox 18"/>
           <p:cNvSpPr txBox="1"/>
           <p:nvPr/>
         </p:nvSpPr>
         <p:spPr>
           <a:xfrm>
-            <a:off x="8203996" y="2377440"/>
+            <a:off x="8203996" y="2560320"/>
             <a:ext cx="3210458" cy="640080"/>
           </a:xfrm>
           <a:prstGeom prst="rect">
@@ -8657,7 +8974,7 @@
             <a:r>
               <a:rPr sz="1700" b="1" i="0">
                 <a:solidFill>
-                  <a:srgbClr val="422D24"/>
+                  <a:srgbClr val="493127"/>
                 </a:solidFill>
               </a:rPr>
               <a:t>월 소득 대비</a:t>
@@ -8667,13 +8984,13 @@
       </p:sp>
       <p:sp>
         <p:nvSpPr>
-          <p:cNvPr id="16" name="TextBox 15"/>
+          <p:cNvPr id="20" name="TextBox 19"/>
           <p:cNvSpPr txBox="1"/>
           <p:nvPr/>
         </p:nvSpPr>
         <p:spPr>
           <a:xfrm>
-            <a:off x="8203996" y="3063240"/>
+            <a:off x="8203996" y="3246120"/>
             <a:ext cx="3210458" cy="1325880"/>
           </a:xfrm>
           <a:prstGeom prst="rect">
@@ -8695,7 +9012,7 @@
             <a:r>
               <a:rPr sz="3000" b="0" i="0">
                 <a:solidFill>
-                  <a:srgbClr val="2B2B2B"/>
+                  <a:srgbClr val="26231F"/>
                 </a:solidFill>
               </a:rPr>
               <a:t>0 %</a:t>
@@ -8705,13 +9022,13 @@
       </p:sp>
       <p:sp>
         <p:nvSpPr>
-          <p:cNvPr id="17" name="안내"/>
+          <p:cNvPr id="21" name="안내"/>
           <p:cNvSpPr txBox="1"/>
           <p:nvPr/>
         </p:nvSpPr>
         <p:spPr>
           <a:xfrm>
-            <a:off x="640080" y="4709160"/>
+            <a:off x="640080" y="4892040"/>
             <a:ext cx="10911535" cy="365760"/>
           </a:xfrm>
           <a:prstGeom prst="rect">
@@ -8755,7 +9072,7 @@
     <p:bg>
       <p:bgPr>
         <a:solidFill>
-          <a:srgbClr val="FFFFFF"/>
+          <a:srgbClr val="F6DFD5"/>
         </a:solidFill>
         <a:effectLst/>
       </p:bgPr>
@@ -8775,14 +9092,14 @@
         </p:nvSpPr>
         <p:spPr>
           <a:xfrm>
-            <a:off x="9905695" y="-1463040"/>
-            <a:ext cx="3840480" cy="3840480"/>
+            <a:off x="10180015" y="-1645920"/>
+            <a:ext cx="3474720" cy="3474720"/>
           </a:xfrm>
           <a:prstGeom prst="ellipse">
             <a:avLst/>
           </a:prstGeom>
           <a:solidFill>
-            <a:srgbClr val="EBDCD6"/>
+            <a:srgbClr val="EBC0AD"/>
           </a:solidFill>
           <a:ln>
             <a:noFill/>
@@ -8798,20 +9115,58 @@
       </p:sp>
       <p:sp>
         <p:nvSpPr>
-          <p:cNvPr id="4" name="장식"/>
+          <p:cNvPr id="4" name="상단 라벨"/>
+          <p:cNvSpPr txBox="1"/>
+          <p:nvPr/>
+        </p:nvSpPr>
+        <p:spPr>
+          <a:xfrm>
+            <a:off x="640080" y="274320"/>
+            <a:ext cx="5486400" cy="274320"/>
+          </a:xfrm>
+          <a:prstGeom prst="rect">
+            <a:avLst/>
+          </a:prstGeom>
+          <a:noFill/>
+        </p:spPr>
+        <p:txBody>
+          <a:bodyPr wrap="square" lIns="54864" rIns="54864" tIns="27432" bIns="27432" anchor="ctr">
+            <a:noAutofit/>
+          </a:bodyPr>
+          <a:lstStyle/>
+          <a:p>
+            <a:pPr algn="l">
+              <a:lnSpc>
+                <a:spcPct val="115000"/>
+              </a:lnSpc>
+            </a:pPr>
+            <a:r>
+              <a:rPr sz="900" b="1" i="0" spc="250">
+                <a:solidFill>
+                  <a:srgbClr val="26231F"/>
+                </a:solidFill>
+              </a:rPr>
+              <a:t>INSURANCE CHECK</a:t>
+            </a:r>
+          </a:p>
+        </p:txBody>
+      </p:sp>
+      <p:sp>
+        <p:nvSpPr>
+          <p:cNvPr id="5" name="포인트"/>
           <p:cNvSpPr/>
           <p:nvPr/>
         </p:nvSpPr>
         <p:spPr>
           <a:xfrm>
-            <a:off x="11094415" y="274320"/>
-            <a:ext cx="411480" cy="411480"/>
-          </a:xfrm>
-          <a:prstGeom prst="ellipse">
+            <a:off x="11048695" y="502919"/>
+            <a:ext cx="274320" cy="274320"/>
+          </a:xfrm>
+          <a:prstGeom prst="round2SameRect">
             <a:avLst/>
           </a:prstGeom>
           <a:solidFill>
-            <a:srgbClr val="855A47"/>
+            <a:srgbClr val="FFFFFF"/>
           </a:solidFill>
           <a:ln>
             <a:noFill/>
@@ -8837,8 +9192,8 @@
         </p:nvSpPr>
         <p:spPr>
           <a:xfrm>
-            <a:off x="640080" y="457200"/>
-            <a:ext cx="9722815" cy="868680"/>
+            <a:off x="640080" y="658368"/>
+            <a:ext cx="9082735" cy="868680"/>
           </a:xfrm>
         </p:spPr>
         <p:txBody>
@@ -8855,7 +9210,7 @@
             <a:r>
               <a:rPr sz="3000" b="1" i="0">
                 <a:solidFill>
-                  <a:srgbClr val="422D24"/>
+                  <a:srgbClr val="26231F"/>
                 </a:solidFill>
               </a:rPr>
               <a:t>점검 메모와 다음 할 일</a:t>
@@ -8865,27 +9220,25 @@
       </p:sp>
       <p:sp>
         <p:nvSpPr>
-          <p:cNvPr id="5" name="카드 1"/>
+          <p:cNvPr id="6" name="카드 1"/>
           <p:cNvSpPr/>
           <p:nvPr/>
         </p:nvSpPr>
         <p:spPr>
           <a:xfrm>
-            <a:off x="640080" y="1600200"/>
-            <a:ext cx="3484778" cy="4160520"/>
+            <a:off x="640080" y="1783080"/>
+            <a:ext cx="3484778" cy="3931920"/>
           </a:xfrm>
           <a:prstGeom prst="roundRect">
             <a:avLst>
-              <a:gd name="adj" fmla="val 8000"/>
+              <a:gd name="adj" fmla="val 4000"/>
             </a:avLst>
           </a:prstGeom>
           <a:solidFill>
-            <a:srgbClr val="F8F4F2"/>
+            <a:srgbClr val="FBF1EC"/>
           </a:solidFill>
-          <a:ln w="15875">
-            <a:solidFill>
-              <a:srgbClr val="EBDCD6"/>
-            </a:solidFill>
+          <a:ln>
+            <a:noFill/>
           </a:ln>
         </p:spPr>
         <p:txBody>
@@ -8898,20 +9251,49 @@
       </p:sp>
       <p:sp>
         <p:nvSpPr>
-          <p:cNvPr id="6" name="번호 1"/>
+          <p:cNvPr id="7" name="포인트 막대"/>
           <p:cNvSpPr/>
           <p:nvPr/>
         </p:nvSpPr>
         <p:spPr>
           <a:xfrm>
-            <a:off x="822959" y="1783080"/>
+            <a:off x="640080" y="1892807"/>
+            <a:ext cx="54864" cy="3712463"/>
+          </a:xfrm>
+          <a:prstGeom prst="rect">
+            <a:avLst/>
+          </a:prstGeom>
+          <a:solidFill>
+            <a:srgbClr val="D89579"/>
+          </a:solidFill>
+          <a:ln>
+            <a:noFill/>
+          </a:ln>
+        </p:spPr>
+        <p:txBody>
+          <a:bodyPr rtlCol="0" anchor="ctr"/>
+          <a:lstStyle/>
+          <a:p>
+            <a:pPr algn="ctr"/>
+          </a:p>
+        </p:txBody>
+      </p:sp>
+      <p:sp>
+        <p:nvSpPr>
+          <p:cNvPr id="8" name="번호 1"/>
+          <p:cNvSpPr/>
+          <p:nvPr/>
+        </p:nvSpPr>
+        <p:spPr>
+          <a:xfrm>
+            <a:off x="822959" y="1965960"/>
             <a:ext cx="457200" cy="457200"/>
           </a:xfrm>
           <a:prstGeom prst="ellipse">
             <a:avLst/>
           </a:prstGeom>
           <a:solidFill>
-            <a:srgbClr val="855A47"/>
+            <a:srgbClr val="E1D098"/>
           </a:solidFill>
           <a:ln>
             <a:noFill/>
@@ -8931,7 +9313,7 @@
             <a:r>
               <a:rPr sz="1600" b="1" i="0">
                 <a:solidFill>
-                  <a:srgbClr val="FFFFFF"/>
+                  <a:srgbClr val="26231F"/>
                 </a:solidFill>
               </a:rPr>
               <a:t>1</a:t>
@@ -8941,13 +9323,13 @@
       </p:sp>
       <p:sp>
         <p:nvSpPr>
-          <p:cNvPr id="7" name="TextBox 6"/>
+          <p:cNvPr id="9" name="TextBox 8"/>
           <p:cNvSpPr txBox="1"/>
           <p:nvPr/>
         </p:nvSpPr>
         <p:spPr>
           <a:xfrm>
-            <a:off x="777240" y="2377440"/>
+            <a:off x="777240" y="2560320"/>
             <a:ext cx="3210458" cy="640080"/>
           </a:xfrm>
           <a:prstGeom prst="rect">
@@ -8969,7 +9351,7 @@
             <a:r>
               <a:rPr sz="1800" b="1" i="0">
                 <a:solidFill>
-                  <a:srgbClr val="422D24"/>
+                  <a:srgbClr val="493127"/>
                 </a:solidFill>
               </a:rPr>
               <a:t>확인할 것</a:t>
@@ -8979,14 +9361,14 @@
       </p:sp>
       <p:sp>
         <p:nvSpPr>
-          <p:cNvPr id="8" name="TextBox 7"/>
+          <p:cNvPr id="10" name="TextBox 9"/>
           <p:cNvSpPr txBox="1"/>
           <p:nvPr/>
         </p:nvSpPr>
         <p:spPr>
           <a:xfrm>
-            <a:off x="777240" y="3063240"/>
-            <a:ext cx="3210458" cy="2560320"/>
+            <a:off x="777240" y="3246120"/>
+            <a:ext cx="3210458" cy="2331720"/>
           </a:xfrm>
           <a:prstGeom prst="rect">
             <a:avLst/>
@@ -9007,7 +9389,7 @@
             <a:r>
               <a:rPr sz="1500" b="0" i="0">
                 <a:solidFill>
-                  <a:srgbClr val="2B2B2B"/>
+                  <a:srgbClr val="26231F"/>
                 </a:solidFill>
               </a:rPr>
               <a:t>내용을 입력하세요</a:t>
@@ -9017,27 +9399,25 @@
       </p:sp>
       <p:sp>
         <p:nvSpPr>
-          <p:cNvPr id="9" name="카드 2"/>
+          <p:cNvPr id="11" name="카드 2"/>
           <p:cNvSpPr/>
           <p:nvPr/>
         </p:nvSpPr>
         <p:spPr>
           <a:xfrm>
-            <a:off x="4353458" y="1600200"/>
-            <a:ext cx="3484778" cy="4160520"/>
+            <a:off x="4353458" y="1783080"/>
+            <a:ext cx="3484778" cy="3931920"/>
           </a:xfrm>
           <a:prstGeom prst="roundRect">
             <a:avLst>
-              <a:gd name="adj" fmla="val 8000"/>
+              <a:gd name="adj" fmla="val 4000"/>
             </a:avLst>
           </a:prstGeom>
           <a:solidFill>
-            <a:srgbClr val="F8F4F2"/>
+            <a:srgbClr val="FBF1EC"/>
           </a:solidFill>
-          <a:ln w="15875">
-            <a:solidFill>
-              <a:srgbClr val="EBDCD6"/>
-            </a:solidFill>
+          <a:ln>
+            <a:noFill/>
           </a:ln>
         </p:spPr>
         <p:txBody>
@@ -9050,20 +9430,49 @@
       </p:sp>
       <p:sp>
         <p:nvSpPr>
-          <p:cNvPr id="10" name="번호 2"/>
+          <p:cNvPr id="12" name="포인트 막대"/>
           <p:cNvSpPr/>
           <p:nvPr/>
         </p:nvSpPr>
         <p:spPr>
           <a:xfrm>
-            <a:off x="4536338" y="1783080"/>
+            <a:off x="4353458" y="1892807"/>
+            <a:ext cx="54864" cy="3712463"/>
+          </a:xfrm>
+          <a:prstGeom prst="rect">
+            <a:avLst/>
+          </a:prstGeom>
+          <a:solidFill>
+            <a:srgbClr val="D89579"/>
+          </a:solidFill>
+          <a:ln>
+            <a:noFill/>
+          </a:ln>
+        </p:spPr>
+        <p:txBody>
+          <a:bodyPr rtlCol="0" anchor="ctr"/>
+          <a:lstStyle/>
+          <a:p>
+            <a:pPr algn="ctr"/>
+          </a:p>
+        </p:txBody>
+      </p:sp>
+      <p:sp>
+        <p:nvSpPr>
+          <p:cNvPr id="13" name="번호 2"/>
+          <p:cNvSpPr/>
+          <p:nvPr/>
+        </p:nvSpPr>
+        <p:spPr>
+          <a:xfrm>
+            <a:off x="4536338" y="1965960"/>
             <a:ext cx="457200" cy="457200"/>
           </a:xfrm>
           <a:prstGeom prst="ellipse">
             <a:avLst/>
           </a:prstGeom>
           <a:solidFill>
-            <a:srgbClr val="855A47"/>
+            <a:srgbClr val="E1D098"/>
           </a:solidFill>
           <a:ln>
             <a:noFill/>
@@ -9083,7 +9492,7 @@
             <a:r>
               <a:rPr sz="1600" b="1" i="0">
                 <a:solidFill>
-                  <a:srgbClr val="FFFFFF"/>
+                  <a:srgbClr val="26231F"/>
                 </a:solidFill>
               </a:rPr>
               <a:t>2</a:t>
@@ -9093,13 +9502,13 @@
       </p:sp>
       <p:sp>
         <p:nvSpPr>
-          <p:cNvPr id="11" name="TextBox 10"/>
+          <p:cNvPr id="14" name="TextBox 13"/>
           <p:cNvSpPr txBox="1"/>
           <p:nvPr/>
         </p:nvSpPr>
         <p:spPr>
           <a:xfrm>
-            <a:off x="4490618" y="2377440"/>
+            <a:off x="4490618" y="2560320"/>
             <a:ext cx="3210458" cy="640080"/>
           </a:xfrm>
           <a:prstGeom prst="rect">
@@ -9121,7 +9530,7 @@
             <a:r>
               <a:rPr sz="1800" b="1" i="0">
                 <a:solidFill>
-                  <a:srgbClr val="422D24"/>
+                  <a:srgbClr val="493127"/>
                 </a:solidFill>
               </a:rPr>
               <a:t>문의할 것</a:t>
@@ -9131,14 +9540,14 @@
       </p:sp>
       <p:sp>
         <p:nvSpPr>
-          <p:cNvPr id="12" name="TextBox 11"/>
+          <p:cNvPr id="15" name="TextBox 14"/>
           <p:cNvSpPr txBox="1"/>
           <p:nvPr/>
         </p:nvSpPr>
         <p:spPr>
           <a:xfrm>
-            <a:off x="4490618" y="3063240"/>
-            <a:ext cx="3210458" cy="2560320"/>
+            <a:off x="4490618" y="3246120"/>
+            <a:ext cx="3210458" cy="2331720"/>
           </a:xfrm>
           <a:prstGeom prst="rect">
             <a:avLst/>
@@ -9159,7 +9568,7 @@
             <a:r>
               <a:rPr sz="1500" b="0" i="0">
                 <a:solidFill>
-                  <a:srgbClr val="2B2B2B"/>
+                  <a:srgbClr val="26231F"/>
                 </a:solidFill>
               </a:rPr>
               <a:t>내용을 입력하세요</a:t>
@@ -9169,27 +9578,25 @@
       </p:sp>
       <p:sp>
         <p:nvSpPr>
-          <p:cNvPr id="13" name="카드 3"/>
+          <p:cNvPr id="16" name="카드 3"/>
           <p:cNvSpPr/>
           <p:nvPr/>
         </p:nvSpPr>
         <p:spPr>
           <a:xfrm>
-            <a:off x="8066836" y="1600200"/>
-            <a:ext cx="3484778" cy="4160520"/>
+            <a:off x="8066836" y="1783080"/>
+            <a:ext cx="3484778" cy="3931920"/>
           </a:xfrm>
           <a:prstGeom prst="roundRect">
             <a:avLst>
-              <a:gd name="adj" fmla="val 8000"/>
+              <a:gd name="adj" fmla="val 4000"/>
             </a:avLst>
           </a:prstGeom>
           <a:solidFill>
-            <a:srgbClr val="F8F4F2"/>
+            <a:srgbClr val="FBF1EC"/>
           </a:solidFill>
-          <a:ln w="15875">
-            <a:solidFill>
-              <a:srgbClr val="EBDCD6"/>
-            </a:solidFill>
+          <a:ln>
+            <a:noFill/>
           </a:ln>
         </p:spPr>
         <p:txBody>
@@ -9202,20 +9609,49 @@
       </p:sp>
       <p:sp>
         <p:nvSpPr>
-          <p:cNvPr id="14" name="번호 3"/>
+          <p:cNvPr id="17" name="포인트 막대"/>
           <p:cNvSpPr/>
           <p:nvPr/>
         </p:nvSpPr>
         <p:spPr>
           <a:xfrm>
-            <a:off x="8249716" y="1783080"/>
+            <a:off x="8066836" y="1892807"/>
+            <a:ext cx="54864" cy="3712463"/>
+          </a:xfrm>
+          <a:prstGeom prst="rect">
+            <a:avLst/>
+          </a:prstGeom>
+          <a:solidFill>
+            <a:srgbClr val="D89579"/>
+          </a:solidFill>
+          <a:ln>
+            <a:noFill/>
+          </a:ln>
+        </p:spPr>
+        <p:txBody>
+          <a:bodyPr rtlCol="0" anchor="ctr"/>
+          <a:lstStyle/>
+          <a:p>
+            <a:pPr algn="ctr"/>
+          </a:p>
+        </p:txBody>
+      </p:sp>
+      <p:sp>
+        <p:nvSpPr>
+          <p:cNvPr id="18" name="번호 3"/>
+          <p:cNvSpPr/>
+          <p:nvPr/>
+        </p:nvSpPr>
+        <p:spPr>
+          <a:xfrm>
+            <a:off x="8249716" y="1965960"/>
             <a:ext cx="457200" cy="457200"/>
           </a:xfrm>
           <a:prstGeom prst="ellipse">
             <a:avLst/>
           </a:prstGeom>
           <a:solidFill>
-            <a:srgbClr val="855A47"/>
+            <a:srgbClr val="E1D098"/>
           </a:solidFill>
           <a:ln>
             <a:noFill/>
@@ -9235,7 +9671,7 @@
             <a:r>
               <a:rPr sz="1600" b="1" i="0">
                 <a:solidFill>
-                  <a:srgbClr val="FFFFFF"/>
+                  <a:srgbClr val="26231F"/>
                 </a:solidFill>
               </a:rPr>
               <a:t>3</a:t>
@@ -9245,13 +9681,13 @@
       </p:sp>
       <p:sp>
         <p:nvSpPr>
-          <p:cNvPr id="15" name="TextBox 14"/>
+          <p:cNvPr id="19" name="TextBox 18"/>
           <p:cNvSpPr txBox="1"/>
           <p:nvPr/>
         </p:nvSpPr>
         <p:spPr>
           <a:xfrm>
-            <a:off x="8203996" y="2377440"/>
+            <a:off x="8203996" y="2560320"/>
             <a:ext cx="3210458" cy="640080"/>
           </a:xfrm>
           <a:prstGeom prst="rect">
@@ -9273,7 +9709,7 @@
             <a:r>
               <a:rPr sz="1800" b="1" i="0">
                 <a:solidFill>
-                  <a:srgbClr val="422D24"/>
+                  <a:srgbClr val="493127"/>
                 </a:solidFill>
               </a:rPr>
               <a:t>정리할 날짜</a:t>
@@ -9283,14 +9719,14 @@
       </p:sp>
       <p:sp>
         <p:nvSpPr>
-          <p:cNvPr id="16" name="TextBox 15"/>
+          <p:cNvPr id="20" name="TextBox 19"/>
           <p:cNvSpPr txBox="1"/>
           <p:nvPr/>
         </p:nvSpPr>
         <p:spPr>
           <a:xfrm>
-            <a:off x="8203996" y="3063240"/>
-            <a:ext cx="3210458" cy="2560320"/>
+            <a:off x="8203996" y="3246120"/>
+            <a:ext cx="3210458" cy="2331720"/>
           </a:xfrm>
           <a:prstGeom prst="rect">
             <a:avLst/>
@@ -9311,7 +9747,7 @@
             <a:r>
               <a:rPr sz="1500" b="0" i="0">
                 <a:solidFill>
-                  <a:srgbClr val="2B2B2B"/>
+                  <a:srgbClr val="26231F"/>
                 </a:solidFill>
               </a:rPr>
               <a:t>내용을 입력하세요</a:t>
@@ -9321,13 +9757,13 @@
       </p:sp>
       <p:sp>
         <p:nvSpPr>
-          <p:cNvPr id="17" name="안내 문구"/>
+          <p:cNvPr id="21" name="안내 문구"/>
           <p:cNvSpPr txBox="1"/>
           <p:nvPr/>
         </p:nvSpPr>
         <p:spPr>
           <a:xfrm>
-            <a:off x="640080" y="5852160"/>
+            <a:off x="640080" y="5806440"/>
             <a:ext cx="10911535" cy="548640"/>
           </a:xfrm>
           <a:prstGeom prst="rect">
@@ -9376,34 +9812,34 @@
         <a:sysClr val="window" lastClr="FFFFFF"/>
       </a:lt1>
       <a:dk2>
-        <a:srgbClr val="422D24"/>
+        <a:srgbClr val="493127"/>
       </a:dk2>
       <a:lt2>
-        <a:srgbClr val="F8F4F2"/>
+        <a:srgbClr val="FBF1EC"/>
       </a:lt2>
       <a:accent1>
-        <a:srgbClr val="855A47"/>
+        <a:srgbClr val="D89579"/>
       </a:accent1>
       <a:accent2>
-        <a:srgbClr val="478578"/>
+        <a:srgbClr val="E1D098"/>
       </a:accent2>
       <a:accent3>
-        <a:srgbClr val="422D24"/>
+        <a:srgbClr val="493127"/>
       </a:accent3>
       <a:accent4>
-        <a:srgbClr val="EBDCD6"/>
+        <a:srgbClr val="F6DFD5"/>
       </a:accent4>
       <a:accent5>
-        <a:srgbClr val="667060"/>
+        <a:srgbClr val="DCB288"/>
       </a:accent5>
       <a:accent6>
-        <a:srgbClr val="8E817C"/>
+        <a:srgbClr val="92837D"/>
       </a:accent6>
       <a:hlink>
-        <a:srgbClr val="855A47"/>
+        <a:srgbClr val="D89579"/>
       </a:hlink>
       <a:folHlink>
-        <a:srgbClr val="422D24"/>
+        <a:srgbClr val="493127"/>
       </a:folHlink>
     </a:clrScheme>
     <a:fontScheme name="Office">
